--- a/week-8/cen429-week-8-sunum.pptx
+++ b/week-8/cen429-week-8-sunum.pptx
@@ -33,16 +33,6 @@
     <p:sldId id="281" r:id="rId33"/>
     <p:sldId id="282" r:id="rId34"/>
     <p:sldId id="283" r:id="rId35"/>
-    <p:sldId id="284" r:id="rId36"/>
-    <p:sldId id="285" r:id="rId37"/>
-    <p:sldId id="286" r:id="rId38"/>
-    <p:sldId id="287" r:id="rId39"/>
-    <p:sldId id="288" r:id="rId40"/>
-    <p:sldId id="289" r:id="rId41"/>
-    <p:sldId id="290" r:id="rId42"/>
-    <p:sldId id="291" r:id="rId43"/>
-    <p:sldId id="292" r:id="rId44"/>
-    <p:sldId id="293" r:id="rId45"/>
   </p:sldIdLst>
   <p:sldSz cx="12191695" cy="6858000" type="screen4x3"/>
   <p:notesSz cx="6858000" cy="9144000"/>
@@ -679,7 +669,7 @@
           <a:lstStyle/>
           <a:p>
             <a:r>
-              <a:t>1) SQL enjeksiyonu → PreparedStatement. 2) Etiket doğrulanmadan açık metin kullanılıyor, Final dönüşü denetlenmiyor. 3) Fail-open: hata yutuluyor, bağlantı kabul ediliyor.</a:t>
+              <a:t>1) SQL enjeksiyonu; kesin çözüm parametreli sorgu (PreparedStatement) — veri asla komut olarak yorumlanmaz, string birleştirme yapılmaz. 2) Etiket doğrulanmadan açık metin kullanılıyor, Final dönüşü denetlenmiyor. 3) Fail-open: hata yutuluyor, bağlantı kabul ediliyor.</a:t>
             </a:r>
           </a:p>
         </p:txBody>
@@ -750,76 +740,6 @@
           <a:p>
             <a:r>
               <a:t>Cevaplar 8. hafta sayfasında, açılır kutularda.</a:t>
-            </a:r>
-          </a:p>
-        </p:txBody>
-      </p:sp>
-      <p:sp>
-        <p:nvSpPr>
-          <p:cNvPr id="4" name="Slide Number Placeholder 3"/>
-          <p:cNvSpPr>
-            <a:spLocks noGrp="1"/>
-          </p:cNvSpPr>
-          <p:nvPr>
-            <p:ph type="sldNum" idx="5" sz="quarter"/>
-          </p:nvPr>
-        </p:nvSpPr>
-        <p:spPr/>
-      </p:sp>
-    </p:spTree>
-  </p:cSld>
-  <p:clrMapOvr>
-    <a:masterClrMapping/>
-  </p:clrMapOvr>
-</p:notes>
-</file>
-
-<file path=ppt/notesSlides/notesSlide5.xml><?xml version="1.0" encoding="utf-8"?>
-<p:notes xmlns:a="http://schemas.openxmlformats.org/drawingml/2006/main" xmlns:p="http://schemas.openxmlformats.org/presentationml/2006/main" xmlns:r="http://schemas.openxmlformats.org/officeDocument/2006/relationships">
-  <p:cSld>
-    <p:spTree>
-      <p:nvGrpSpPr>
-        <p:cNvPr id="1" name=""/>
-        <p:cNvGrpSpPr/>
-        <p:nvPr/>
-      </p:nvGrpSpPr>
-      <p:grpSpPr>
-        <a:xfrm>
-          <a:off x="0" y="0"/>
-          <a:ext cx="0" cy="0"/>
-          <a:chOff x="0" y="0"/>
-          <a:chExt cx="0" cy="0"/>
-        </a:xfrm>
-      </p:grpSpPr>
-      <p:sp>
-        <p:nvSpPr>
-          <p:cNvPr id="2" name="Slide Image Placeholder 1"/>
-          <p:cNvSpPr>
-            <a:spLocks noGrp="1"/>
-          </p:cNvSpPr>
-          <p:nvPr>
-            <p:ph type="sldImg" idx="2"/>
-          </p:nvPr>
-        </p:nvSpPr>
-        <p:spPr/>
-      </p:sp>
-      <p:sp>
-        <p:nvSpPr>
-          <p:cNvPr id="3" name="Notes Placeholder 2"/>
-          <p:cNvSpPr>
-            <a:spLocks noGrp="1"/>
-          </p:cNvSpPr>
-          <p:nvPr>
-            <p:ph type="body" idx="3" sz="quarter"/>
-          </p:nvPr>
-        </p:nvSpPr>
-        <p:spPr/>
-        <p:txBody>
-          <a:bodyPr/>
-          <a:lstStyle/>
-          <a:p>
-            <a:r>
-              <a:t>Quiz-1 kapsamı 1-6. hafta. Her haftanın anahtar noktalarını ve çok sorulan ayrımları tekrar ediyoruz.</a:t>
             </a:r>
           </a:p>
         </p:txBody>
@@ -4467,7 +4387,7 @@
                             <a:srgbClr val="1F2D3A"/>
                           </a:solidFill>
                         </a:rPr>
-                        <a:t>4. hafta: CERT çiftleri, biçim dizisi, UAF, UB, korumalar</a:t>
+                        <a:t>4. hafta: CERT çiftleri, biçim dizesi, UAF, UB, korumalar</a:t>
                       </a:r>
                     </a:p>
                   </a:txBody>
@@ -4740,14 +4660,14 @@
                   <a:srgbClr val="006D77"/>
                 </a:solidFill>
               </a:rPr>
-              <a:t>Çalışma planı — şema</a:t>
+              <a:t>Vize notu hesabı — şema</a:t>
             </a:r>
           </a:p>
         </p:txBody>
       </p:sp>
       <p:pic>
         <p:nvPicPr>
-          <p:cNvPr id="7" name="Picture 6" descr="h08-04-calisma-plani.png"/>
+          <p:cNvPr id="7" name="Picture 6" descr="h08-03-vize-hesabi.png"/>
           <p:cNvPicPr>
             <a:picLocks noChangeAspect="1"/>
           </p:cNvPicPr>
@@ -4761,8 +4681,8 @@
         </p:blipFill>
         <p:spPr>
           <a:xfrm>
-            <a:off x="2046645" y="1325880"/>
-            <a:ext cx="8098404" cy="3864472"/>
+            <a:off x="640080" y="1325880"/>
+            <a:ext cx="10911535" cy="3794094"/>
           </a:xfrm>
           <a:prstGeom prst="rect">
             <a:avLst/>
@@ -4934,184 +4854,40 @@
           <a:lstStyle/>
           <a:p>
             <a:r>
-              <a:rPr sz="2600" b="1">
+              <a:rPr sz="3000" b="1">
                 <a:solidFill>
                   <a:srgbClr val="006D77"/>
                 </a:solidFill>
               </a:rPr>
-              <a:t>Örnek: hatayı bulun (1)</a:t>
-            </a:r>
-          </a:p>
-        </p:txBody>
-      </p:sp>
-      <p:sp>
-        <p:nvSpPr>
-          <p:cNvPr id="7" name="Rectangle 6"/>
-          <p:cNvSpPr/>
-          <p:nvPr/>
-        </p:nvSpPr>
+              <a:t>Çalışma planı — şema</a:t>
+            </a:r>
+          </a:p>
+        </p:txBody>
+      </p:sp>
+      <p:pic>
+        <p:nvPicPr>
+          <p:cNvPr id="7" name="Picture 6" descr="h08-04-calisma-plani.png"/>
+          <p:cNvPicPr>
+            <a:picLocks noChangeAspect="1"/>
+          </p:cNvPicPr>
+          <p:nvPr/>
+        </p:nvPicPr>
+        <p:blipFill>
+          <a:blip r:embed="rId3"/>
+          <a:stretch>
+            <a:fillRect/>
+          </a:stretch>
+        </p:blipFill>
         <p:spPr>
           <a:xfrm>
             <a:off x="640080" y="1325880"/>
-            <a:ext cx="10911535" cy="1124712"/>
-          </a:xfrm>
-          <a:prstGeom prst="rect">
-            <a:avLst/>
-          </a:prstGeom>
-          <a:solidFill>
-            <a:srgbClr val="F3F4F6"/>
-          </a:solidFill>
-          <a:ln>
-            <a:solidFill>
-              <a:srgbClr val="D9DEE3"/>
-            </a:solidFill>
-          </a:ln>
-        </p:spPr>
-        <p:style>
-          <a:lnRef idx="1">
-            <a:schemeClr val="accent1"/>
-          </a:lnRef>
-          <a:fillRef idx="3">
-            <a:schemeClr val="accent1"/>
-          </a:fillRef>
-          <a:effectRef idx="2">
-            <a:schemeClr val="accent1"/>
-          </a:effectRef>
-          <a:fontRef idx="minor">
-            <a:schemeClr val="lt1"/>
-          </a:fontRef>
-        </p:style>
-        <p:txBody>
-          <a:bodyPr rtlCol="0" anchor="t" wrap="none" lIns="137160" rIns="137160" tIns="91440" bIns="91440"/>
-          <a:lstStyle/>
-          <a:p>
-            <a:pPr algn="l"/>
-            <a:r>
-              <a:rPr sz="1116">
-                <a:solidFill>
-                  <a:srgbClr val="1F2D3A"/>
-                </a:solidFill>
-                <a:latin typeface="Consolas"/>
-              </a:rPr>
-              <a:t>void kaydet(const char *ad) {</a:t>
-            </a:r>
-          </a:p>
-          <a:p>
-            <a:pPr algn="l"/>
-            <a:r>
-              <a:rPr sz="1116">
-                <a:solidFill>
-                  <a:srgbClr val="1F2D3A"/>
-                </a:solidFill>
-                <a:latin typeface="Consolas"/>
-              </a:rPr>
-              <a:t>    char tampon[32];</a:t>
-            </a:r>
-          </a:p>
-          <a:p>
-            <a:pPr algn="l"/>
-            <a:r>
-              <a:rPr sz="1116">
-                <a:solidFill>
-                  <a:srgbClr val="1F2D3A"/>
-                </a:solidFill>
-                <a:latin typeface="Consolas"/>
-              </a:rPr>
-              <a:t>    sprintf(tampon, "kullanici=%s", ad);</a:t>
-            </a:r>
-          </a:p>
-          <a:p>
-            <a:pPr algn="l"/>
-            <a:r>
-              <a:rPr sz="1116">
-                <a:solidFill>
-                  <a:srgbClr val="1F2D3A"/>
-                </a:solidFill>
-                <a:latin typeface="Consolas"/>
-              </a:rPr>
-              <a:t>    syslog(LOG_INFO, tampon);</a:t>
-            </a:r>
-          </a:p>
-          <a:p>
-            <a:pPr algn="l"/>
-            <a:r>
-              <a:rPr sz="1116">
-                <a:solidFill>
-                  <a:srgbClr val="1F2D3A"/>
-                </a:solidFill>
-                <a:latin typeface="Consolas"/>
-              </a:rPr>
-              <a:t>}</a:t>
-            </a:r>
-          </a:p>
-        </p:txBody>
-      </p:sp>
-      <p:sp>
-        <p:nvSpPr>
-          <p:cNvPr id="8" name="Rectangle 7"/>
-          <p:cNvSpPr/>
-          <p:nvPr/>
-        </p:nvSpPr>
-        <p:spPr>
-          <a:xfrm>
-            <a:off x="640080" y="2560320"/>
-            <a:ext cx="10911535" cy="614476"/>
-          </a:xfrm>
-          <a:prstGeom prst="rect">
-            <a:avLst/>
-          </a:prstGeom>
-          <a:solidFill>
-            <a:srgbClr val="F3F4F6"/>
-          </a:solidFill>
-          <a:ln>
-            <a:solidFill>
-              <a:srgbClr val="D9DEE3"/>
-            </a:solidFill>
-          </a:ln>
-        </p:spPr>
-        <p:style>
-          <a:lnRef idx="1">
-            <a:schemeClr val="accent1"/>
-          </a:lnRef>
-          <a:fillRef idx="3">
-            <a:schemeClr val="accent1"/>
-          </a:fillRef>
-          <a:effectRef idx="2">
-            <a:schemeClr val="accent1"/>
-          </a:effectRef>
-          <a:fontRef idx="minor">
-            <a:schemeClr val="lt1"/>
-          </a:fontRef>
-        </p:style>
-        <p:txBody>
-          <a:bodyPr rtlCol="0" anchor="t" wrap="none" lIns="137160" rIns="137160" tIns="91440" bIns="91440"/>
-          <a:lstStyle/>
-          <a:p>
-            <a:pPr algn="l"/>
-            <a:r>
-              <a:rPr sz="1116">
-                <a:solidFill>
-                  <a:srgbClr val="1F2D3A"/>
-                </a:solidFill>
-                <a:latin typeface="Consolas"/>
-              </a:rPr>
-              <a:t>char parola[64];  oku(parola, sizeof parola);  dogrula(parola);</a:t>
-            </a:r>
-          </a:p>
-          <a:p>
-            <a:pPr algn="l"/>
-            <a:r>
-              <a:rPr sz="1116">
-                <a:solidFill>
-                  <a:srgbClr val="1F2D3A"/>
-                </a:solidFill>
-                <a:latin typeface="Consolas"/>
-              </a:rPr>
-              <a:t>memset(parola, 0, sizeof parola);  return;</a:t>
-            </a:r>
-          </a:p>
-        </p:txBody>
-      </p:sp>
+            <a:ext cx="10911535" cy="2445324"/>
+          </a:xfrm>
+          <a:prstGeom prst="rect">
+            <a:avLst/>
+          </a:prstGeom>
+        </p:spPr>
+      </p:pic>
     </p:spTree>
   </p:cSld>
   <p:clrMapOvr>
@@ -5277,198 +5053,88 @@
           <a:lstStyle/>
           <a:p>
             <a:r>
-              <a:rPr sz="2600" b="1">
+              <a:rPr sz="3000" b="1">
                 <a:solidFill>
                   <a:srgbClr val="006D77"/>
                 </a:solidFill>
               </a:rPr>
-              <a:t>Örnek: hatayı bulun (2)</a:t>
-            </a:r>
-          </a:p>
-        </p:txBody>
-      </p:sp>
-      <p:sp>
-        <p:nvSpPr>
-          <p:cNvPr id="7" name="Rectangle 6"/>
-          <p:cNvSpPr/>
+              <a:t>Soru 1</a:t>
+            </a:r>
+          </a:p>
+        </p:txBody>
+      </p:sp>
+      <p:sp>
+        <p:nvSpPr>
+          <p:cNvPr id="7" name="TextBox 6"/>
+          <p:cNvSpPr txBox="1"/>
           <p:nvPr/>
         </p:nvSpPr>
         <p:spPr>
           <a:xfrm>
             <a:off x="640080" y="1325880"/>
-            <a:ext cx="10911535" cy="444398"/>
-          </a:xfrm>
-          <a:prstGeom prst="rect">
-            <a:avLst/>
-          </a:prstGeom>
-          <a:solidFill>
-            <a:srgbClr val="F3F4F6"/>
-          </a:solidFill>
-          <a:ln>
-            <a:solidFill>
-              <a:srgbClr val="D9DEE3"/>
-            </a:solidFill>
-          </a:ln>
-        </p:spPr>
-        <p:style>
-          <a:lnRef idx="1">
-            <a:schemeClr val="accent1"/>
-          </a:lnRef>
-          <a:fillRef idx="3">
-            <a:schemeClr val="accent1"/>
-          </a:fillRef>
-          <a:effectRef idx="2">
-            <a:schemeClr val="accent1"/>
-          </a:effectRef>
-          <a:fontRef idx="minor">
-            <a:schemeClr val="lt1"/>
-          </a:fontRef>
-        </p:style>
-        <p:txBody>
-          <a:bodyPr rtlCol="0" anchor="t" wrap="none" lIns="137160" rIns="137160" tIns="91440" bIns="91440"/>
+            <a:ext cx="10911535" cy="439928"/>
+          </a:xfrm>
+          <a:prstGeom prst="rect">
+            <a:avLst/>
+          </a:prstGeom>
+          <a:noFill/>
+        </p:spPr>
+        <p:txBody>
+          <a:bodyPr wrap="square" lIns="45720" rIns="45720">
+            <a:spAutoFit/>
+          </a:bodyPr>
           <a:lstStyle/>
           <a:p>
             <a:pPr algn="l"/>
             <a:r>
-              <a:rPr sz="1116">
+              <a:rPr sz="2000" b="1">
                 <a:solidFill>
                   <a:srgbClr val="1F2D3A"/>
                 </a:solidFill>
-                <a:latin typeface="Consolas"/>
-              </a:rPr>
-              <a:t>String sql = "SELECT * FROM notlar WHERE ogrenci = '" + no + "'";</a:t>
-            </a:r>
-          </a:p>
-        </p:txBody>
-      </p:sp>
-      <p:sp>
-        <p:nvSpPr>
-          <p:cNvPr id="8" name="Rectangle 7"/>
-          <p:cNvSpPr/>
-          <p:nvPr/>
-        </p:nvSpPr>
-        <p:spPr>
-          <a:xfrm>
-            <a:off x="640080" y="1880006"/>
-            <a:ext cx="10911535" cy="784555"/>
-          </a:xfrm>
-          <a:prstGeom prst="rect">
-            <a:avLst/>
-          </a:prstGeom>
-          <a:solidFill>
-            <a:srgbClr val="F3F4F6"/>
-          </a:solidFill>
-          <a:ln>
-            <a:solidFill>
-              <a:srgbClr val="D9DEE3"/>
-            </a:solidFill>
-          </a:ln>
-        </p:spPr>
-        <p:style>
-          <a:lnRef idx="1">
-            <a:schemeClr val="accent1"/>
-          </a:lnRef>
-          <a:fillRef idx="3">
-            <a:schemeClr val="accent1"/>
-          </a:fillRef>
-          <a:effectRef idx="2">
-            <a:schemeClr val="accent1"/>
-          </a:effectRef>
-          <a:fontRef idx="minor">
-            <a:schemeClr val="lt1"/>
-          </a:fontRef>
-        </p:style>
-        <p:txBody>
-          <a:bodyPr rtlCol="0" anchor="t" wrap="none" lIns="137160" rIns="137160" tIns="91440" bIns="91440"/>
+              </a:rPr>
+              <a:t>MATE saldırgan neden kriptografiyi tek başına yetersiz bırakır?</a:t>
+            </a:r>
+          </a:p>
+        </p:txBody>
+      </p:sp>
+      <p:sp>
+        <p:nvSpPr>
+          <p:cNvPr id="8" name="TextBox 7"/>
+          <p:cNvSpPr txBox="1"/>
+          <p:nvPr/>
+        </p:nvSpPr>
+        <p:spPr>
+          <a:xfrm>
+            <a:off x="640080" y="1875536"/>
+            <a:ext cx="10911535" cy="770128"/>
+          </a:xfrm>
+          <a:prstGeom prst="rect">
+            <a:avLst/>
+          </a:prstGeom>
+          <a:noFill/>
+        </p:spPr>
+        <p:txBody>
+          <a:bodyPr wrap="square" lIns="45720" rIns="45720">
+            <a:spAutoFit/>
+          </a:bodyPr>
           <a:lstStyle/>
           <a:p>
             <a:pPr algn="l"/>
             <a:r>
-              <a:rPr sz="1116">
+              <a:rPr sz="2000" b="1">
                 <a:solidFill>
                   <a:srgbClr val="1F2D3A"/>
                 </a:solidFill>
-                <a:latin typeface="Consolas"/>
-              </a:rPr>
-              <a:t>EVP_DecryptUpdate(ctx, acik, &amp;n, sifreli, sifreli_n);</a:t>
-            </a:r>
-          </a:p>
-          <a:p>
-            <a:pPr algn="l"/>
-            <a:r>
-              <a:rPr sz="1116">
+              </a:rPr>
+              <a:t>Cevap:</a:t>
+            </a:r>
+            <a:r>
+              <a:rPr sz="2000" b="0">
                 <a:solidFill>
                   <a:srgbClr val="1F2D3A"/>
                 </a:solidFill>
-                <a:latin typeface="Consolas"/>
-              </a:rPr>
-              <a:t>kullan(acik, n);</a:t>
-            </a:r>
-          </a:p>
-          <a:p>
-            <a:pPr algn="l"/>
-            <a:r>
-              <a:rPr sz="1116">
-                <a:solidFill>
-                  <a:srgbClr val="1F2D3A"/>
-                </a:solidFill>
-                <a:latin typeface="Consolas"/>
-              </a:rPr>
-              <a:t>EVP_DecryptFinal_ex(ctx, acik + n, &amp;m);</a:t>
-            </a:r>
-          </a:p>
-        </p:txBody>
-      </p:sp>
-      <p:sp>
-        <p:nvSpPr>
-          <p:cNvPr id="9" name="Rectangle 8"/>
-          <p:cNvSpPr/>
-          <p:nvPr/>
-        </p:nvSpPr>
-        <p:spPr>
-          <a:xfrm>
-            <a:off x="640080" y="2774289"/>
-            <a:ext cx="10911535" cy="444398"/>
-          </a:xfrm>
-          <a:prstGeom prst="rect">
-            <a:avLst/>
-          </a:prstGeom>
-          <a:solidFill>
-            <a:srgbClr val="F3F4F6"/>
-          </a:solidFill>
-          <a:ln>
-            <a:solidFill>
-              <a:srgbClr val="D9DEE3"/>
-            </a:solidFill>
-          </a:ln>
-        </p:spPr>
-        <p:style>
-          <a:lnRef idx="1">
-            <a:schemeClr val="accent1"/>
-          </a:lnRef>
-          <a:fillRef idx="3">
-            <a:schemeClr val="accent1"/>
-          </a:fillRef>
-          <a:effectRef idx="2">
-            <a:schemeClr val="accent1"/>
-          </a:effectRef>
-          <a:fontRef idx="minor">
-            <a:schemeClr val="lt1"/>
-          </a:fontRef>
-        </p:style>
-        <p:txBody>
-          <a:bodyPr rtlCol="0" anchor="t" wrap="none" lIns="137160" rIns="137160" tIns="91440" bIns="91440"/>
-          <a:lstStyle/>
-          <a:p>
-            <a:pPr algn="l"/>
-            <a:r>
-              <a:rPr sz="1116">
-                <a:solidFill>
-                  <a:srgbClr val="1F2D3A"/>
-                </a:solidFill>
-                <a:latin typeface="Consolas"/>
-              </a:rPr>
-              <a:t>try { pinDenetle(zincir); } catch (KeyStoreException e) { e.printStackTrace(); }</a:t>
+              </a:rPr>
+              <a:t> Anahtar bellekte; saldırgan programı çalıştırıp okur. Kripto gizliliği verir ama beyaz kutuda anahtar korunmaz; RASP/gizleme/whitebox gerekir.</a:t>
             </a:r>
           </a:p>
         </p:txBody>
@@ -5643,7 +5309,7 @@
                   <a:srgbClr val="006D77"/>
                 </a:solidFill>
               </a:rPr>
-              <a:t>Örnek: senaryolar</a:t>
+              <a:t>Soru 2</a:t>
             </a:r>
           </a:p>
         </p:txBody>
@@ -5657,7 +5323,7 @@
         <p:spPr>
           <a:xfrm>
             <a:off x="640080" y="1325880"/>
-            <a:ext cx="10911535" cy="2346960"/>
+            <a:ext cx="10911535" cy="439928"/>
           </a:xfrm>
           <a:prstGeom prst="rect">
             <a:avLst/>
@@ -5670,18 +5336,48 @@
           </a:bodyPr>
           <a:lstStyle/>
           <a:p>
-            <a:pPr>
-              <a:spcAft>
-                <a:spcPts val="300"/>
-              </a:spcAft>
-            </a:pPr>
+            <a:pPr algn="l"/>
             <a:r>
               <a:rPr sz="2000" b="1">
                 <a:solidFill>
-                  <a:srgbClr val="006D77"/>
-                </a:solidFill>
-              </a:rPr>
-              <a:t>1. </a:t>
+                  <a:srgbClr val="1F2D3A"/>
+                </a:solidFill>
+              </a:rPr>
+              <a:t>AES-GCM'de aynı nonce iki kez kullanılırsa?</a:t>
+            </a:r>
+          </a:p>
+        </p:txBody>
+      </p:sp>
+      <p:sp>
+        <p:nvSpPr>
+          <p:cNvPr id="8" name="TextBox 7"/>
+          <p:cNvSpPr txBox="1"/>
+          <p:nvPr/>
+        </p:nvSpPr>
+        <p:spPr>
+          <a:xfrm>
+            <a:off x="640080" y="1875536"/>
+            <a:ext cx="10911535" cy="770128"/>
+          </a:xfrm>
+          <a:prstGeom prst="rect">
+            <a:avLst/>
+          </a:prstGeom>
+          <a:noFill/>
+        </p:spPr>
+        <p:txBody>
+          <a:bodyPr wrap="square" lIns="45720" rIns="45720">
+            <a:spAutoFit/>
+          </a:bodyPr>
+          <a:lstStyle/>
+          <a:p>
+            <a:pPr algn="l"/>
+            <a:r>
+              <a:rPr sz="2000" b="1">
+                <a:solidFill>
+                  <a:srgbClr val="1F2D3A"/>
+                </a:solidFill>
+              </a:rPr>
+              <a:t>Cevap:</a:t>
             </a:r>
             <a:r>
               <a:rPr sz="2000" b="0">
@@ -5689,171 +5385,7 @@
                   <a:srgbClr val="1F2D3A"/>
                 </a:solidFill>
               </a:rPr>
-              <a:t>Bütün kullanıcılarda </a:t>
-            </a:r>
-            <a:r>
-              <a:rPr sz="2000" b="1">
-                <a:solidFill>
-                  <a:srgbClr val="1F2D3A"/>
-                </a:solidFill>
-              </a:rPr>
-              <a:t>aynı gömülü AES anahtarı</a:t>
-            </a:r>
-            <a:r>
-              <a:rPr sz="2000" b="0">
-                <a:solidFill>
-                  <a:srgbClr val="1F2D3A"/>
-                </a:solidFill>
-              </a:rPr>
-              <a:t>: riskler ve öneri?</a:t>
-            </a:r>
-          </a:p>
-          <a:p>
-            <a:pPr>
-              <a:spcAft>
-                <a:spcPts val="300"/>
-              </a:spcAft>
-            </a:pPr>
-            <a:r>
-              <a:rPr sz="2000" b="1">
-                <a:solidFill>
-                  <a:srgbClr val="006D77"/>
-                </a:solidFill>
-              </a:rPr>
-              <a:t>2. </a:t>
-            </a:r>
-            <a:r>
-              <a:rPr sz="2000" b="0">
-                <a:solidFill>
-                  <a:srgbClr val="1F2D3A"/>
-                </a:solidFill>
-              </a:rPr>
-              <a:t>Dağıtılan paket </a:t>
-            </a:r>
-            <a:r>
-              <a:rPr sz="2000" b="1">
-                <a:solidFill>
-                  <a:srgbClr val="1F2D3A"/>
-                </a:solidFill>
-              </a:rPr>
-              <a:t>hata ayıklama derlemesi</a:t>
-            </a:r>
-            <a:r>
-              <a:rPr sz="2000" b="0">
-                <a:solidFill>
-                  <a:srgbClr val="1F2D3A"/>
-                </a:solidFill>
-              </a:rPr>
-              <a:t>: hangi bulgular?</a:t>
-            </a:r>
-          </a:p>
-          <a:p>
-            <a:pPr>
-              <a:spcAft>
-                <a:spcPts val="300"/>
-              </a:spcAft>
-            </a:pPr>
-            <a:r>
-              <a:rPr sz="2000" b="1">
-                <a:solidFill>
-                  <a:srgbClr val="006D77"/>
-                </a:solidFill>
-              </a:rPr>
-              <a:t>3. </a:t>
-            </a:r>
-            <a:r>
-              <a:rPr sz="2000" b="0">
-                <a:solidFill>
-                  <a:srgbClr val="1F2D3A"/>
-                </a:solidFill>
-              </a:rPr>
-              <a:t>"Bu işlemi ben yapmadım": hangi STRIDE harfi, hangi kanıt?</a:t>
-            </a:r>
-          </a:p>
-          <a:p>
-            <a:pPr>
-              <a:spcAft>
-                <a:spcPts val="300"/>
-              </a:spcAft>
-            </a:pPr>
-            <a:r>
-              <a:rPr sz="2000" b="1">
-                <a:solidFill>
-                  <a:srgbClr val="006D77"/>
-                </a:solidFill>
-              </a:rPr>
-              <a:t>4. </a:t>
-            </a:r>
-            <a:r>
-              <a:rPr sz="2000" b="0">
-                <a:solidFill>
-                  <a:srgbClr val="1F2D3A"/>
-                </a:solidFill>
-              </a:rPr>
-              <a:t>Arşiv açan fonksiyon: hangi hatalara karşı ne yaparsınız?</a:t>
-            </a:r>
-          </a:p>
-          <a:p>
-            <a:pPr>
-              <a:spcAft>
-                <a:spcPts val="300"/>
-              </a:spcAft>
-            </a:pPr>
-            <a:r>
-              <a:rPr sz="2000" b="1">
-                <a:solidFill>
-                  <a:srgbClr val="006D77"/>
-                </a:solidFill>
-              </a:rPr>
-              <a:t>5. </a:t>
-            </a:r>
-            <a:r>
-              <a:rPr sz="2000" b="0">
-                <a:solidFill>
-                  <a:srgbClr val="1F2D3A"/>
-                </a:solidFill>
-              </a:rPr>
-              <a:t>Log4Shell'de asıl sorun neydi, ne önlerdi?</a:t>
-            </a:r>
-          </a:p>
-          <a:p>
-            <a:pPr>
-              <a:spcAft>
-                <a:spcPts val="300"/>
-              </a:spcAft>
-            </a:pPr>
-            <a:r>
-              <a:rPr sz="2000" b="1">
-                <a:solidFill>
-                  <a:srgbClr val="006D77"/>
-                </a:solidFill>
-              </a:rPr>
-              <a:t>6. </a:t>
-            </a:r>
-            <a:r>
-              <a:rPr sz="2000" b="0">
-                <a:solidFill>
-                  <a:srgbClr val="1F2D3A"/>
-                </a:solidFill>
-              </a:rPr>
-              <a:t>RASP denetimleri neden tek bir </a:t>
-            </a:r>
-            <a:r>
-              <a:rPr sz="2000" b="0">
-                <a:solidFill>
-                  <a:srgbClr val="A1123F"/>
-                </a:solidFill>
-                <a:latin typeface="Consolas"/>
-              </a:rPr>
-              <a:t>if</a:t>
-            </a:r>
-            <a:r>
-              <a:rPr sz="2000" b="0">
-                <a:solidFill>
-                  <a:srgbClr val="1F2D3A"/>
-                </a:solidFill>
-              </a:rPr>
-              <a:t> ile değerlendirilmemeli?</a:t>
+              <a:t> Gizlilik ve bütünlük çöker; anahtar akışı ve veri sızabilir. Nonce her zaman benzersiz olmalı.</a:t>
             </a:r>
           </a:p>
         </p:txBody>
@@ -6028,7 +5560,7 @@
                   <a:srgbClr val="006D77"/>
                 </a:solidFill>
               </a:rPr>
-              <a:t>Gelecek hafta</a:t>
+              <a:t>Soru 3</a:t>
             </a:r>
           </a:p>
         </p:txBody>
@@ -6062,7 +5594,7 @@
                   <a:srgbClr val="1F2D3A"/>
                 </a:solidFill>
               </a:rPr>
-              <a:t>Hafta 9 — Gelişmiş kod gizleme ve çeşitlendirme</a:t>
+              <a:t>ASan hangi taşmayı göremez?</a:t>
             </a:r>
           </a:p>
         </p:txBody>
@@ -6076,7 +5608,7 @@
         <p:spPr>
           <a:xfrm>
             <a:off x="640080" y="1875536"/>
-            <a:ext cx="10911535" cy="1219200"/>
+            <a:ext cx="10911535" cy="770128"/>
           </a:xfrm>
           <a:prstGeom prst="rect">
             <a:avLst/>
@@ -6089,18 +5621,14 @@
           </a:bodyPr>
           <a:lstStyle/>
           <a:p>
-            <a:pPr>
-              <a:spcAft>
-                <a:spcPts val="300"/>
-              </a:spcAft>
-            </a:pPr>
+            <a:pPr algn="l"/>
             <a:r>
               <a:rPr sz="2000" b="1">
                 <a:solidFill>
-                  <a:srgbClr val="006D77"/>
-                </a:solidFill>
-              </a:rPr>
-              <a:t>• </a:t>
+                  <a:srgbClr val="1F2D3A"/>
+                </a:solidFill>
+              </a:rPr>
+              <a:t>Cevap:</a:t>
             </a:r>
             <a:r>
               <a:rPr sz="2000" b="0">
@@ -6108,53 +5636,7 @@
                   <a:srgbClr val="1F2D3A"/>
                 </a:solidFill>
               </a:rPr>
-              <a:t>Gizleme taksonomisi, opak yüklemler, veri kodlama</a:t>
-            </a:r>
-          </a:p>
-          <a:p>
-            <a:pPr>
-              <a:spcAft>
-                <a:spcPts val="300"/>
-              </a:spcAft>
-            </a:pPr>
-            <a:r>
-              <a:rPr sz="2000" b="1">
-                <a:solidFill>
-                  <a:srgbClr val="006D77"/>
-                </a:solidFill>
-              </a:rPr>
-              <a:t>• </a:t>
-            </a:r>
-            <a:r>
-              <a:rPr sz="2000" b="0">
-                <a:solidFill>
-                  <a:srgbClr val="1F2D3A"/>
-                </a:solidFill>
-              </a:rPr>
-              <a:t>Sanallaştırma ve derleyici tabanlı gizleme (kavram)</a:t>
-            </a:r>
-          </a:p>
-          <a:p>
-            <a:pPr>
-              <a:spcAft>
-                <a:spcPts val="300"/>
-              </a:spcAft>
-            </a:pPr>
-            <a:r>
-              <a:rPr sz="2000" b="1">
-                <a:solidFill>
-                  <a:srgbClr val="006D77"/>
-                </a:solidFill>
-              </a:rPr>
-              <a:t>• </a:t>
-            </a:r>
-            <a:r>
-              <a:rPr sz="2000" b="0">
-                <a:solidFill>
-                  <a:srgbClr val="1F2D3A"/>
-                </a:solidFill>
-              </a:rPr>
-              <a:t>Gizlemenin ölçülmesi: güç, dayanıklılık, maliyet</a:t>
+              <a:t> Aynı yapının içinde alandan alana taşmayı (arada koruma bölgesi (redzone) yoktur).</a:t>
             </a:r>
           </a:p>
         </p:txBody>
@@ -6170,14 +5652,6 @@
 <file path=ppt/slides/slide16.xml><?xml version="1.0" encoding="utf-8"?>
 <p:sld xmlns:a="http://schemas.openxmlformats.org/drawingml/2006/main" xmlns:p="http://schemas.openxmlformats.org/presentationml/2006/main" xmlns:r="http://schemas.openxmlformats.org/officeDocument/2006/relationships">
   <p:cSld>
-    <p:bg>
-      <p:bgPr>
-        <a:solidFill>
-          <a:srgbClr val="006D77"/>
-        </a:solidFill>
-        <a:effectLst/>
-      </p:bgPr>
-    </p:bg>
     <p:spTree>
       <p:nvGrpSpPr>
         <p:cNvPr id="1" name=""/>
@@ -6185,9 +5659,33 @@
         <p:nvPr/>
       </p:nvGrpSpPr>
       <p:grpSpPr/>
-      <p:sp>
-        <p:nvSpPr>
-          <p:cNvPr id="2" name="TextBox 1"/>
+      <p:pic>
+        <p:nvPicPr>
+          <p:cNvPr id="2" name="Picture 1" descr="rteu_logo_kucuk.jpg"/>
+          <p:cNvPicPr>
+            <a:picLocks noChangeAspect="1"/>
+          </p:cNvPicPr>
+          <p:nvPr/>
+        </p:nvPicPr>
+        <p:blipFill>
+          <a:blip r:embed="rId2"/>
+          <a:stretch>
+            <a:fillRect/>
+          </a:stretch>
+        </p:blipFill>
+        <p:spPr>
+          <a:xfrm>
+            <a:off x="640080" y="164592"/>
+            <a:ext cx="242773" cy="329184"/>
+          </a:xfrm>
+          <a:prstGeom prst="rect">
+            <a:avLst/>
+          </a:prstGeom>
+        </p:spPr>
+      </p:pic>
+      <p:sp>
+        <p:nvSpPr>
+          <p:cNvPr id="3" name="TextBox 2"/>
           <p:cNvSpPr txBox="1"/>
           <p:nvPr/>
         </p:nvSpPr>
@@ -6210,7 +5708,7 @@
             <a:r>
               <a:rPr sz="1100" b="0">
                 <a:solidFill>
-                  <a:srgbClr val="D8F0F2"/>
+                  <a:srgbClr val="5B6770"/>
                 </a:solidFill>
               </a:rPr>
               <a:t>CEN429 Güvenli Programlama · Hafta 8</a:t>
@@ -6220,7 +5718,7 @@
       </p:sp>
       <p:sp>
         <p:nvSpPr>
-          <p:cNvPr id="3" name="TextBox 2"/>
+          <p:cNvPr id="4" name="TextBox 3"/>
           <p:cNvSpPr txBox="1"/>
           <p:nvPr/>
         </p:nvSpPr>
@@ -6243,7 +5741,7 @@
             <a:r>
               <a:rPr sz="1000" b="0">
                 <a:solidFill>
-                  <a:srgbClr val="D8F0F2"/>
+                  <a:srgbClr val="5B6770"/>
                 </a:solidFill>
               </a:rPr>
               <a:t>RTEÜ Bilgisayar Mühendisliği · 2026-2027 Güz</a:t>
@@ -6253,7 +5751,7 @@
       </p:sp>
       <p:sp>
         <p:nvSpPr>
-          <p:cNvPr id="4" name="TextBox 3"/>
+          <p:cNvPr id="5" name="TextBox 4"/>
           <p:cNvSpPr txBox="1"/>
           <p:nvPr/>
         </p:nvSpPr>
@@ -6277,7 +5775,7 @@
             <a:r>
               <a:rPr sz="1000" b="0">
                 <a:solidFill>
-                  <a:srgbClr val="D8F0F2"/>
+                  <a:srgbClr val="5B6770"/>
                 </a:solidFill>
               </a:rPr>
               <a:t>16</a:t>
@@ -6287,14 +5785,47 @@
       </p:sp>
       <p:sp>
         <p:nvSpPr>
-          <p:cNvPr id="5" name="TextBox 4"/>
-          <p:cNvSpPr txBox="1"/>
-          <p:nvPr/>
-        </p:nvSpPr>
-        <p:spPr>
-          <a:xfrm>
-            <a:off x="640080" y="2743200"/>
-            <a:ext cx="10911535" cy="1280160"/>
+          <p:cNvPr id="6" name="TextBox 5"/>
+          <p:cNvSpPr txBox="1"/>
+          <p:nvPr/>
+        </p:nvSpPr>
+        <p:spPr>
+          <a:xfrm>
+            <a:off x="640080" y="548640"/>
+            <a:ext cx="10911535" cy="731520"/>
+          </a:xfrm>
+          <a:prstGeom prst="rect">
+            <a:avLst/>
+          </a:prstGeom>
+          <a:noFill/>
+        </p:spPr>
+        <p:txBody>
+          <a:bodyPr wrap="square" lIns="45720" rIns="45720" anchor="ctr">
+            <a:spAutoFit/>
+          </a:bodyPr>
+          <a:lstStyle/>
+          <a:p>
+            <a:r>
+              <a:rPr sz="3000" b="1">
+                <a:solidFill>
+                  <a:srgbClr val="006D77"/>
+                </a:solidFill>
+              </a:rPr>
+              <a:t>Soru 4</a:t>
+            </a:r>
+          </a:p>
+        </p:txBody>
+      </p:sp>
+      <p:sp>
+        <p:nvSpPr>
+          <p:cNvPr id="7" name="TextBox 6"/>
+          <p:cNvSpPr txBox="1"/>
+          <p:nvPr/>
+        </p:nvSpPr>
+        <p:spPr>
+          <a:xfrm>
+            <a:off x="640080" y="1325880"/>
+            <a:ext cx="10911535" cy="439928"/>
           </a:xfrm>
           <a:prstGeom prst="rect">
             <a:avLst/>
@@ -6309,12 +5840,54 @@
           <a:p>
             <a:pPr algn="l"/>
             <a:r>
-              <a:rPr sz="4000" b="1">
-                <a:solidFill>
-                  <a:srgbClr val="FFFFFF"/>
-                </a:solidFill>
-              </a:rPr>
-              <a:t>Ek · Hafta hafta konu haritası (1–6)</a:t>
+              <a:rPr sz="2000" b="1">
+                <a:solidFill>
+                  <a:srgbClr val="1F2D3A"/>
+                </a:solidFill>
+              </a:rPr>
+              <a:t>Kanarya neyi durdurur, neyi durdurmaz?</a:t>
+            </a:r>
+          </a:p>
+        </p:txBody>
+      </p:sp>
+      <p:sp>
+        <p:nvSpPr>
+          <p:cNvPr id="8" name="TextBox 7"/>
+          <p:cNvSpPr txBox="1"/>
+          <p:nvPr/>
+        </p:nvSpPr>
+        <p:spPr>
+          <a:xfrm>
+            <a:off x="640080" y="1875536"/>
+            <a:ext cx="10911535" cy="770128"/>
+          </a:xfrm>
+          <a:prstGeom prst="rect">
+            <a:avLst/>
+          </a:prstGeom>
+          <a:noFill/>
+        </p:spPr>
+        <p:txBody>
+          <a:bodyPr wrap="square" lIns="45720" rIns="45720">
+            <a:spAutoFit/>
+          </a:bodyPr>
+          <a:lstStyle/>
+          <a:p>
+            <a:pPr algn="l"/>
+            <a:r>
+              <a:rPr sz="2000" b="1">
+                <a:solidFill>
+                  <a:srgbClr val="1F2D3A"/>
+                </a:solidFill>
+              </a:rPr>
+              <a:t>Cevap:</a:t>
+            </a:r>
+            <a:r>
+              <a:rPr sz="2000" b="0">
+                <a:solidFill>
+                  <a:srgbClr val="1F2D3A"/>
+                </a:solidFill>
+              </a:rPr>
+              <a:t> Durdurur: dönüş adresine ulaşan yığın (stack) taşması. Durdurmaz: öbek (heap) taşması, önceki değişkenler, sızan kanarya.</a:t>
             </a:r>
           </a:p>
         </p:txBody>
@@ -6489,7 +6062,7 @@
                   <a:srgbClr val="006D77"/>
                 </a:solidFill>
               </a:rPr>
-              <a:t>1. hafta · anahtar noktalar</a:t>
+              <a:t>Soru 5</a:t>
             </a:r>
           </a:p>
         </p:txBody>
@@ -6503,7 +6076,7 @@
         <p:spPr>
           <a:xfrm>
             <a:off x="640080" y="1325880"/>
-            <a:ext cx="10911535" cy="1595120"/>
+            <a:ext cx="10911535" cy="439928"/>
           </a:xfrm>
           <a:prstGeom prst="rect">
             <a:avLst/>
@@ -6516,18 +6089,48 @@
           </a:bodyPr>
           <a:lstStyle/>
           <a:p>
-            <a:pPr>
-              <a:spcAft>
-                <a:spcPts val="300"/>
-              </a:spcAft>
-            </a:pPr>
+            <a:pPr algn="l"/>
             <a:r>
               <a:rPr sz="2000" b="1">
                 <a:solidFill>
-                  <a:srgbClr val="006D77"/>
-                </a:solidFill>
-              </a:rPr>
-              <a:t>• </a:t>
+                  <a:srgbClr val="1F2D3A"/>
+                </a:solidFill>
+              </a:rPr>
+              <a:t>RASP self-hashing tek başına neden yetmez?</a:t>
+            </a:r>
+          </a:p>
+        </p:txBody>
+      </p:sp>
+      <p:sp>
+        <p:nvSpPr>
+          <p:cNvPr id="8" name="TextBox 7"/>
+          <p:cNvSpPr txBox="1"/>
+          <p:nvPr/>
+        </p:nvSpPr>
+        <p:spPr>
+          <a:xfrm>
+            <a:off x="640080" y="1875536"/>
+            <a:ext cx="10911535" cy="770128"/>
+          </a:xfrm>
+          <a:prstGeom prst="rect">
+            <a:avLst/>
+          </a:prstGeom>
+          <a:noFill/>
+        </p:spPr>
+        <p:txBody>
+          <a:bodyPr wrap="square" lIns="45720" rIns="45720">
+            <a:spAutoFit/>
+          </a:bodyPr>
+          <a:lstStyle/>
+          <a:p>
+            <a:pPr algn="l"/>
+            <a:r>
+              <a:rPr sz="2000" b="1">
+                <a:solidFill>
+                  <a:srgbClr val="1F2D3A"/>
+                </a:solidFill>
+              </a:rPr>
+              <a:t>Cevap:</a:t>
             </a:r>
             <a:r>
               <a:rPr sz="2000" b="0">
@@ -6535,76 +6138,7 @@
                   <a:srgbClr val="1F2D3A"/>
                 </a:solidFill>
               </a:rPr>
-              <a:t>CIA üçlüsü; hata ≠ zafiyet.</a:t>
-            </a:r>
-          </a:p>
-          <a:p>
-            <a:pPr>
-              <a:spcAft>
-                <a:spcPts val="300"/>
-              </a:spcAft>
-            </a:pPr>
-            <a:r>
-              <a:rPr sz="2000" b="1">
-                <a:solidFill>
-                  <a:srgbClr val="006D77"/>
-                </a:solidFill>
-              </a:rPr>
-              <a:t>• </a:t>
-            </a:r>
-            <a:r>
-              <a:rPr sz="2000" b="0">
-                <a:solidFill>
-                  <a:srgbClr val="1F2D3A"/>
-                </a:solidFill>
-              </a:rPr>
-              <a:t>MATE (beyaz kutu) saldırgan.</a:t>
-            </a:r>
-          </a:p>
-          <a:p>
-            <a:pPr>
-              <a:spcAft>
-                <a:spcPts val="300"/>
-              </a:spcAft>
-            </a:pPr>
-            <a:r>
-              <a:rPr sz="2000" b="1">
-                <a:solidFill>
-                  <a:srgbClr val="006D77"/>
-                </a:solidFill>
-              </a:rPr>
-              <a:t>• </a:t>
-            </a:r>
-            <a:r>
-              <a:rPr sz="2000" b="0">
-                <a:solidFill>
-                  <a:srgbClr val="1F2D3A"/>
-                </a:solidFill>
-              </a:rPr>
-              <a:t>STRIDE, saldırı ağacı, DFD.</a:t>
-            </a:r>
-          </a:p>
-          <a:p>
-            <a:pPr>
-              <a:spcAft>
-                <a:spcPts val="300"/>
-              </a:spcAft>
-            </a:pPr>
-            <a:r>
-              <a:rPr sz="2000" b="1">
-                <a:solidFill>
-                  <a:srgbClr val="006D77"/>
-                </a:solidFill>
-              </a:rPr>
-              <a:t>• </a:t>
-            </a:r>
-            <a:r>
-              <a:rPr sz="2000" b="0">
-                <a:solidFill>
-                  <a:srgbClr val="1F2D3A"/>
-                </a:solidFill>
-              </a:rPr>
-              <a:t>Katmanlı savunma; tasarım ilkeleri.</a:t>
+              <a:t> Saldırgan özet fonksiyonunu bulup atlatabilir. Gizleme + çapraz + örtüşen denetim gerekir.</a:t>
             </a:r>
           </a:p>
         </p:txBody>
@@ -6779,7 +6313,7 @@
                   <a:srgbClr val="006D77"/>
                 </a:solidFill>
               </a:rPr>
-              <a:t>2. hafta · anahtar noktalar</a:t>
+              <a:t>Soru 6</a:t>
             </a:r>
           </a:p>
         </p:txBody>
@@ -6793,7 +6327,7 @@
         <p:spPr>
           <a:xfrm>
             <a:off x="640080" y="1325880"/>
-            <a:ext cx="10911535" cy="1219200"/>
+            <a:ext cx="10911535" cy="439928"/>
           </a:xfrm>
           <a:prstGeom prst="rect">
             <a:avLst/>
@@ -6806,18 +6340,48 @@
           </a:bodyPr>
           <a:lstStyle/>
           <a:p>
-            <a:pPr>
-              <a:spcAft>
-                <a:spcPts val="300"/>
-              </a:spcAft>
-            </a:pPr>
+            <a:pPr algn="l"/>
             <a:r>
               <a:rPr sz="2000" b="1">
                 <a:solidFill>
-                  <a:srgbClr val="006D77"/>
-                </a:solidFill>
-              </a:rPr>
-              <a:t>• </a:t>
+                  <a:srgbClr val="1F2D3A"/>
+                </a:solidFill>
+              </a:rPr>
+              <a:t>Paroladan anahtar türetirken neden KDF ve tuz?</a:t>
+            </a:r>
+          </a:p>
+        </p:txBody>
+      </p:sp>
+      <p:sp>
+        <p:nvSpPr>
+          <p:cNvPr id="8" name="TextBox 7"/>
+          <p:cNvSpPr txBox="1"/>
+          <p:nvPr/>
+        </p:nvSpPr>
+        <p:spPr>
+          <a:xfrm>
+            <a:off x="640080" y="1875536"/>
+            <a:ext cx="10911535" cy="770128"/>
+          </a:xfrm>
+          <a:prstGeom prst="rect">
+            <a:avLst/>
+          </a:prstGeom>
+          <a:noFill/>
+        </p:spPr>
+        <p:txBody>
+          <a:bodyPr wrap="square" lIns="45720" rIns="45720">
+            <a:spAutoFit/>
+          </a:bodyPr>
+          <a:lstStyle/>
+          <a:p>
+            <a:pPr algn="l"/>
+            <a:r>
+              <a:rPr sz="2000" b="1">
+                <a:solidFill>
+                  <a:srgbClr val="1F2D3A"/>
+                </a:solidFill>
+              </a:rPr>
+              <a:t>Cevap:</a:t>
             </a:r>
             <a:r>
               <a:rPr sz="2000" b="0">
@@ -6825,53 +6389,7 @@
                   <a:srgbClr val="1F2D3A"/>
                 </a:solidFill>
               </a:rPr>
-              <a:t>Tehdit modelleme adımları.</a:t>
-            </a:r>
-          </a:p>
-          <a:p>
-            <a:pPr>
-              <a:spcAft>
-                <a:spcPts val="300"/>
-              </a:spcAft>
-            </a:pPr>
-            <a:r>
-              <a:rPr sz="2000" b="1">
-                <a:solidFill>
-                  <a:srgbClr val="006D77"/>
-                </a:solidFill>
-              </a:rPr>
-              <a:t>• </a:t>
-            </a:r>
-            <a:r>
-              <a:rPr sz="2000" b="0">
-                <a:solidFill>
-                  <a:srgbClr val="1F2D3A"/>
-                </a:solidFill>
-              </a:rPr>
-              <a:t>Güven sınırı; en az yetki.</a:t>
-            </a:r>
-          </a:p>
-          <a:p>
-            <a:pPr>
-              <a:spcAft>
-                <a:spcPts val="300"/>
-              </a:spcAft>
-            </a:pPr>
-            <a:r>
-              <a:rPr sz="2000" b="1">
-                <a:solidFill>
-                  <a:srgbClr val="006D77"/>
-                </a:solidFill>
-              </a:rPr>
-              <a:t>• </a:t>
-            </a:r>
-            <a:r>
-              <a:rPr sz="2000" b="0">
-                <a:solidFill>
-                  <a:srgbClr val="1F2D3A"/>
-                </a:solidFill>
-              </a:rPr>
-              <a:t>Varlık listesi ve C/I/I+ etiketi.</a:t>
+              <a:t> Parola düşük entropili; KDF yavaşlatır, tuz aynı parolaların aynı anahtar üretmesini önler (gökkuşağı tablosu).</a:t>
             </a:r>
           </a:p>
         </p:txBody>
@@ -7046,7 +6564,7 @@
                   <a:srgbClr val="006D77"/>
                 </a:solidFill>
               </a:rPr>
-              <a:t>3. hafta · anahtar noktalar</a:t>
+              <a:t>Soru 7</a:t>
             </a:r>
           </a:p>
         </p:txBody>
@@ -7060,7 +6578,7 @@
         <p:spPr>
           <a:xfrm>
             <a:off x="640080" y="1325880"/>
-            <a:ext cx="10911535" cy="1595120"/>
+            <a:ext cx="10911535" cy="439928"/>
           </a:xfrm>
           <a:prstGeom prst="rect">
             <a:avLst/>
@@ -7073,18 +6591,48 @@
           </a:bodyPr>
           <a:lstStyle/>
           <a:p>
-            <a:pPr>
-              <a:spcAft>
-                <a:spcPts val="300"/>
-              </a:spcAft>
-            </a:pPr>
+            <a:pPr algn="l"/>
             <a:r>
               <a:rPr sz="2000" b="1">
                 <a:solidFill>
-                  <a:srgbClr val="006D77"/>
-                </a:solidFill>
-              </a:rPr>
-              <a:t>• </a:t>
+                  <a:srgbClr val="1F2D3A"/>
+                </a:solidFill>
+              </a:rPr>
+              <a:t>En az yetki ilkesi bir örnekle?</a:t>
+            </a:r>
+          </a:p>
+        </p:txBody>
+      </p:sp>
+      <p:sp>
+        <p:nvSpPr>
+          <p:cNvPr id="8" name="TextBox 7"/>
+          <p:cNvSpPr txBox="1"/>
+          <p:nvPr/>
+        </p:nvSpPr>
+        <p:spPr>
+          <a:xfrm>
+            <a:off x="640080" y="1875536"/>
+            <a:ext cx="10911535" cy="770128"/>
+          </a:xfrm>
+          <a:prstGeom prst="rect">
+            <a:avLst/>
+          </a:prstGeom>
+          <a:noFill/>
+        </p:spPr>
+        <p:txBody>
+          <a:bodyPr wrap="square" lIns="45720" rIns="45720">
+            <a:spAutoFit/>
+          </a:bodyPr>
+          <a:lstStyle/>
+          <a:p>
+            <a:pPr algn="l"/>
+            <a:r>
+              <a:rPr sz="2000" b="1">
+                <a:solidFill>
+                  <a:srgbClr val="1F2D3A"/>
+                </a:solidFill>
+              </a:rPr>
+              <a:t>Cevap:</a:t>
             </a:r>
             <a:r>
               <a:rPr sz="2000" b="0">
@@ -7092,76 +6640,41 @@
                   <a:srgbClr val="1F2D3A"/>
                 </a:solidFill>
               </a:rPr>
-              <a:t>Verinin üç hâli.</a:t>
-            </a:r>
-          </a:p>
-          <a:p>
-            <a:pPr>
-              <a:spcAft>
-                <a:spcPts val="300"/>
-              </a:spcAft>
-            </a:pPr>
-            <a:r>
-              <a:rPr sz="2000" b="1">
-                <a:solidFill>
-                  <a:srgbClr val="006D77"/>
-                </a:solidFill>
-              </a:rPr>
-              <a:t>• </a:t>
+              <a:t> Uygulamanın DB kullanıcısı yalnız </a:t>
             </a:r>
             <a:r>
               <a:rPr sz="2000" b="0">
                 <a:solidFill>
+                  <a:srgbClr val="A1123F"/>
+                </a:solidFill>
+                <a:latin typeface="Consolas"/>
+              </a:rPr>
+              <a:t>SELECT</a:t>
+            </a:r>
+            <a:r>
+              <a:rPr sz="2000" b="0">
+                <a:solidFill>
                   <a:srgbClr val="1F2D3A"/>
                 </a:solidFill>
               </a:rPr>
-              <a:t>AEAD; nonce tekrarı felaketi.</a:t>
-            </a:r>
-          </a:p>
-          <a:p>
-            <a:pPr>
-              <a:spcAft>
-                <a:spcPts val="300"/>
-              </a:spcAft>
-            </a:pPr>
-            <a:r>
-              <a:rPr sz="2000" b="1">
-                <a:solidFill>
-                  <a:srgbClr val="006D77"/>
-                </a:solidFill>
-              </a:rPr>
-              <a:t>• </a:t>
+              <a:t> yapabilsin; </a:t>
             </a:r>
             <a:r>
               <a:rPr sz="2000" b="0">
                 <a:solidFill>
+                  <a:srgbClr val="A1123F"/>
+                </a:solidFill>
+                <a:latin typeface="Consolas"/>
+              </a:rPr>
+              <a:t>DROP</a:t>
+            </a:r>
+            <a:r>
+              <a:rPr sz="2000" b="0">
+                <a:solidFill>
                   <a:srgbClr val="1F2D3A"/>
                 </a:solidFill>
               </a:rPr>
-              <a:t>CSPRNG; KDF (parola → anahtar).</a:t>
-            </a:r>
-          </a:p>
-          <a:p>
-            <a:pPr>
-              <a:spcAft>
-                <a:spcPts val="300"/>
-              </a:spcAft>
-            </a:pPr>
-            <a:r>
-              <a:rPr sz="2000" b="1">
-                <a:solidFill>
-                  <a:srgbClr val="006D77"/>
-                </a:solidFill>
-              </a:rPr>
-              <a:t>• </a:t>
-            </a:r>
-            <a:r>
-              <a:rPr sz="2000" b="0">
-                <a:solidFill>
-                  <a:srgbClr val="1F2D3A"/>
-                </a:solidFill>
-              </a:rPr>
-              <a:t>Anahtar hiyerarşisi; ileri gizlilik.</a:t>
+              <a:t> yetkisi olmasın. Fazla yetki = büyük hasar.</a:t>
             </a:r>
           </a:p>
         </p:txBody>
@@ -7350,7 +6863,7 @@
         <p:spPr>
           <a:xfrm>
             <a:off x="640080" y="1325880"/>
-            <a:ext cx="10911535" cy="1925320"/>
+            <a:ext cx="10911535" cy="2631440"/>
           </a:xfrm>
           <a:prstGeom prst="rect">
             <a:avLst/>
@@ -7492,7 +7005,7 @@
                   <a:srgbClr val="1F2D3A"/>
                 </a:solidFill>
               </a:rPr>
-              <a:t> sorusu</a:t>
+              <a:t> sorusu — sık karıştırılan kavramları da nedeniyle öğrenin</a:t>
             </a:r>
           </a:p>
           <a:p>
@@ -7531,7 +7044,46 @@
                   <a:srgbClr val="1F2D3A"/>
                 </a:solidFill>
               </a:rPr>
-              <a:t> soruları + demoları yeniden çalıştırmak</a:t>
+              <a:t> sorularını cevaba bakmadan yapıp demoları yeniden çalıştırmak</a:t>
+            </a:r>
+          </a:p>
+          <a:p>
+            <a:pPr>
+              <a:spcAft>
+                <a:spcPts val="300"/>
+              </a:spcAft>
+            </a:pPr>
+            <a:r>
+              <a:rPr sz="2000" b="1">
+                <a:solidFill>
+                  <a:srgbClr val="006D77"/>
+                </a:solidFill>
+              </a:rPr>
+              <a:t>• </a:t>
+            </a:r>
+            <a:r>
+              <a:rPr sz="2000" b="0">
+                <a:solidFill>
+                  <a:srgbClr val="1F2D3A"/>
+                </a:solidFill>
+              </a:rPr>
+              <a:t>Özellikle </a:t>
+            </a:r>
+            <a:r>
+              <a:rPr sz="2000" b="1">
+                <a:solidFill>
+                  <a:srgbClr val="1F2D3A"/>
+                </a:solidFill>
+              </a:rPr>
+              <a:t>3. ve 4. hafta</a:t>
+            </a:r>
+            <a:r>
+              <a:rPr sz="2000" b="0">
+                <a:solidFill>
+                  <a:srgbClr val="1F2D3A"/>
+                </a:solidFill>
+              </a:rPr>
+              <a:t> demolarını bir kez daha gözden geçirin</a:t>
             </a:r>
           </a:p>
         </p:txBody>
@@ -7706,7 +7258,7 @@
                   <a:srgbClr val="006D77"/>
                 </a:solidFill>
               </a:rPr>
-              <a:t>4. hafta · anahtar noktalar</a:t>
+              <a:t>Soru 8</a:t>
             </a:r>
           </a:p>
         </p:txBody>
@@ -7720,7 +7272,7 @@
         <p:spPr>
           <a:xfrm>
             <a:off x="640080" y="1325880"/>
-            <a:ext cx="10911535" cy="1595120"/>
+            <a:ext cx="10911535" cy="439928"/>
           </a:xfrm>
           <a:prstGeom prst="rect">
             <a:avLst/>
@@ -7733,18 +7285,48 @@
           </a:bodyPr>
           <a:lstStyle/>
           <a:p>
-            <a:pPr>
-              <a:spcAft>
-                <a:spcPts val="300"/>
-              </a:spcAft>
-            </a:pPr>
+            <a:pPr algn="l"/>
             <a:r>
               <a:rPr sz="2000" b="1">
                 <a:solidFill>
-                  <a:srgbClr val="006D77"/>
-                </a:solidFill>
-              </a:rPr>
-              <a:t>• </a:t>
+                  <a:srgbClr val="1F2D3A"/>
+                </a:solidFill>
+              </a:rPr>
+              <a:t>Tehdit modellemede STRIDE'ın "E"si nedir, bir önlem?</a:t>
+            </a:r>
+          </a:p>
+        </p:txBody>
+      </p:sp>
+      <p:sp>
+        <p:nvSpPr>
+          <p:cNvPr id="8" name="TextBox 7"/>
+          <p:cNvSpPr txBox="1"/>
+          <p:nvPr/>
+        </p:nvSpPr>
+        <p:spPr>
+          <a:xfrm>
+            <a:off x="640080" y="1875536"/>
+            <a:ext cx="10911535" cy="770128"/>
+          </a:xfrm>
+          <a:prstGeom prst="rect">
+            <a:avLst/>
+          </a:prstGeom>
+          <a:noFill/>
+        </p:spPr>
+        <p:txBody>
+          <a:bodyPr wrap="square" lIns="45720" rIns="45720">
+            <a:spAutoFit/>
+          </a:bodyPr>
+          <a:lstStyle/>
+          <a:p>
+            <a:pPr algn="l"/>
+            <a:r>
+              <a:rPr sz="2000" b="1">
+                <a:solidFill>
+                  <a:srgbClr val="1F2D3A"/>
+                </a:solidFill>
+              </a:rPr>
+              <a:t>Cevap:</a:t>
             </a:r>
             <a:r>
               <a:rPr sz="2000" b="0">
@@ -7752,76 +7334,7 @@
                   <a:srgbClr val="1F2D3A"/>
                 </a:solidFill>
               </a:rPr>
-              <a:t>Üç katman: kod → derleyici/OS → gizleme.</a:t>
-            </a:r>
-          </a:p>
-          <a:p>
-            <a:pPr>
-              <a:spcAft>
-                <a:spcPts val="300"/>
-              </a:spcAft>
-            </a:pPr>
-            <a:r>
-              <a:rPr sz="2000" b="1">
-                <a:solidFill>
-                  <a:srgbClr val="006D77"/>
-                </a:solidFill>
-              </a:rPr>
-              <a:t>• </a:t>
-            </a:r>
-            <a:r>
-              <a:rPr sz="2000" b="0">
-                <a:solidFill>
-                  <a:srgbClr val="1F2D3A"/>
-                </a:solidFill>
-              </a:rPr>
-              <a:t>CERT/CWE; UAF; tamsayı/UB.</a:t>
-            </a:r>
-          </a:p>
-          <a:p>
-            <a:pPr>
-              <a:spcAft>
-                <a:spcPts val="300"/>
-              </a:spcAft>
-            </a:pPr>
-            <a:r>
-              <a:rPr sz="2000" b="1">
-                <a:solidFill>
-                  <a:srgbClr val="006D77"/>
-                </a:solidFill>
-              </a:rPr>
-              <a:t>• </a:t>
-            </a:r>
-            <a:r>
-              <a:rPr sz="2000" b="0">
-                <a:solidFill>
-                  <a:srgbClr val="1F2D3A"/>
-                </a:solidFill>
-              </a:rPr>
-              <a:t>Sanitizer (ASan/UBSan), fuzzing.</a:t>
-            </a:r>
-          </a:p>
-          <a:p>
-            <a:pPr>
-              <a:spcAft>
-                <a:spcPts val="300"/>
-              </a:spcAft>
-            </a:pPr>
-            <a:r>
-              <a:rPr sz="2000" b="1">
-                <a:solidFill>
-                  <a:srgbClr val="006D77"/>
-                </a:solidFill>
-              </a:rPr>
-              <a:t>• </a:t>
-            </a:r>
-            <a:r>
-              <a:rPr sz="2000" b="0">
-                <a:solidFill>
-                  <a:srgbClr val="1F2D3A"/>
-                </a:solidFill>
-              </a:rPr>
-              <a:t>Derleyici korumaları (kanarya, ASLR, NX).</a:t>
+              <a:t> Elevation of privilege (yetki yükseltme). Önlem: en az yetki, yetki denetimi, güvenli varsayılan.</a:t>
             </a:r>
           </a:p>
         </p:txBody>
@@ -7996,7 +7509,7 @@
                   <a:srgbClr val="006D77"/>
                 </a:solidFill>
               </a:rPr>
-              <a:t>5. hafta · anahtar noktalar</a:t>
+              <a:t>Soru 9</a:t>
             </a:r>
           </a:p>
         </p:txBody>
@@ -8010,7 +7523,7 @@
         <p:spPr>
           <a:xfrm>
             <a:off x="640080" y="1325880"/>
-            <a:ext cx="10911535" cy="1219200"/>
+            <a:ext cx="10911535" cy="439928"/>
           </a:xfrm>
           <a:prstGeom prst="rect">
             <a:avLst/>
@@ -8023,18 +7536,48 @@
           </a:bodyPr>
           <a:lstStyle/>
           <a:p>
-            <a:pPr>
-              <a:spcAft>
-                <a:spcPts val="300"/>
-              </a:spcAft>
-            </a:pPr>
+            <a:pPr algn="l"/>
             <a:r>
               <a:rPr sz="2000" b="1">
                 <a:solidFill>
-                  <a:srgbClr val="006D77"/>
-                </a:solidFill>
-              </a:rPr>
-              <a:t>• </a:t>
+                  <a:srgbClr val="1F2D3A"/>
+                </a:solidFill>
+              </a:rPr>
+              <a:t>Deserialization neden tehlikeli, çözüm?</a:t>
+            </a:r>
+          </a:p>
+        </p:txBody>
+      </p:sp>
+      <p:sp>
+        <p:nvSpPr>
+          <p:cNvPr id="8" name="TextBox 7"/>
+          <p:cNvSpPr txBox="1"/>
+          <p:nvPr/>
+        </p:nvSpPr>
+        <p:spPr>
+          <a:xfrm>
+            <a:off x="640080" y="1875536"/>
+            <a:ext cx="10911535" cy="770128"/>
+          </a:xfrm>
+          <a:prstGeom prst="rect">
+            <a:avLst/>
+          </a:prstGeom>
+          <a:noFill/>
+        </p:spPr>
+        <p:txBody>
+          <a:bodyPr wrap="square" lIns="45720" rIns="45720">
+            <a:spAutoFit/>
+          </a:bodyPr>
+          <a:lstStyle/>
+          <a:p>
+            <a:pPr algn="l"/>
+            <a:r>
+              <a:rPr sz="2000" b="1">
+                <a:solidFill>
+                  <a:srgbClr val="1F2D3A"/>
+                </a:solidFill>
+              </a:rPr>
+              <a:t>Cevap:</a:t>
             </a:r>
             <a:r>
               <a:rPr sz="2000" b="0">
@@ -8042,53 +7585,7 @@
                   <a:srgbClr val="1F2D3A"/>
                 </a:solidFill>
               </a:rPr>
-              <a:t>Yönetilen dil bellek hatasını çözer, enjeksiyonu çözmez.</a:t>
-            </a:r>
-          </a:p>
-          <a:p>
-            <a:pPr>
-              <a:spcAft>
-                <a:spcPts val="300"/>
-              </a:spcAft>
-            </a:pPr>
-            <a:r>
-              <a:rPr sz="2000" b="1">
-                <a:solidFill>
-                  <a:srgbClr val="006D77"/>
-                </a:solidFill>
-              </a:rPr>
-              <a:t>• </a:t>
-            </a:r>
-            <a:r>
-              <a:rPr sz="2000" b="0">
-                <a:solidFill>
-                  <a:srgbClr val="1F2D3A"/>
-                </a:solidFill>
-              </a:rPr>
-              <a:t>SQL/komut/yol enjeksiyonu → parametreli/argüman dizisi.</a:t>
-            </a:r>
-          </a:p>
-          <a:p>
-            <a:pPr>
-              <a:spcAft>
-                <a:spcPts val="300"/>
-              </a:spcAft>
-            </a:pPr>
-            <a:r>
-              <a:rPr sz="2000" b="1">
-                <a:solidFill>
-                  <a:srgbClr val="006D77"/>
-                </a:solidFill>
-              </a:rPr>
-              <a:t>• </a:t>
-            </a:r>
-            <a:r>
-              <a:rPr sz="2000" b="0">
-                <a:solidFill>
-                  <a:srgbClr val="1F2D3A"/>
-                </a:solidFill>
-              </a:rPr>
-              <a:t>Deserialization; ProGuard/R8; SBOM.</a:t>
+              <a:t> Çıkarma sırasında kod çalışabilir (gadget). Çözüm: veri biçimi + şema; zorunda kalınırsa beyaz liste filtresi.</a:t>
             </a:r>
           </a:p>
         </p:txBody>
@@ -8263,7 +7760,7 @@
                   <a:srgbClr val="006D77"/>
                 </a:solidFill>
               </a:rPr>
-              <a:t>6. hafta · anahtar noktalar</a:t>
+              <a:t>Örnek · çoktan seçmeli</a:t>
             </a:r>
           </a:p>
         </p:txBody>
@@ -8277,7 +7774,7 @@
         <p:spPr>
           <a:xfrm>
             <a:off x="640080" y="1325880"/>
-            <a:ext cx="10911535" cy="1219200"/>
+            <a:ext cx="10911535" cy="439928"/>
           </a:xfrm>
           <a:prstGeom prst="rect">
             <a:avLst/>
@@ -8290,41 +7787,56 @@
           </a:bodyPr>
           <a:lstStyle/>
           <a:p>
-            <a:pPr>
-              <a:spcAft>
-                <a:spcPts val="300"/>
-              </a:spcAft>
-            </a:pPr>
+            <a:pPr algn="l"/>
             <a:r>
               <a:rPr sz="2000" b="1">
                 <a:solidFill>
-                  <a:srgbClr val="006D77"/>
-                </a:solidFill>
-              </a:rPr>
-              <a:t>• </a:t>
-            </a:r>
+                  <a:srgbClr val="1F2D3A"/>
+                </a:solidFill>
+              </a:rPr>
+              <a:t>Aşağıdakilerden hangisi bir AEAD kipidir?</a:t>
+            </a:r>
+          </a:p>
+        </p:txBody>
+      </p:sp>
+      <p:sp>
+        <p:nvSpPr>
+          <p:cNvPr id="8" name="TextBox 7"/>
+          <p:cNvSpPr txBox="1"/>
+          <p:nvPr/>
+        </p:nvSpPr>
+        <p:spPr>
+          <a:xfrm>
+            <a:off x="640080" y="1875536"/>
+            <a:ext cx="10911535" cy="439928"/>
+          </a:xfrm>
+          <a:prstGeom prst="rect">
+            <a:avLst/>
+          </a:prstGeom>
+          <a:noFill/>
+        </p:spPr>
+        <p:txBody>
+          <a:bodyPr wrap="square" lIns="45720" rIns="45720">
+            <a:spAutoFit/>
+          </a:bodyPr>
+          <a:lstStyle/>
+          <a:p>
+            <a:pPr algn="l"/>
             <a:r>
               <a:rPr sz="2000" b="0">
                 <a:solidFill>
                   <a:srgbClr val="1F2D3A"/>
                 </a:solidFill>
               </a:rPr>
-              <a:t>RASP: algıla, savun, caydır.</a:t>
-            </a:r>
-          </a:p>
-          <a:p>
-            <a:pPr>
-              <a:spcAft>
-                <a:spcPts val="300"/>
-              </a:spcAft>
-            </a:pPr>
+              <a:t>A) ECB B) CBC C) </a:t>
+            </a:r>
             <a:r>
               <a:rPr sz="2000" b="1">
                 <a:solidFill>
-                  <a:srgbClr val="006D77"/>
-                </a:solidFill>
-              </a:rPr>
-              <a:t>• </a:t>
+                  <a:srgbClr val="1F2D3A"/>
+                </a:solidFill>
+              </a:rPr>
+              <a:t>GCM</a:t>
             </a:r>
             <a:r>
               <a:rPr sz="2000" b="0">
@@ -8332,30 +7844,7 @@
                   <a:srgbClr val="1F2D3A"/>
                 </a:solidFill>
               </a:rPr>
-              <a:t>Bütünlük (self-hash), anti-debug, hook algılama.</a:t>
-            </a:r>
-          </a:p>
-          <a:p>
-            <a:pPr>
-              <a:spcAft>
-                <a:spcPts val="300"/>
-              </a:spcAft>
-            </a:pPr>
-            <a:r>
-              <a:rPr sz="2000" b="1">
-                <a:solidFill>
-                  <a:srgbClr val="006D77"/>
-                </a:solidFill>
-              </a:rPr>
-              <a:t>• </a:t>
-            </a:r>
-            <a:r>
-              <a:rPr sz="2000" b="0">
-                <a:solidFill>
-                  <a:srgbClr val="1F2D3A"/>
-                </a:solidFill>
-              </a:rPr>
-              <a:t>Çapraz denetim; tepki politikası; cihaz bağlama.</a:t>
+              <a:t> ✓ D) Ham RSA</a:t>
             </a:r>
           </a:p>
         </p:txBody>
@@ -8530,428 +8019,127 @@
                   <a:srgbClr val="006D77"/>
                 </a:solidFill>
               </a:rPr>
-              <a:t>Sık karıştırılanlar</a:t>
-            </a:r>
-          </a:p>
-        </p:txBody>
-      </p:sp>
-      <p:graphicFrame>
-        <p:nvGraphicFramePr>
-          <p:cNvPr id="7" name="Table 6"/>
-          <p:cNvGraphicFramePr>
-            <a:graphicFrameLocks noGrp="1"/>
-          </p:cNvGraphicFramePr>
-          <p:nvPr/>
-        </p:nvGraphicFramePr>
-        <p:xfrm>
-          <a:off x="640080" y="1325880"/>
-          <a:ext cx="10911534" cy="2221991"/>
-        </p:xfrm>
-        <a:graphic>
-          <a:graphicData uri="http://schemas.openxmlformats.org/drawingml/2006/table">
-            <a:tbl>
-              <a:tblPr firstRow="1" bandRow="1">
-                <a:tableStyleId>{5C22544A-7EE6-4342-B048-85BDC9FD1C3A}</a:tableStyleId>
-              </a:tblPr>
-              <a:tblGrid>
-                <a:gridCol w="2216405"/>
-                <a:gridCol w="3580347"/>
-                <a:gridCol w="5114782"/>
-              </a:tblGrid>
-              <a:tr h="370331">
-                <a:tc>
-                  <a:txBody>
-                    <a:bodyPr wrap="square"/>
-                    <a:lstStyle/>
-                    <a:p>
-                      <a:r>
-                        <a:rPr sz="1439" b="1">
-                          <a:solidFill>
-                            <a:srgbClr val="FFFFFF"/>
-                          </a:solidFill>
-                        </a:rPr>
-                        <a:t>A</a:t>
-                      </a:r>
-                    </a:p>
-                  </a:txBody>
-                  <a:tcPr marL="54864" marR="54864" marT="27432" marB="27432" anchor="ctr">
-                    <a:solidFill>
-                      <a:srgbClr val="006D77"/>
-                    </a:solidFill>
-                  </a:tcPr>
-                </a:tc>
-                <a:tc>
-                  <a:txBody>
-                    <a:bodyPr wrap="square"/>
-                    <a:lstStyle/>
-                    <a:p>
-                      <a:r>
-                        <a:rPr sz="1439" b="1">
-                          <a:solidFill>
-                            <a:srgbClr val="FFFFFF"/>
-                          </a:solidFill>
-                        </a:rPr>
-                        <a:t>B</a:t>
-                      </a:r>
-                    </a:p>
-                  </a:txBody>
-                  <a:tcPr marL="54864" marR="54864" marT="27432" marB="27432" anchor="ctr">
-                    <a:solidFill>
-                      <a:srgbClr val="006D77"/>
-                    </a:solidFill>
-                  </a:tcPr>
-                </a:tc>
-                <a:tc>
-                  <a:txBody>
-                    <a:bodyPr wrap="square"/>
-                    <a:lstStyle/>
-                    <a:p>
-                      <a:r>
-                        <a:rPr sz="1439" b="1">
-                          <a:solidFill>
-                            <a:srgbClr val="FFFFFF"/>
-                          </a:solidFill>
-                        </a:rPr>
-                        <a:t>Fark</a:t>
-                      </a:r>
-                    </a:p>
-                  </a:txBody>
-                  <a:tcPr marL="54864" marR="54864" marT="27432" marB="27432" anchor="ctr">
-                    <a:solidFill>
-                      <a:srgbClr val="006D77"/>
-                    </a:solidFill>
-                  </a:tcPr>
-                </a:tc>
-              </a:tr>
-              <a:tr h="370331">
-                <a:tc>
-                  <a:txBody>
-                    <a:bodyPr wrap="square"/>
-                    <a:lstStyle/>
-                    <a:p>
-                      <a:r>
-                        <a:rPr sz="1439" b="0">
-                          <a:solidFill>
-                            <a:srgbClr val="1F2D3A"/>
-                          </a:solidFill>
-                        </a:rPr>
-                        <a:t>Hata</a:t>
-                      </a:r>
-                    </a:p>
-                  </a:txBody>
-                  <a:tcPr marL="54864" marR="54864" marT="27432" marB="27432" anchor="ctr">
-                    <a:solidFill>
-                      <a:srgbClr val="FFFFFF"/>
-                    </a:solidFill>
-                  </a:tcPr>
-                </a:tc>
-                <a:tc>
-                  <a:txBody>
-                    <a:bodyPr wrap="square"/>
-                    <a:lstStyle/>
-                    <a:p>
-                      <a:r>
-                        <a:rPr sz="1439" b="0">
-                          <a:solidFill>
-                            <a:srgbClr val="1F2D3A"/>
-                          </a:solidFill>
-                        </a:rPr>
-                        <a:t>Zafiyet</a:t>
-                      </a:r>
-                    </a:p>
-                  </a:txBody>
-                  <a:tcPr marL="54864" marR="54864" marT="27432" marB="27432" anchor="ctr">
-                    <a:solidFill>
-                      <a:srgbClr val="FFFFFF"/>
-                    </a:solidFill>
-                  </a:tcPr>
-                </a:tc>
-                <a:tc>
-                  <a:txBody>
-                    <a:bodyPr wrap="square"/>
-                    <a:lstStyle/>
-                    <a:p>
-                      <a:r>
-                        <a:rPr sz="1439" b="0">
-                          <a:solidFill>
-                            <a:srgbClr val="1F2D3A"/>
-                          </a:solidFill>
-                        </a:rPr>
-                        <a:t>Kötüye kullanılabilir hata</a:t>
-                      </a:r>
-                    </a:p>
-                  </a:txBody>
-                  <a:tcPr marL="54864" marR="54864" marT="27432" marB="27432" anchor="ctr">
-                    <a:solidFill>
-                      <a:srgbClr val="FFFFFF"/>
-                    </a:solidFill>
-                  </a:tcPr>
-                </a:tc>
-              </a:tr>
-              <a:tr h="370331">
-                <a:tc>
-                  <a:txBody>
-                    <a:bodyPr wrap="square"/>
-                    <a:lstStyle/>
-                    <a:p>
-                      <a:r>
-                        <a:rPr sz="1439" b="0">
-                          <a:solidFill>
-                            <a:srgbClr val="1F2D3A"/>
-                          </a:solidFill>
-                        </a:rPr>
-                        <a:t>Kara kutu</a:t>
-                      </a:r>
-                    </a:p>
-                  </a:txBody>
-                  <a:tcPr marL="54864" marR="54864" marT="27432" marB="27432" anchor="ctr">
-                    <a:solidFill>
-                      <a:srgbClr val="EEF7F8"/>
-                    </a:solidFill>
-                  </a:tcPr>
-                </a:tc>
-                <a:tc>
-                  <a:txBody>
-                    <a:bodyPr wrap="square"/>
-                    <a:lstStyle/>
-                    <a:p>
-                      <a:r>
-                        <a:rPr sz="1439" b="0">
-                          <a:solidFill>
-                            <a:srgbClr val="1F2D3A"/>
-                          </a:solidFill>
-                        </a:rPr>
-                        <a:t>Beyaz kutu (MATE)</a:t>
-                      </a:r>
-                    </a:p>
-                  </a:txBody>
-                  <a:tcPr marL="54864" marR="54864" marT="27432" marB="27432" anchor="ctr">
-                    <a:solidFill>
-                      <a:srgbClr val="EEF7F8"/>
-                    </a:solidFill>
-                  </a:tcPr>
-                </a:tc>
-                <a:tc>
-                  <a:txBody>
-                    <a:bodyPr wrap="square"/>
-                    <a:lstStyle/>
-                    <a:p>
-                      <a:r>
-                        <a:rPr sz="1439" b="0">
-                          <a:solidFill>
-                            <a:srgbClr val="1F2D3A"/>
-                          </a:solidFill>
-                        </a:rPr>
-                        <a:t>Programa sahip</a:t>
-                      </a:r>
-                    </a:p>
-                  </a:txBody>
-                  <a:tcPr marL="54864" marR="54864" marT="27432" marB="27432" anchor="ctr">
-                    <a:solidFill>
-                      <a:srgbClr val="EEF7F8"/>
-                    </a:solidFill>
-                  </a:tcPr>
-                </a:tc>
-              </a:tr>
-              <a:tr h="370331">
-                <a:tc>
-                  <a:txBody>
-                    <a:bodyPr wrap="square"/>
-                    <a:lstStyle/>
-                    <a:p>
-                      <a:r>
-                        <a:rPr sz="1439" b="0">
-                          <a:solidFill>
-                            <a:srgbClr val="1F2D3A"/>
-                          </a:solidFill>
-                        </a:rPr>
-                        <a:t>Simetrik</a:t>
-                      </a:r>
-                    </a:p>
-                  </a:txBody>
-                  <a:tcPr marL="54864" marR="54864" marT="27432" marB="27432" anchor="ctr">
-                    <a:solidFill>
-                      <a:srgbClr val="FFFFFF"/>
-                    </a:solidFill>
-                  </a:tcPr>
-                </a:tc>
-                <a:tc>
-                  <a:txBody>
-                    <a:bodyPr wrap="square"/>
-                    <a:lstStyle/>
-                    <a:p>
-                      <a:r>
-                        <a:rPr sz="1439" b="0">
-                          <a:solidFill>
-                            <a:srgbClr val="1F2D3A"/>
-                          </a:solidFill>
-                        </a:rPr>
-                        <a:t>Asimetrik</a:t>
-                      </a:r>
-                    </a:p>
-                  </a:txBody>
-                  <a:tcPr marL="54864" marR="54864" marT="27432" marB="27432" anchor="ctr">
-                    <a:solidFill>
-                      <a:srgbClr val="FFFFFF"/>
-                    </a:solidFill>
-                  </a:tcPr>
-                </a:tc>
-                <a:tc>
-                  <a:txBody>
-                    <a:bodyPr wrap="square"/>
-                    <a:lstStyle/>
-                    <a:p>
-                      <a:r>
-                        <a:rPr sz="1439" b="0">
-                          <a:solidFill>
-                            <a:srgbClr val="1F2D3A"/>
-                          </a:solidFill>
-                        </a:rPr>
-                        <a:t>Tek / çift anahtar</a:t>
-                      </a:r>
-                    </a:p>
-                  </a:txBody>
-                  <a:tcPr marL="54864" marR="54864" marT="27432" marB="27432" anchor="ctr">
-                    <a:solidFill>
-                      <a:srgbClr val="FFFFFF"/>
-                    </a:solidFill>
-                  </a:tcPr>
-                </a:tc>
-              </a:tr>
-              <a:tr h="370331">
-                <a:tc>
-                  <a:txBody>
-                    <a:bodyPr wrap="square"/>
-                    <a:lstStyle/>
-                    <a:p>
-                      <a:r>
-                        <a:rPr sz="1439" b="0">
-                          <a:solidFill>
-                            <a:srgbClr val="1F2D3A"/>
-                          </a:solidFill>
-                        </a:rPr>
-                        <a:t>AEAD</a:t>
-                      </a:r>
-                    </a:p>
-                  </a:txBody>
-                  <a:tcPr marL="54864" marR="54864" marT="27432" marB="27432" anchor="ctr">
-                    <a:solidFill>
-                      <a:srgbClr val="EEF7F8"/>
-                    </a:solidFill>
-                  </a:tcPr>
-                </a:tc>
-                <a:tc>
-                  <a:txBody>
-                    <a:bodyPr wrap="square"/>
-                    <a:lstStyle/>
-                    <a:p>
-                      <a:r>
-                        <a:rPr sz="1439" b="0">
-                          <a:solidFill>
-                            <a:srgbClr val="1F2D3A"/>
-                          </a:solidFill>
-                        </a:rPr>
-                        <a:t>Yalnız şifreleme</a:t>
-                      </a:r>
-                    </a:p>
-                  </a:txBody>
-                  <a:tcPr marL="54864" marR="54864" marT="27432" marB="27432" anchor="ctr">
-                    <a:solidFill>
-                      <a:srgbClr val="EEF7F8"/>
-                    </a:solidFill>
-                  </a:tcPr>
-                </a:tc>
-                <a:tc>
-                  <a:txBody>
-                    <a:bodyPr wrap="square"/>
-                    <a:lstStyle/>
-                    <a:p>
-                      <a:r>
-                        <a:rPr sz="1439" b="0">
-                          <a:solidFill>
-                            <a:srgbClr val="1F2D3A"/>
-                          </a:solidFill>
-                        </a:rPr>
-                        <a:t>+ bütünlük</a:t>
-                      </a:r>
-                    </a:p>
-                  </a:txBody>
-                  <a:tcPr marL="54864" marR="54864" marT="27432" marB="27432" anchor="ctr">
-                    <a:solidFill>
-                      <a:srgbClr val="EEF7F8"/>
-                    </a:solidFill>
-                  </a:tcPr>
-                </a:tc>
-              </a:tr>
-              <a:tr h="370336">
-                <a:tc>
-                  <a:txBody>
-                    <a:bodyPr wrap="square"/>
-                    <a:lstStyle/>
-                    <a:p>
-                      <a:r>
-                        <a:rPr sz="1439" b="0">
-                          <a:solidFill>
-                            <a:srgbClr val="1F2D3A"/>
-                          </a:solidFill>
-                        </a:rPr>
-                        <a:t>Gizleme</a:t>
-                      </a:r>
-                    </a:p>
-                  </a:txBody>
-                  <a:tcPr marL="54864" marR="54864" marT="27432" marB="27432" anchor="ctr">
-                    <a:solidFill>
-                      <a:srgbClr val="FFFFFF"/>
-                    </a:solidFill>
-                  </a:tcPr>
-                </a:tc>
-                <a:tc>
-                  <a:txBody>
-                    <a:bodyPr wrap="square"/>
-                    <a:lstStyle/>
-                    <a:p>
-                      <a:r>
-                        <a:rPr sz="1439" b="0">
-                          <a:solidFill>
-                            <a:srgbClr val="1F2D3A"/>
-                          </a:solidFill>
-                        </a:rPr>
-                        <a:t>Güvenli kod</a:t>
-                      </a:r>
-                    </a:p>
-                  </a:txBody>
-                  <a:tcPr marL="54864" marR="54864" marT="27432" marB="27432" anchor="ctr">
-                    <a:solidFill>
-                      <a:srgbClr val="FFFFFF"/>
-                    </a:solidFill>
-                  </a:tcPr>
-                </a:tc>
-                <a:tc>
-                  <a:txBody>
-                    <a:bodyPr wrap="square"/>
-                    <a:lstStyle/>
-                    <a:p>
-                      <a:r>
-                        <a:rPr sz="1439" b="0">
-                          <a:solidFill>
-                            <a:srgbClr val="1F2D3A"/>
-                          </a:solidFill>
-                        </a:rPr>
-                        <a:t>Hatayı düzeltmez</a:t>
-                      </a:r>
-                    </a:p>
-                  </a:txBody>
-                  <a:tcPr marL="54864" marR="54864" marT="27432" marB="27432" anchor="ctr">
-                    <a:solidFill>
-                      <a:srgbClr val="FFFFFF"/>
-                    </a:solidFill>
-                  </a:tcPr>
-                </a:tc>
-              </a:tr>
-            </a:tbl>
-          </a:graphicData>
-        </a:graphic>
-      </p:graphicFrame>
+              <a:t>Örnek · doğru/yanlış</a:t>
+            </a:r>
+          </a:p>
+        </p:txBody>
+      </p:sp>
+      <p:sp>
+        <p:nvSpPr>
+          <p:cNvPr id="7" name="TextBox 6"/>
+          <p:cNvSpPr txBox="1"/>
+          <p:nvPr/>
+        </p:nvSpPr>
+        <p:spPr>
+          <a:xfrm>
+            <a:off x="640080" y="1325880"/>
+            <a:ext cx="10911535" cy="1219200"/>
+          </a:xfrm>
+          <a:prstGeom prst="rect">
+            <a:avLst/>
+          </a:prstGeom>
+          <a:noFill/>
+        </p:spPr>
+        <p:txBody>
+          <a:bodyPr wrap="square" lIns="45720" rIns="45720">
+            <a:spAutoFit/>
+          </a:bodyPr>
+          <a:lstStyle/>
+          <a:p>
+            <a:pPr>
+              <a:spcAft>
+                <a:spcPts val="300"/>
+              </a:spcAft>
+            </a:pPr>
+            <a:r>
+              <a:rPr sz="2000" b="1">
+                <a:solidFill>
+                  <a:srgbClr val="006D77"/>
+                </a:solidFill>
+              </a:rPr>
+              <a:t>• </a:t>
+            </a:r>
+            <a:r>
+              <a:rPr sz="2000" b="0">
+                <a:solidFill>
+                  <a:srgbClr val="1F2D3A"/>
+                </a:solidFill>
+              </a:rPr>
+              <a:t>Gizleme hatayı düzeltir. </a:t>
+            </a:r>
+            <a:r>
+              <a:rPr sz="2000" b="1">
+                <a:solidFill>
+                  <a:srgbClr val="1F2D3A"/>
+                </a:solidFill>
+              </a:rPr>
+              <a:t>(Y)</a:t>
+            </a:r>
+          </a:p>
+          <a:p>
+            <a:pPr>
+              <a:spcAft>
+                <a:spcPts val="300"/>
+              </a:spcAft>
+            </a:pPr>
+            <a:r>
+              <a:rPr sz="2000" b="1">
+                <a:solidFill>
+                  <a:srgbClr val="006D77"/>
+                </a:solidFill>
+              </a:rPr>
+              <a:t>• </a:t>
+            </a:r>
+            <a:r>
+              <a:rPr sz="2000" b="0">
+                <a:solidFill>
+                  <a:srgbClr val="1F2D3A"/>
+                </a:solidFill>
+              </a:rPr>
+              <a:t>Nonce gizli olmalı. </a:t>
+            </a:r>
+            <a:r>
+              <a:rPr sz="2000" b="1">
+                <a:solidFill>
+                  <a:srgbClr val="1F2D3A"/>
+                </a:solidFill>
+              </a:rPr>
+              <a:t>(Y — benzersiz olmalı, gizli değil)</a:t>
+            </a:r>
+          </a:p>
+          <a:p>
+            <a:pPr>
+              <a:spcAft>
+                <a:spcPts val="300"/>
+              </a:spcAft>
+            </a:pPr>
+            <a:r>
+              <a:rPr sz="2000" b="1">
+                <a:solidFill>
+                  <a:srgbClr val="006D77"/>
+                </a:solidFill>
+              </a:rPr>
+              <a:t>• </a:t>
+            </a:r>
+            <a:r>
+              <a:rPr sz="2000" b="0">
+                <a:solidFill>
+                  <a:srgbClr val="1F2D3A"/>
+                </a:solidFill>
+              </a:rPr>
+              <a:t>Parametreli sorgu SQL enjeksiyonunu önler. </a:t>
+            </a:r>
+            <a:r>
+              <a:rPr sz="2000" b="1">
+                <a:solidFill>
+                  <a:srgbClr val="1F2D3A"/>
+                </a:solidFill>
+              </a:rPr>
+              <a:t>(D)</a:t>
+            </a:r>
+          </a:p>
+        </p:txBody>
+      </p:sp>
     </p:spTree>
   </p:cSld>
   <p:clrMapOvr>
@@ -8963,14 +8151,6 @@
 <file path=ppt/slides/slide24.xml><?xml version="1.0" encoding="utf-8"?>
 <p:sld xmlns:a="http://schemas.openxmlformats.org/drawingml/2006/main" xmlns:p="http://schemas.openxmlformats.org/presentationml/2006/main" xmlns:r="http://schemas.openxmlformats.org/officeDocument/2006/relationships">
   <p:cSld>
-    <p:bg>
-      <p:bgPr>
-        <a:solidFill>
-          <a:srgbClr val="006D77"/>
-        </a:solidFill>
-        <a:effectLst/>
-      </p:bgPr>
-    </p:bg>
     <p:spTree>
       <p:nvGrpSpPr>
         <p:cNvPr id="1" name=""/>
@@ -8978,9 +8158,33 @@
         <p:nvPr/>
       </p:nvGrpSpPr>
       <p:grpSpPr/>
-      <p:sp>
-        <p:nvSpPr>
-          <p:cNvPr id="2" name="TextBox 1"/>
+      <p:pic>
+        <p:nvPicPr>
+          <p:cNvPr id="2" name="Picture 1" descr="rteu_logo_kucuk.jpg"/>
+          <p:cNvPicPr>
+            <a:picLocks noChangeAspect="1"/>
+          </p:cNvPicPr>
+          <p:nvPr/>
+        </p:nvPicPr>
+        <p:blipFill>
+          <a:blip r:embed="rId2"/>
+          <a:stretch>
+            <a:fillRect/>
+          </a:stretch>
+        </p:blipFill>
+        <p:spPr>
+          <a:xfrm>
+            <a:off x="640080" y="164592"/>
+            <a:ext cx="242773" cy="329184"/>
+          </a:xfrm>
+          <a:prstGeom prst="rect">
+            <a:avLst/>
+          </a:prstGeom>
+        </p:spPr>
+      </p:pic>
+      <p:sp>
+        <p:nvSpPr>
+          <p:cNvPr id="3" name="TextBox 2"/>
           <p:cNvSpPr txBox="1"/>
           <p:nvPr/>
         </p:nvSpPr>
@@ -9003,7 +8207,7 @@
             <a:r>
               <a:rPr sz="1100" b="0">
                 <a:solidFill>
-                  <a:srgbClr val="D8F0F2"/>
+                  <a:srgbClr val="5B6770"/>
                 </a:solidFill>
               </a:rPr>
               <a:t>CEN429 Güvenli Programlama · Hafta 8</a:t>
@@ -9013,7 +8217,7 @@
       </p:sp>
       <p:sp>
         <p:nvSpPr>
-          <p:cNvPr id="3" name="TextBox 2"/>
+          <p:cNvPr id="4" name="TextBox 3"/>
           <p:cNvSpPr txBox="1"/>
           <p:nvPr/>
         </p:nvSpPr>
@@ -9036,7 +8240,7 @@
             <a:r>
               <a:rPr sz="1000" b="0">
                 <a:solidFill>
-                  <a:srgbClr val="D8F0F2"/>
+                  <a:srgbClr val="5B6770"/>
                 </a:solidFill>
               </a:rPr>
               <a:t>RTEÜ Bilgisayar Mühendisliği · 2026-2027 Güz</a:t>
@@ -9046,7 +8250,7 @@
       </p:sp>
       <p:sp>
         <p:nvSpPr>
-          <p:cNvPr id="4" name="TextBox 3"/>
+          <p:cNvPr id="5" name="TextBox 4"/>
           <p:cNvSpPr txBox="1"/>
           <p:nvPr/>
         </p:nvSpPr>
@@ -9070,7 +8274,7 @@
             <a:r>
               <a:rPr sz="1000" b="0">
                 <a:solidFill>
-                  <a:srgbClr val="D8F0F2"/>
+                  <a:srgbClr val="5B6770"/>
                 </a:solidFill>
               </a:rPr>
               <a:t>24</a:t>
@@ -9080,34 +8284,201 @@
       </p:sp>
       <p:sp>
         <p:nvSpPr>
-          <p:cNvPr id="5" name="TextBox 4"/>
-          <p:cNvSpPr txBox="1"/>
-          <p:nvPr/>
-        </p:nvSpPr>
-        <p:spPr>
-          <a:xfrm>
-            <a:off x="640080" y="2743200"/>
-            <a:ext cx="10911535" cy="1280160"/>
-          </a:xfrm>
-          <a:prstGeom prst="rect">
-            <a:avLst/>
-          </a:prstGeom>
-          <a:noFill/>
-        </p:spPr>
-        <p:txBody>
-          <a:bodyPr wrap="square" lIns="45720" rIns="45720">
-            <a:spAutoFit/>
-          </a:bodyPr>
+          <p:cNvPr id="6" name="TextBox 5"/>
+          <p:cNvSpPr txBox="1"/>
+          <p:nvPr/>
+        </p:nvSpPr>
+        <p:spPr>
+          <a:xfrm>
+            <a:off x="640080" y="548640"/>
+            <a:ext cx="10911535" cy="731520"/>
+          </a:xfrm>
+          <a:prstGeom prst="rect">
+            <a:avLst/>
+          </a:prstGeom>
+          <a:noFill/>
+        </p:spPr>
+        <p:txBody>
+          <a:bodyPr wrap="square" lIns="45720" rIns="45720" anchor="ctr">
+            <a:spAutoFit/>
+          </a:bodyPr>
+          <a:lstStyle/>
+          <a:p>
+            <a:r>
+              <a:rPr sz="2600" b="1">
+                <a:solidFill>
+                  <a:srgbClr val="006D77"/>
+                </a:solidFill>
+              </a:rPr>
+              <a:t>Örnek: hatayı bulun (1)</a:t>
+            </a:r>
+          </a:p>
+        </p:txBody>
+      </p:sp>
+      <p:sp>
+        <p:nvSpPr>
+          <p:cNvPr id="7" name="Rectangle 6"/>
+          <p:cNvSpPr/>
+          <p:nvPr/>
+        </p:nvSpPr>
+        <p:spPr>
+          <a:xfrm>
+            <a:off x="640080" y="1325880"/>
+            <a:ext cx="10911535" cy="1124712"/>
+          </a:xfrm>
+          <a:prstGeom prst="rect">
+            <a:avLst/>
+          </a:prstGeom>
+          <a:solidFill>
+            <a:srgbClr val="F3F4F6"/>
+          </a:solidFill>
+          <a:ln>
+            <a:solidFill>
+              <a:srgbClr val="D9DEE3"/>
+            </a:solidFill>
+          </a:ln>
+        </p:spPr>
+        <p:style>
+          <a:lnRef idx="1">
+            <a:schemeClr val="accent1"/>
+          </a:lnRef>
+          <a:fillRef idx="3">
+            <a:schemeClr val="accent1"/>
+          </a:fillRef>
+          <a:effectRef idx="2">
+            <a:schemeClr val="accent1"/>
+          </a:effectRef>
+          <a:fontRef idx="minor">
+            <a:schemeClr val="lt1"/>
+          </a:fontRef>
+        </p:style>
+        <p:txBody>
+          <a:bodyPr rtlCol="0" anchor="t" wrap="none" lIns="137160" rIns="137160" tIns="91440" bIns="91440"/>
           <a:lstStyle/>
           <a:p>
             <a:pPr algn="l"/>
             <a:r>
-              <a:rPr sz="4000" b="1">
-                <a:solidFill>
-                  <a:srgbClr val="FFFFFF"/>
-                </a:solidFill>
-              </a:rPr>
-              <a:t>Ek · Çözümlü pratik sorular</a:t>
+              <a:rPr sz="1116">
+                <a:solidFill>
+                  <a:srgbClr val="1F2D3A"/>
+                </a:solidFill>
+                <a:latin typeface="Consolas"/>
+              </a:rPr>
+              <a:t>void kaydet(const char *ad) {</a:t>
+            </a:r>
+          </a:p>
+          <a:p>
+            <a:pPr algn="l"/>
+            <a:r>
+              <a:rPr sz="1116">
+                <a:solidFill>
+                  <a:srgbClr val="1F2D3A"/>
+                </a:solidFill>
+                <a:latin typeface="Consolas"/>
+              </a:rPr>
+              <a:t>    char tampon[32];</a:t>
+            </a:r>
+          </a:p>
+          <a:p>
+            <a:pPr algn="l"/>
+            <a:r>
+              <a:rPr sz="1116">
+                <a:solidFill>
+                  <a:srgbClr val="1F2D3A"/>
+                </a:solidFill>
+                <a:latin typeface="Consolas"/>
+              </a:rPr>
+              <a:t>    sprintf(tampon, "kullanici=%s", ad);</a:t>
+            </a:r>
+          </a:p>
+          <a:p>
+            <a:pPr algn="l"/>
+            <a:r>
+              <a:rPr sz="1116">
+                <a:solidFill>
+                  <a:srgbClr val="1F2D3A"/>
+                </a:solidFill>
+                <a:latin typeface="Consolas"/>
+              </a:rPr>
+              <a:t>    syslog(LOG_INFO, tampon);</a:t>
+            </a:r>
+          </a:p>
+          <a:p>
+            <a:pPr algn="l"/>
+            <a:r>
+              <a:rPr sz="1116">
+                <a:solidFill>
+                  <a:srgbClr val="1F2D3A"/>
+                </a:solidFill>
+                <a:latin typeface="Consolas"/>
+              </a:rPr>
+              <a:t>}</a:t>
+            </a:r>
+          </a:p>
+        </p:txBody>
+      </p:sp>
+      <p:sp>
+        <p:nvSpPr>
+          <p:cNvPr id="8" name="Rectangle 7"/>
+          <p:cNvSpPr/>
+          <p:nvPr/>
+        </p:nvSpPr>
+        <p:spPr>
+          <a:xfrm>
+            <a:off x="640080" y="2560320"/>
+            <a:ext cx="10911535" cy="614476"/>
+          </a:xfrm>
+          <a:prstGeom prst="rect">
+            <a:avLst/>
+          </a:prstGeom>
+          <a:solidFill>
+            <a:srgbClr val="F3F4F6"/>
+          </a:solidFill>
+          <a:ln>
+            <a:solidFill>
+              <a:srgbClr val="D9DEE3"/>
+            </a:solidFill>
+          </a:ln>
+        </p:spPr>
+        <p:style>
+          <a:lnRef idx="1">
+            <a:schemeClr val="accent1"/>
+          </a:lnRef>
+          <a:fillRef idx="3">
+            <a:schemeClr val="accent1"/>
+          </a:fillRef>
+          <a:effectRef idx="2">
+            <a:schemeClr val="accent1"/>
+          </a:effectRef>
+          <a:fontRef idx="minor">
+            <a:schemeClr val="lt1"/>
+          </a:fontRef>
+        </p:style>
+        <p:txBody>
+          <a:bodyPr rtlCol="0" anchor="t" wrap="none" lIns="137160" rIns="137160" tIns="91440" bIns="91440"/>
+          <a:lstStyle/>
+          <a:p>
+            <a:pPr algn="l"/>
+            <a:r>
+              <a:rPr sz="1116">
+                <a:solidFill>
+                  <a:srgbClr val="1F2D3A"/>
+                </a:solidFill>
+                <a:latin typeface="Consolas"/>
+              </a:rPr>
+              <a:t>char parola[64];  oku(parola, sizeof parola);  dogrula(parola);</a:t>
+            </a:r>
+          </a:p>
+          <a:p>
+            <a:pPr algn="l"/>
+            <a:r>
+              <a:rPr sz="1116">
+                <a:solidFill>
+                  <a:srgbClr val="1F2D3A"/>
+                </a:solidFill>
+                <a:latin typeface="Consolas"/>
+              </a:rPr>
+              <a:t>memset(parola, 0, sizeof parola);  return;</a:t>
             </a:r>
           </a:p>
         </p:txBody>
@@ -9277,88 +8648,198 @@
           <a:lstStyle/>
           <a:p>
             <a:r>
-              <a:rPr sz="3000" b="1">
+              <a:rPr sz="2600" b="1">
                 <a:solidFill>
                   <a:srgbClr val="006D77"/>
                 </a:solidFill>
               </a:rPr>
-              <a:t>Soru 1</a:t>
-            </a:r>
-          </a:p>
-        </p:txBody>
-      </p:sp>
-      <p:sp>
-        <p:nvSpPr>
-          <p:cNvPr id="7" name="TextBox 6"/>
-          <p:cNvSpPr txBox="1"/>
+              <a:t>Örnek: hatayı bulun (2)</a:t>
+            </a:r>
+          </a:p>
+        </p:txBody>
+      </p:sp>
+      <p:sp>
+        <p:nvSpPr>
+          <p:cNvPr id="7" name="Rectangle 6"/>
+          <p:cNvSpPr/>
           <p:nvPr/>
         </p:nvSpPr>
         <p:spPr>
           <a:xfrm>
             <a:off x="640080" y="1325880"/>
-            <a:ext cx="10911535" cy="439928"/>
-          </a:xfrm>
-          <a:prstGeom prst="rect">
-            <a:avLst/>
-          </a:prstGeom>
-          <a:noFill/>
-        </p:spPr>
-        <p:txBody>
-          <a:bodyPr wrap="square" lIns="45720" rIns="45720">
-            <a:spAutoFit/>
-          </a:bodyPr>
+            <a:ext cx="10911535" cy="444398"/>
+          </a:xfrm>
+          <a:prstGeom prst="rect">
+            <a:avLst/>
+          </a:prstGeom>
+          <a:solidFill>
+            <a:srgbClr val="F3F4F6"/>
+          </a:solidFill>
+          <a:ln>
+            <a:solidFill>
+              <a:srgbClr val="D9DEE3"/>
+            </a:solidFill>
+          </a:ln>
+        </p:spPr>
+        <p:style>
+          <a:lnRef idx="1">
+            <a:schemeClr val="accent1"/>
+          </a:lnRef>
+          <a:fillRef idx="3">
+            <a:schemeClr val="accent1"/>
+          </a:fillRef>
+          <a:effectRef idx="2">
+            <a:schemeClr val="accent1"/>
+          </a:effectRef>
+          <a:fontRef idx="minor">
+            <a:schemeClr val="lt1"/>
+          </a:fontRef>
+        </p:style>
+        <p:txBody>
+          <a:bodyPr rtlCol="0" anchor="t" wrap="none" lIns="137160" rIns="137160" tIns="91440" bIns="91440"/>
           <a:lstStyle/>
           <a:p>
             <a:pPr algn="l"/>
             <a:r>
-              <a:rPr sz="2000" b="1">
+              <a:rPr sz="1116">
                 <a:solidFill>
                   <a:srgbClr val="1F2D3A"/>
                 </a:solidFill>
-              </a:rPr>
-              <a:t>MATE saldırgan neden kriptografiyi tek başına yetersiz bırakır?</a:t>
-            </a:r>
-          </a:p>
-        </p:txBody>
-      </p:sp>
-      <p:sp>
-        <p:nvSpPr>
-          <p:cNvPr id="8" name="TextBox 7"/>
-          <p:cNvSpPr txBox="1"/>
-          <p:nvPr/>
-        </p:nvSpPr>
-        <p:spPr>
-          <a:xfrm>
-            <a:off x="640080" y="1875536"/>
-            <a:ext cx="10911535" cy="770128"/>
-          </a:xfrm>
-          <a:prstGeom prst="rect">
-            <a:avLst/>
-          </a:prstGeom>
-          <a:noFill/>
-        </p:spPr>
-        <p:txBody>
-          <a:bodyPr wrap="square" lIns="45720" rIns="45720">
-            <a:spAutoFit/>
-          </a:bodyPr>
+                <a:latin typeface="Consolas"/>
+              </a:rPr>
+              <a:t>String sql = "SELECT * FROM notlar WHERE ogrenci = '" + no + "'";</a:t>
+            </a:r>
+          </a:p>
+        </p:txBody>
+      </p:sp>
+      <p:sp>
+        <p:nvSpPr>
+          <p:cNvPr id="8" name="Rectangle 7"/>
+          <p:cNvSpPr/>
+          <p:nvPr/>
+        </p:nvSpPr>
+        <p:spPr>
+          <a:xfrm>
+            <a:off x="640080" y="1880006"/>
+            <a:ext cx="10911535" cy="784555"/>
+          </a:xfrm>
+          <a:prstGeom prst="rect">
+            <a:avLst/>
+          </a:prstGeom>
+          <a:solidFill>
+            <a:srgbClr val="F3F4F6"/>
+          </a:solidFill>
+          <a:ln>
+            <a:solidFill>
+              <a:srgbClr val="D9DEE3"/>
+            </a:solidFill>
+          </a:ln>
+        </p:spPr>
+        <p:style>
+          <a:lnRef idx="1">
+            <a:schemeClr val="accent1"/>
+          </a:lnRef>
+          <a:fillRef idx="3">
+            <a:schemeClr val="accent1"/>
+          </a:fillRef>
+          <a:effectRef idx="2">
+            <a:schemeClr val="accent1"/>
+          </a:effectRef>
+          <a:fontRef idx="minor">
+            <a:schemeClr val="lt1"/>
+          </a:fontRef>
+        </p:style>
+        <p:txBody>
+          <a:bodyPr rtlCol="0" anchor="t" wrap="none" lIns="137160" rIns="137160" tIns="91440" bIns="91440"/>
           <a:lstStyle/>
           <a:p>
             <a:pPr algn="l"/>
             <a:r>
-              <a:rPr sz="2000" b="1">
+              <a:rPr sz="1116">
                 <a:solidFill>
                   <a:srgbClr val="1F2D3A"/>
                 </a:solidFill>
-              </a:rPr>
-              <a:t>Cevap:</a:t>
-            </a:r>
-            <a:r>
-              <a:rPr sz="2000" b="0">
+                <a:latin typeface="Consolas"/>
+              </a:rPr>
+              <a:t>EVP_DecryptUpdate(ctx, acik, &amp;n, sifreli, sifreli_n);</a:t>
+            </a:r>
+          </a:p>
+          <a:p>
+            <a:pPr algn="l"/>
+            <a:r>
+              <a:rPr sz="1116">
                 <a:solidFill>
                   <a:srgbClr val="1F2D3A"/>
                 </a:solidFill>
-              </a:rPr>
-              <a:t> Anahtar bellekte; saldırgan programı çalıştırıp okur. Kripto gizliliği verir ama beyaz kutuda anahtar korunmaz; RASP/gizleme/whitebox gerekir.</a:t>
+                <a:latin typeface="Consolas"/>
+              </a:rPr>
+              <a:t>kullan(acik, n);</a:t>
+            </a:r>
+          </a:p>
+          <a:p>
+            <a:pPr algn="l"/>
+            <a:r>
+              <a:rPr sz="1116">
+                <a:solidFill>
+                  <a:srgbClr val="1F2D3A"/>
+                </a:solidFill>
+                <a:latin typeface="Consolas"/>
+              </a:rPr>
+              <a:t>EVP_DecryptFinal_ex(ctx, acik + n, &amp;m);</a:t>
+            </a:r>
+          </a:p>
+        </p:txBody>
+      </p:sp>
+      <p:sp>
+        <p:nvSpPr>
+          <p:cNvPr id="9" name="Rectangle 8"/>
+          <p:cNvSpPr/>
+          <p:nvPr/>
+        </p:nvSpPr>
+        <p:spPr>
+          <a:xfrm>
+            <a:off x="640080" y="2774289"/>
+            <a:ext cx="10911535" cy="444398"/>
+          </a:xfrm>
+          <a:prstGeom prst="rect">
+            <a:avLst/>
+          </a:prstGeom>
+          <a:solidFill>
+            <a:srgbClr val="F3F4F6"/>
+          </a:solidFill>
+          <a:ln>
+            <a:solidFill>
+              <a:srgbClr val="D9DEE3"/>
+            </a:solidFill>
+          </a:ln>
+        </p:spPr>
+        <p:style>
+          <a:lnRef idx="1">
+            <a:schemeClr val="accent1"/>
+          </a:lnRef>
+          <a:fillRef idx="3">
+            <a:schemeClr val="accent1"/>
+          </a:fillRef>
+          <a:effectRef idx="2">
+            <a:schemeClr val="accent1"/>
+          </a:effectRef>
+          <a:fontRef idx="minor">
+            <a:schemeClr val="lt1"/>
+          </a:fontRef>
+        </p:style>
+        <p:txBody>
+          <a:bodyPr rtlCol="0" anchor="t" wrap="none" lIns="137160" rIns="137160" tIns="91440" bIns="91440"/>
+          <a:lstStyle/>
+          <a:p>
+            <a:pPr algn="l"/>
+            <a:r>
+              <a:rPr sz="1116">
+                <a:solidFill>
+                  <a:srgbClr val="1F2D3A"/>
+                </a:solidFill>
+                <a:latin typeface="Consolas"/>
+              </a:rPr>
+              <a:t>try { pinDenetle(zincir); } catch (KeyStoreException e) { e.printStackTrace(); }</a:t>
             </a:r>
           </a:p>
         </p:txBody>
@@ -9533,7 +9014,7 @@
                   <a:srgbClr val="006D77"/>
                 </a:solidFill>
               </a:rPr>
-              <a:t>Soru 2</a:t>
+              <a:t>Örnek: senaryolar</a:t>
             </a:r>
           </a:p>
         </p:txBody>
@@ -9547,7 +9028,7 @@
         <p:spPr>
           <a:xfrm>
             <a:off x="640080" y="1325880"/>
-            <a:ext cx="10911535" cy="439928"/>
+            <a:ext cx="10911535" cy="2346960"/>
           </a:xfrm>
           <a:prstGeom prst="rect">
             <a:avLst/>
@@ -9560,48 +9041,34 @@
           </a:bodyPr>
           <a:lstStyle/>
           <a:p>
-            <a:pPr algn="l"/>
+            <a:pPr>
+              <a:spcAft>
+                <a:spcPts val="300"/>
+              </a:spcAft>
+            </a:pPr>
             <a:r>
               <a:rPr sz="2000" b="1">
                 <a:solidFill>
+                  <a:srgbClr val="006D77"/>
+                </a:solidFill>
+              </a:rPr>
+              <a:t>1. </a:t>
+            </a:r>
+            <a:r>
+              <a:rPr sz="2000" b="0">
+                <a:solidFill>
                   <a:srgbClr val="1F2D3A"/>
                 </a:solidFill>
               </a:rPr>
-              <a:t>AES-GCM'de aynı nonce iki kez kullanılırsa?</a:t>
-            </a:r>
-          </a:p>
-        </p:txBody>
-      </p:sp>
-      <p:sp>
-        <p:nvSpPr>
-          <p:cNvPr id="8" name="TextBox 7"/>
-          <p:cNvSpPr txBox="1"/>
-          <p:nvPr/>
-        </p:nvSpPr>
-        <p:spPr>
-          <a:xfrm>
-            <a:off x="640080" y="1875536"/>
-            <a:ext cx="10911535" cy="770128"/>
-          </a:xfrm>
-          <a:prstGeom prst="rect">
-            <a:avLst/>
-          </a:prstGeom>
-          <a:noFill/>
-        </p:spPr>
-        <p:txBody>
-          <a:bodyPr wrap="square" lIns="45720" rIns="45720">
-            <a:spAutoFit/>
-          </a:bodyPr>
-          <a:lstStyle/>
-          <a:p>
-            <a:pPr algn="l"/>
+              <a:t>Bütün kullanıcılarda </a:t>
+            </a:r>
             <a:r>
               <a:rPr sz="2000" b="1">
                 <a:solidFill>
                   <a:srgbClr val="1F2D3A"/>
                 </a:solidFill>
               </a:rPr>
-              <a:t>Cevap:</a:t>
+              <a:t>aynı gömülü AES anahtarı</a:t>
             </a:r>
             <a:r>
               <a:rPr sz="2000" b="0">
@@ -9609,7 +9076,155 @@
                   <a:srgbClr val="1F2D3A"/>
                 </a:solidFill>
               </a:rPr>
-              <a:t> Gizlilik ve bütünlük çöker; anahtar akışı ve veri sızabilir. Nonce her zaman benzersiz olmalı.</a:t>
+              <a:t>: riskler ve öneri?</a:t>
+            </a:r>
+          </a:p>
+          <a:p>
+            <a:pPr>
+              <a:spcAft>
+                <a:spcPts val="300"/>
+              </a:spcAft>
+            </a:pPr>
+            <a:r>
+              <a:rPr sz="2000" b="1">
+                <a:solidFill>
+                  <a:srgbClr val="006D77"/>
+                </a:solidFill>
+              </a:rPr>
+              <a:t>2. </a:t>
+            </a:r>
+            <a:r>
+              <a:rPr sz="2000" b="0">
+                <a:solidFill>
+                  <a:srgbClr val="1F2D3A"/>
+                </a:solidFill>
+              </a:rPr>
+              <a:t>Dağıtılan paket </a:t>
+            </a:r>
+            <a:r>
+              <a:rPr sz="2000" b="1">
+                <a:solidFill>
+                  <a:srgbClr val="1F2D3A"/>
+                </a:solidFill>
+              </a:rPr>
+              <a:t>hata ayıklama derlemesi</a:t>
+            </a:r>
+            <a:r>
+              <a:rPr sz="2000" b="0">
+                <a:solidFill>
+                  <a:srgbClr val="1F2D3A"/>
+                </a:solidFill>
+              </a:rPr>
+              <a:t>: hangi bulgular?</a:t>
+            </a:r>
+          </a:p>
+          <a:p>
+            <a:pPr>
+              <a:spcAft>
+                <a:spcPts val="300"/>
+              </a:spcAft>
+            </a:pPr>
+            <a:r>
+              <a:rPr sz="2000" b="1">
+                <a:solidFill>
+                  <a:srgbClr val="006D77"/>
+                </a:solidFill>
+              </a:rPr>
+              <a:t>3. </a:t>
+            </a:r>
+            <a:r>
+              <a:rPr sz="2000" b="0">
+                <a:solidFill>
+                  <a:srgbClr val="1F2D3A"/>
+                </a:solidFill>
+              </a:rPr>
+              <a:t>"Bu işlemi ben yapmadım": hangi STRIDE harfi, hangi kanıt?</a:t>
+            </a:r>
+          </a:p>
+          <a:p>
+            <a:pPr>
+              <a:spcAft>
+                <a:spcPts val="300"/>
+              </a:spcAft>
+            </a:pPr>
+            <a:r>
+              <a:rPr sz="2000" b="1">
+                <a:solidFill>
+                  <a:srgbClr val="006D77"/>
+                </a:solidFill>
+              </a:rPr>
+              <a:t>4. </a:t>
+            </a:r>
+            <a:r>
+              <a:rPr sz="2000" b="0">
+                <a:solidFill>
+                  <a:srgbClr val="1F2D3A"/>
+                </a:solidFill>
+              </a:rPr>
+              <a:t>Arşiv açan fonksiyon: hangi hatalara karşı ne yaparsınız?</a:t>
+            </a:r>
+          </a:p>
+          <a:p>
+            <a:pPr>
+              <a:spcAft>
+                <a:spcPts val="300"/>
+              </a:spcAft>
+            </a:pPr>
+            <a:r>
+              <a:rPr sz="2000" b="1">
+                <a:solidFill>
+                  <a:srgbClr val="006D77"/>
+                </a:solidFill>
+              </a:rPr>
+              <a:t>5. </a:t>
+            </a:r>
+            <a:r>
+              <a:rPr sz="2000" b="0">
+                <a:solidFill>
+                  <a:srgbClr val="1F2D3A"/>
+                </a:solidFill>
+              </a:rPr>
+              <a:t>Log4Shell'de asıl sorun neydi, ne önlerdi?</a:t>
+            </a:r>
+          </a:p>
+          <a:p>
+            <a:pPr>
+              <a:spcAft>
+                <a:spcPts val="300"/>
+              </a:spcAft>
+            </a:pPr>
+            <a:r>
+              <a:rPr sz="2000" b="1">
+                <a:solidFill>
+                  <a:srgbClr val="006D77"/>
+                </a:solidFill>
+              </a:rPr>
+              <a:t>6. </a:t>
+            </a:r>
+            <a:r>
+              <a:rPr sz="2000" b="0">
+                <a:solidFill>
+                  <a:srgbClr val="1F2D3A"/>
+                </a:solidFill>
+              </a:rPr>
+              <a:t>RASP denetimleri neden tek bir </a:t>
+            </a:r>
+            <a:r>
+              <a:rPr sz="2000" b="0">
+                <a:solidFill>
+                  <a:srgbClr val="A1123F"/>
+                </a:solidFill>
+                <a:latin typeface="Consolas"/>
+              </a:rPr>
+              <a:t>if</a:t>
+            </a:r>
+            <a:r>
+              <a:rPr sz="2000" b="0">
+                <a:solidFill>
+                  <a:srgbClr val="1F2D3A"/>
+                </a:solidFill>
+              </a:rPr>
+              <a:t> ile değerlendirilmemeli?</a:t>
             </a:r>
           </a:p>
         </p:txBody>
@@ -9784,20 +9399,89 @@
                   <a:srgbClr val="006D77"/>
                 </a:solidFill>
               </a:rPr>
-              <a:t>Soru 3</a:t>
-            </a:r>
-          </a:p>
-        </p:txBody>
-      </p:sp>
-      <p:sp>
-        <p:nvSpPr>
-          <p:cNvPr id="7" name="TextBox 6"/>
-          <p:cNvSpPr txBox="1"/>
+              <a:t>Son söz (Quiz-1 hazırlık)</a:t>
+            </a:r>
+          </a:p>
+        </p:txBody>
+      </p:sp>
+      <p:sp>
+        <p:nvSpPr>
+          <p:cNvPr id="7" name="Rectangle 6"/>
+          <p:cNvSpPr/>
           <p:nvPr/>
         </p:nvSpPr>
         <p:spPr>
           <a:xfrm>
             <a:off x="640080" y="1325880"/>
+            <a:ext cx="10911535" cy="934719"/>
+          </a:xfrm>
+          <a:prstGeom prst="rect">
+            <a:avLst/>
+          </a:prstGeom>
+          <a:solidFill>
+            <a:srgbClr val="EEF7F8"/>
+          </a:solidFill>
+          <a:ln>
+            <a:solidFill>
+              <a:srgbClr val="006D77"/>
+            </a:solidFill>
+          </a:ln>
+        </p:spPr>
+        <p:style>
+          <a:lnRef idx="1">
+            <a:schemeClr val="accent1"/>
+          </a:lnRef>
+          <a:fillRef idx="3">
+            <a:schemeClr val="accent1"/>
+          </a:fillRef>
+          <a:effectRef idx="2">
+            <a:schemeClr val="accent1"/>
+          </a:effectRef>
+          <a:fontRef idx="minor">
+            <a:schemeClr val="lt1"/>
+          </a:fontRef>
+        </p:style>
+        <p:txBody>
+          <a:bodyPr rtlCol="0" anchor="ctr" wrap="square" lIns="182880"/>
+          <a:lstStyle/>
+          <a:p>
+            <a:pPr algn="l"/>
+            <a:r>
+              <a:rPr sz="2000" b="0">
+                <a:solidFill>
+                  <a:srgbClr val="1F2D3A"/>
+                </a:solidFill>
+              </a:rPr>
+              <a:t>Ezber değil, </a:t>
+            </a:r>
+            <a:r>
+              <a:rPr sz="2000" b="1">
+                <a:solidFill>
+                  <a:srgbClr val="1F2D3A"/>
+                </a:solidFill>
+              </a:rPr>
+              <a:t>neden</a:t>
+            </a:r>
+            <a:r>
+              <a:rPr sz="2000" b="0">
+                <a:solidFill>
+                  <a:srgbClr val="1F2D3A"/>
+                </a:solidFill>
+              </a:rPr>
+              <a:t> ölçülür: "neden bu kip?", "neden bu denetim?", "neyi korumaz?"</a:t>
+            </a:r>
+          </a:p>
+        </p:txBody>
+      </p:sp>
+      <p:sp>
+        <p:nvSpPr>
+          <p:cNvPr id="8" name="TextBox 7"/>
+          <p:cNvSpPr txBox="1"/>
+          <p:nvPr/>
+        </p:nvSpPr>
+        <p:spPr>
+          <a:xfrm>
+            <a:off x="640080" y="2370328"/>
             <a:ext cx="10911535" cy="439928"/>
           </a:xfrm>
           <a:prstGeom prst="rect">
@@ -9813,54 +9497,12 @@
           <a:p>
             <a:pPr algn="l"/>
             <a:r>
-              <a:rPr sz="2000" b="1">
+              <a:rPr sz="2000" b="0">
                 <a:solidFill>
                   <a:srgbClr val="1F2D3A"/>
                 </a:solidFill>
               </a:rPr>
-              <a:t>SQL enjeksiyonunu ne kesin önler?</a:t>
-            </a:r>
-          </a:p>
-        </p:txBody>
-      </p:sp>
-      <p:sp>
-        <p:nvSpPr>
-          <p:cNvPr id="8" name="TextBox 7"/>
-          <p:cNvSpPr txBox="1"/>
-          <p:nvPr/>
-        </p:nvSpPr>
-        <p:spPr>
-          <a:xfrm>
-            <a:off x="640080" y="1875536"/>
-            <a:ext cx="10911535" cy="770128"/>
-          </a:xfrm>
-          <a:prstGeom prst="rect">
-            <a:avLst/>
-          </a:prstGeom>
-          <a:noFill/>
-        </p:spPr>
-        <p:txBody>
-          <a:bodyPr wrap="square" lIns="45720" rIns="45720">
-            <a:spAutoFit/>
-          </a:bodyPr>
-          <a:lstStyle/>
-          <a:p>
-            <a:pPr algn="l"/>
-            <a:r>
-              <a:rPr sz="2000" b="1">
-                <a:solidFill>
-                  <a:srgbClr val="1F2D3A"/>
-                </a:solidFill>
-              </a:rPr>
-              <a:t>Cevap:</a:t>
-            </a:r>
-            <a:r>
-              <a:rPr sz="2000" b="0">
-                <a:solidFill>
-                  <a:srgbClr val="1F2D3A"/>
-                </a:solidFill>
-              </a:rPr>
-              <a:t> Parametreli sorgu (prepared statement); veri asla komut olarak yorumlanmaz. String birleştirme yapılmaz.</a:t>
+              <a:t>İyi şanslar.</a:t>
             </a:r>
           </a:p>
         </p:txBody>
@@ -10035,7 +9677,7 @@
                   <a:srgbClr val="006D77"/>
                 </a:solidFill>
               </a:rPr>
-              <a:t>Soru 4</a:t>
+              <a:t>Gelecek hafta</a:t>
             </a:r>
           </a:p>
         </p:txBody>
@@ -10069,7 +9711,7 @@
                   <a:srgbClr val="1F2D3A"/>
                 </a:solidFill>
               </a:rPr>
-              <a:t>ASan hangi taşmayı göremez?</a:t>
+              <a:t>Hafta 9 — Gelişmiş kod gizleme ve çeşitlendirme</a:t>
             </a:r>
           </a:p>
         </p:txBody>
@@ -10083,7 +9725,7 @@
         <p:spPr>
           <a:xfrm>
             <a:off x="640080" y="1875536"/>
-            <a:ext cx="10911535" cy="439928"/>
+            <a:ext cx="10911535" cy="1219200"/>
           </a:xfrm>
           <a:prstGeom prst="rect">
             <a:avLst/>
@@ -10096,14 +9738,41 @@
           </a:bodyPr>
           <a:lstStyle/>
           <a:p>
-            <a:pPr algn="l"/>
+            <a:pPr>
+              <a:spcAft>
+                <a:spcPts val="300"/>
+              </a:spcAft>
+            </a:pPr>
             <a:r>
               <a:rPr sz="2000" b="1">
                 <a:solidFill>
+                  <a:srgbClr val="006D77"/>
+                </a:solidFill>
+              </a:rPr>
+              <a:t>• </a:t>
+            </a:r>
+            <a:r>
+              <a:rPr sz="2000" b="0">
+                <a:solidFill>
                   <a:srgbClr val="1F2D3A"/>
                 </a:solidFill>
               </a:rPr>
-              <a:t>Cevap:</a:t>
+              <a:t>Gizleme taksonomisi, opak yüklemler, veri kodlama</a:t>
+            </a:r>
+          </a:p>
+          <a:p>
+            <a:pPr>
+              <a:spcAft>
+                <a:spcPts val="300"/>
+              </a:spcAft>
+            </a:pPr>
+            <a:r>
+              <a:rPr sz="2000" b="1">
+                <a:solidFill>
+                  <a:srgbClr val="006D77"/>
+                </a:solidFill>
+              </a:rPr>
+              <a:t>• </a:t>
             </a:r>
             <a:r>
               <a:rPr sz="2000" b="0">
@@ -10111,258 +9780,30 @@
                   <a:srgbClr val="1F2D3A"/>
                 </a:solidFill>
               </a:rPr>
-              <a:t> Aynı yapının içinde alandan alana taşmayı (arada zehirli bölge yoktur).</a:t>
-            </a:r>
-          </a:p>
-        </p:txBody>
-      </p:sp>
-    </p:spTree>
-  </p:cSld>
-  <p:clrMapOvr>
-    <a:masterClrMapping/>
-  </p:clrMapOvr>
-</p:sld>
-</file>
-
-<file path=ppt/slides/slide29.xml><?xml version="1.0" encoding="utf-8"?>
-<p:sld xmlns:a="http://schemas.openxmlformats.org/drawingml/2006/main" xmlns:p="http://schemas.openxmlformats.org/presentationml/2006/main" xmlns:r="http://schemas.openxmlformats.org/officeDocument/2006/relationships">
-  <p:cSld>
-    <p:spTree>
-      <p:nvGrpSpPr>
-        <p:cNvPr id="1" name=""/>
-        <p:cNvGrpSpPr/>
-        <p:nvPr/>
-      </p:nvGrpSpPr>
-      <p:grpSpPr/>
-      <p:pic>
-        <p:nvPicPr>
-          <p:cNvPr id="2" name="Picture 1" descr="rteu_logo_kucuk.jpg"/>
-          <p:cNvPicPr>
-            <a:picLocks noChangeAspect="1"/>
-          </p:cNvPicPr>
-          <p:nvPr/>
-        </p:nvPicPr>
-        <p:blipFill>
-          <a:blip r:embed="rId2"/>
-          <a:stretch>
-            <a:fillRect/>
-          </a:stretch>
-        </p:blipFill>
-        <p:spPr>
-          <a:xfrm>
-            <a:off x="640080" y="164592"/>
-            <a:ext cx="242773" cy="329184"/>
-          </a:xfrm>
-          <a:prstGeom prst="rect">
-            <a:avLst/>
-          </a:prstGeom>
-        </p:spPr>
-      </p:pic>
-      <p:sp>
-        <p:nvSpPr>
-          <p:cNvPr id="3" name="TextBox 2"/>
-          <p:cNvSpPr txBox="1"/>
-          <p:nvPr/>
-        </p:nvSpPr>
-        <p:spPr>
-          <a:xfrm>
-            <a:off x="1051560" y="182880"/>
-            <a:ext cx="7315200" cy="320040"/>
-          </a:xfrm>
-          <a:prstGeom prst="rect">
-            <a:avLst/>
-          </a:prstGeom>
-          <a:noFill/>
-        </p:spPr>
-        <p:txBody>
-          <a:bodyPr wrap="square" lIns="45720" rIns="45720">
-            <a:spAutoFit/>
-          </a:bodyPr>
-          <a:lstStyle/>
-          <a:p>
-            <a:r>
-              <a:rPr sz="1100" b="0">
-                <a:solidFill>
-                  <a:srgbClr val="5B6770"/>
-                </a:solidFill>
-              </a:rPr>
-              <a:t>CEN429 Güvenli Programlama · Hafta 8</a:t>
-            </a:r>
-          </a:p>
-        </p:txBody>
-      </p:sp>
-      <p:sp>
-        <p:nvSpPr>
-          <p:cNvPr id="4" name="TextBox 3"/>
-          <p:cNvSpPr txBox="1"/>
-          <p:nvPr/>
-        </p:nvSpPr>
-        <p:spPr>
-          <a:xfrm>
-            <a:off x="640080" y="6446520"/>
-            <a:ext cx="7315200" cy="274320"/>
-          </a:xfrm>
-          <a:prstGeom prst="rect">
-            <a:avLst/>
-          </a:prstGeom>
-          <a:noFill/>
-        </p:spPr>
-        <p:txBody>
-          <a:bodyPr wrap="square" lIns="45720" rIns="45720">
-            <a:spAutoFit/>
-          </a:bodyPr>
-          <a:lstStyle/>
-          <a:p>
-            <a:r>
-              <a:rPr sz="1000" b="0">
-                <a:solidFill>
-                  <a:srgbClr val="5B6770"/>
-                </a:solidFill>
-              </a:rPr>
-              <a:t>RTEÜ Bilgisayar Mühendisliği · 2026-2027 Güz</a:t>
-            </a:r>
-          </a:p>
-        </p:txBody>
-      </p:sp>
-      <p:sp>
-        <p:nvSpPr>
-          <p:cNvPr id="5" name="TextBox 4"/>
-          <p:cNvSpPr txBox="1"/>
-          <p:nvPr/>
-        </p:nvSpPr>
-        <p:spPr>
-          <a:xfrm>
-            <a:off x="10637215" y="6446520"/>
-            <a:ext cx="914400" cy="274320"/>
-          </a:xfrm>
-          <a:prstGeom prst="rect">
-            <a:avLst/>
-          </a:prstGeom>
-          <a:noFill/>
-        </p:spPr>
-        <p:txBody>
-          <a:bodyPr wrap="square" lIns="45720" rIns="45720">
-            <a:spAutoFit/>
-          </a:bodyPr>
-          <a:lstStyle/>
-          <a:p>
-            <a:pPr algn="r"/>
-            <a:r>
-              <a:rPr sz="1000" b="0">
-                <a:solidFill>
-                  <a:srgbClr val="5B6770"/>
-                </a:solidFill>
-              </a:rPr>
-              <a:t>29</a:t>
-            </a:r>
-          </a:p>
-        </p:txBody>
-      </p:sp>
-      <p:sp>
-        <p:nvSpPr>
-          <p:cNvPr id="6" name="TextBox 5"/>
-          <p:cNvSpPr txBox="1"/>
-          <p:nvPr/>
-        </p:nvSpPr>
-        <p:spPr>
-          <a:xfrm>
-            <a:off x="640080" y="548640"/>
-            <a:ext cx="10911535" cy="731520"/>
-          </a:xfrm>
-          <a:prstGeom prst="rect">
-            <a:avLst/>
-          </a:prstGeom>
-          <a:noFill/>
-        </p:spPr>
-        <p:txBody>
-          <a:bodyPr wrap="square" lIns="45720" rIns="45720" anchor="ctr">
-            <a:spAutoFit/>
-          </a:bodyPr>
-          <a:lstStyle/>
-          <a:p>
-            <a:r>
-              <a:rPr sz="3000" b="1">
+              <a:t>Sanallaştırma ve derleyici tabanlı gizleme (kavram)</a:t>
+            </a:r>
+          </a:p>
+          <a:p>
+            <a:pPr>
+              <a:spcAft>
+                <a:spcPts val="300"/>
+              </a:spcAft>
+            </a:pPr>
+            <a:r>
+              <a:rPr sz="2000" b="1">
                 <a:solidFill>
                   <a:srgbClr val="006D77"/>
                 </a:solidFill>
               </a:rPr>
-              <a:t>Soru 5</a:t>
-            </a:r>
-          </a:p>
-        </p:txBody>
-      </p:sp>
-      <p:sp>
-        <p:nvSpPr>
-          <p:cNvPr id="7" name="TextBox 6"/>
-          <p:cNvSpPr txBox="1"/>
-          <p:nvPr/>
-        </p:nvSpPr>
-        <p:spPr>
-          <a:xfrm>
-            <a:off x="640080" y="1325880"/>
-            <a:ext cx="10911535" cy="439928"/>
-          </a:xfrm>
-          <a:prstGeom prst="rect">
-            <a:avLst/>
-          </a:prstGeom>
-          <a:noFill/>
-        </p:spPr>
-        <p:txBody>
-          <a:bodyPr wrap="square" lIns="45720" rIns="45720">
-            <a:spAutoFit/>
-          </a:bodyPr>
-          <a:lstStyle/>
-          <a:p>
-            <a:pPr algn="l"/>
-            <a:r>
-              <a:rPr sz="2000" b="1">
+              <a:t>• </a:t>
+            </a:r>
+            <a:r>
+              <a:rPr sz="2000" b="0">
                 <a:solidFill>
                   <a:srgbClr val="1F2D3A"/>
                 </a:solidFill>
               </a:rPr>
-              <a:t>Kanarya neyi durdurur, neyi durdurmaz?</a:t>
-            </a:r>
-          </a:p>
-        </p:txBody>
-      </p:sp>
-      <p:sp>
-        <p:nvSpPr>
-          <p:cNvPr id="8" name="TextBox 7"/>
-          <p:cNvSpPr txBox="1"/>
-          <p:nvPr/>
-        </p:nvSpPr>
-        <p:spPr>
-          <a:xfrm>
-            <a:off x="640080" y="1875536"/>
-            <a:ext cx="10911535" cy="770128"/>
-          </a:xfrm>
-          <a:prstGeom prst="rect">
-            <a:avLst/>
-          </a:prstGeom>
-          <a:noFill/>
-        </p:spPr>
-        <p:txBody>
-          <a:bodyPr wrap="square" lIns="45720" rIns="45720">
-            <a:spAutoFit/>
-          </a:bodyPr>
-          <a:lstStyle/>
-          <a:p>
-            <a:pPr algn="l"/>
-            <a:r>
-              <a:rPr sz="2000" b="1">
-                <a:solidFill>
-                  <a:srgbClr val="1F2D3A"/>
-                </a:solidFill>
-              </a:rPr>
-              <a:t>Cevap:</a:t>
-            </a:r>
-            <a:r>
-              <a:rPr sz="2000" b="0">
-                <a:solidFill>
-                  <a:srgbClr val="1F2D3A"/>
-                </a:solidFill>
-              </a:rPr>
-              <a:t> Durdurur: dönüş adresine ulaşan yığın taşması. Durdurmaz: öbek taşması, önceki değişkenler, sızan kanarya.</a:t>
+              <a:t>Gizlemenin ölçülmesi: güç, dayanıklılık, maliyet</a:t>
             </a:r>
           </a:p>
         </p:txBody>
@@ -10505,2605 +9946,6 @@
                 </a:solidFill>
               </a:rPr>
               <a:t>3</a:t>
-            </a:r>
-          </a:p>
-        </p:txBody>
-      </p:sp>
-      <p:sp>
-        <p:nvSpPr>
-          <p:cNvPr id="6" name="TextBox 5"/>
-          <p:cNvSpPr txBox="1"/>
-          <p:nvPr/>
-        </p:nvSpPr>
-        <p:spPr>
-          <a:xfrm>
-            <a:off x="640080" y="548640"/>
-            <a:ext cx="10911535" cy="731520"/>
-          </a:xfrm>
-          <a:prstGeom prst="rect">
-            <a:avLst/>
-          </a:prstGeom>
-          <a:noFill/>
-        </p:spPr>
-        <p:txBody>
-          <a:bodyPr wrap="square" lIns="45720" rIns="45720" anchor="ctr">
-            <a:spAutoFit/>
-          </a:bodyPr>
-          <a:lstStyle/>
-          <a:p>
-            <a:r>
-              <a:rPr sz="3000" b="1">
-                <a:solidFill>
-                  <a:srgbClr val="006D77"/>
-                </a:solidFill>
-              </a:rPr>
-              <a:t>Vize notu hesabı — şema</a:t>
-            </a:r>
-          </a:p>
-        </p:txBody>
-      </p:sp>
-      <p:pic>
-        <p:nvPicPr>
-          <p:cNvPr id="7" name="Picture 6" descr="h08-03-vize-hesabi.png"/>
-          <p:cNvPicPr>
-            <a:picLocks noChangeAspect="1"/>
-          </p:cNvPicPr>
-          <p:nvPr/>
-        </p:nvPicPr>
-        <p:blipFill>
-          <a:blip r:embed="rId3"/>
-          <a:stretch>
-            <a:fillRect/>
-          </a:stretch>
-        </p:blipFill>
-        <p:spPr>
-          <a:xfrm>
-            <a:off x="2046645" y="1325880"/>
-            <a:ext cx="8098404" cy="3206099"/>
-          </a:xfrm>
-          <a:prstGeom prst="rect">
-            <a:avLst/>
-          </a:prstGeom>
-        </p:spPr>
-      </p:pic>
-    </p:spTree>
-  </p:cSld>
-  <p:clrMapOvr>
-    <a:masterClrMapping/>
-  </p:clrMapOvr>
-</p:sld>
-</file>
-
-<file path=ppt/slides/slide30.xml><?xml version="1.0" encoding="utf-8"?>
-<p:sld xmlns:a="http://schemas.openxmlformats.org/drawingml/2006/main" xmlns:p="http://schemas.openxmlformats.org/presentationml/2006/main" xmlns:r="http://schemas.openxmlformats.org/officeDocument/2006/relationships">
-  <p:cSld>
-    <p:spTree>
-      <p:nvGrpSpPr>
-        <p:cNvPr id="1" name=""/>
-        <p:cNvGrpSpPr/>
-        <p:nvPr/>
-      </p:nvGrpSpPr>
-      <p:grpSpPr/>
-      <p:pic>
-        <p:nvPicPr>
-          <p:cNvPr id="2" name="Picture 1" descr="rteu_logo_kucuk.jpg"/>
-          <p:cNvPicPr>
-            <a:picLocks noChangeAspect="1"/>
-          </p:cNvPicPr>
-          <p:nvPr/>
-        </p:nvPicPr>
-        <p:blipFill>
-          <a:blip r:embed="rId2"/>
-          <a:stretch>
-            <a:fillRect/>
-          </a:stretch>
-        </p:blipFill>
-        <p:spPr>
-          <a:xfrm>
-            <a:off x="640080" y="164592"/>
-            <a:ext cx="242773" cy="329184"/>
-          </a:xfrm>
-          <a:prstGeom prst="rect">
-            <a:avLst/>
-          </a:prstGeom>
-        </p:spPr>
-      </p:pic>
-      <p:sp>
-        <p:nvSpPr>
-          <p:cNvPr id="3" name="TextBox 2"/>
-          <p:cNvSpPr txBox="1"/>
-          <p:nvPr/>
-        </p:nvSpPr>
-        <p:spPr>
-          <a:xfrm>
-            <a:off x="1051560" y="182880"/>
-            <a:ext cx="7315200" cy="320040"/>
-          </a:xfrm>
-          <a:prstGeom prst="rect">
-            <a:avLst/>
-          </a:prstGeom>
-          <a:noFill/>
-        </p:spPr>
-        <p:txBody>
-          <a:bodyPr wrap="square" lIns="45720" rIns="45720">
-            <a:spAutoFit/>
-          </a:bodyPr>
-          <a:lstStyle/>
-          <a:p>
-            <a:r>
-              <a:rPr sz="1100" b="0">
-                <a:solidFill>
-                  <a:srgbClr val="5B6770"/>
-                </a:solidFill>
-              </a:rPr>
-              <a:t>CEN429 Güvenli Programlama · Hafta 8</a:t>
-            </a:r>
-          </a:p>
-        </p:txBody>
-      </p:sp>
-      <p:sp>
-        <p:nvSpPr>
-          <p:cNvPr id="4" name="TextBox 3"/>
-          <p:cNvSpPr txBox="1"/>
-          <p:nvPr/>
-        </p:nvSpPr>
-        <p:spPr>
-          <a:xfrm>
-            <a:off x="640080" y="6446520"/>
-            <a:ext cx="7315200" cy="274320"/>
-          </a:xfrm>
-          <a:prstGeom prst="rect">
-            <a:avLst/>
-          </a:prstGeom>
-          <a:noFill/>
-        </p:spPr>
-        <p:txBody>
-          <a:bodyPr wrap="square" lIns="45720" rIns="45720">
-            <a:spAutoFit/>
-          </a:bodyPr>
-          <a:lstStyle/>
-          <a:p>
-            <a:r>
-              <a:rPr sz="1000" b="0">
-                <a:solidFill>
-                  <a:srgbClr val="5B6770"/>
-                </a:solidFill>
-              </a:rPr>
-              <a:t>RTEÜ Bilgisayar Mühendisliği · 2026-2027 Güz</a:t>
-            </a:r>
-          </a:p>
-        </p:txBody>
-      </p:sp>
-      <p:sp>
-        <p:nvSpPr>
-          <p:cNvPr id="5" name="TextBox 4"/>
-          <p:cNvSpPr txBox="1"/>
-          <p:nvPr/>
-        </p:nvSpPr>
-        <p:spPr>
-          <a:xfrm>
-            <a:off x="10637215" y="6446520"/>
-            <a:ext cx="914400" cy="274320"/>
-          </a:xfrm>
-          <a:prstGeom prst="rect">
-            <a:avLst/>
-          </a:prstGeom>
-          <a:noFill/>
-        </p:spPr>
-        <p:txBody>
-          <a:bodyPr wrap="square" lIns="45720" rIns="45720">
-            <a:spAutoFit/>
-          </a:bodyPr>
-          <a:lstStyle/>
-          <a:p>
-            <a:pPr algn="r"/>
-            <a:r>
-              <a:rPr sz="1000" b="0">
-                <a:solidFill>
-                  <a:srgbClr val="5B6770"/>
-                </a:solidFill>
-              </a:rPr>
-              <a:t>30</a:t>
-            </a:r>
-          </a:p>
-        </p:txBody>
-      </p:sp>
-      <p:sp>
-        <p:nvSpPr>
-          <p:cNvPr id="6" name="TextBox 5"/>
-          <p:cNvSpPr txBox="1"/>
-          <p:nvPr/>
-        </p:nvSpPr>
-        <p:spPr>
-          <a:xfrm>
-            <a:off x="640080" y="548640"/>
-            <a:ext cx="10911535" cy="731520"/>
-          </a:xfrm>
-          <a:prstGeom prst="rect">
-            <a:avLst/>
-          </a:prstGeom>
-          <a:noFill/>
-        </p:spPr>
-        <p:txBody>
-          <a:bodyPr wrap="square" lIns="45720" rIns="45720" anchor="ctr">
-            <a:spAutoFit/>
-          </a:bodyPr>
-          <a:lstStyle/>
-          <a:p>
-            <a:r>
-              <a:rPr sz="3000" b="1">
-                <a:solidFill>
-                  <a:srgbClr val="006D77"/>
-                </a:solidFill>
-              </a:rPr>
-              <a:t>Soru 6</a:t>
-            </a:r>
-          </a:p>
-        </p:txBody>
-      </p:sp>
-      <p:sp>
-        <p:nvSpPr>
-          <p:cNvPr id="7" name="TextBox 6"/>
-          <p:cNvSpPr txBox="1"/>
-          <p:nvPr/>
-        </p:nvSpPr>
-        <p:spPr>
-          <a:xfrm>
-            <a:off x="640080" y="1325880"/>
-            <a:ext cx="10911535" cy="439928"/>
-          </a:xfrm>
-          <a:prstGeom prst="rect">
-            <a:avLst/>
-          </a:prstGeom>
-          <a:noFill/>
-        </p:spPr>
-        <p:txBody>
-          <a:bodyPr wrap="square" lIns="45720" rIns="45720">
-            <a:spAutoFit/>
-          </a:bodyPr>
-          <a:lstStyle/>
-          <a:p>
-            <a:pPr algn="l"/>
-            <a:r>
-              <a:rPr sz="2000" b="1">
-                <a:solidFill>
-                  <a:srgbClr val="1F2D3A"/>
-                </a:solidFill>
-              </a:rPr>
-              <a:t>RASP self-hashing tek başına neden yetmez?</a:t>
-            </a:r>
-          </a:p>
-        </p:txBody>
-      </p:sp>
-      <p:sp>
-        <p:nvSpPr>
-          <p:cNvPr id="8" name="TextBox 7"/>
-          <p:cNvSpPr txBox="1"/>
-          <p:nvPr/>
-        </p:nvSpPr>
-        <p:spPr>
-          <a:xfrm>
-            <a:off x="640080" y="1875536"/>
-            <a:ext cx="10911535" cy="770128"/>
-          </a:xfrm>
-          <a:prstGeom prst="rect">
-            <a:avLst/>
-          </a:prstGeom>
-          <a:noFill/>
-        </p:spPr>
-        <p:txBody>
-          <a:bodyPr wrap="square" lIns="45720" rIns="45720">
-            <a:spAutoFit/>
-          </a:bodyPr>
-          <a:lstStyle/>
-          <a:p>
-            <a:pPr algn="l"/>
-            <a:r>
-              <a:rPr sz="2000" b="1">
-                <a:solidFill>
-                  <a:srgbClr val="1F2D3A"/>
-                </a:solidFill>
-              </a:rPr>
-              <a:t>Cevap:</a:t>
-            </a:r>
-            <a:r>
-              <a:rPr sz="2000" b="0">
-                <a:solidFill>
-                  <a:srgbClr val="1F2D3A"/>
-                </a:solidFill>
-              </a:rPr>
-              <a:t> Saldırgan özet fonksiyonunu bulup atlatabilir. Gizleme + çapraz + örtüşen denetim gerekir.</a:t>
-            </a:r>
-          </a:p>
-        </p:txBody>
-      </p:sp>
-    </p:spTree>
-  </p:cSld>
-  <p:clrMapOvr>
-    <a:masterClrMapping/>
-  </p:clrMapOvr>
-</p:sld>
-</file>
-
-<file path=ppt/slides/slide31.xml><?xml version="1.0" encoding="utf-8"?>
-<p:sld xmlns:a="http://schemas.openxmlformats.org/drawingml/2006/main" xmlns:p="http://schemas.openxmlformats.org/presentationml/2006/main" xmlns:r="http://schemas.openxmlformats.org/officeDocument/2006/relationships">
-  <p:cSld>
-    <p:spTree>
-      <p:nvGrpSpPr>
-        <p:cNvPr id="1" name=""/>
-        <p:cNvGrpSpPr/>
-        <p:nvPr/>
-      </p:nvGrpSpPr>
-      <p:grpSpPr/>
-      <p:pic>
-        <p:nvPicPr>
-          <p:cNvPr id="2" name="Picture 1" descr="rteu_logo_kucuk.jpg"/>
-          <p:cNvPicPr>
-            <a:picLocks noChangeAspect="1"/>
-          </p:cNvPicPr>
-          <p:nvPr/>
-        </p:nvPicPr>
-        <p:blipFill>
-          <a:blip r:embed="rId2"/>
-          <a:stretch>
-            <a:fillRect/>
-          </a:stretch>
-        </p:blipFill>
-        <p:spPr>
-          <a:xfrm>
-            <a:off x="640080" y="164592"/>
-            <a:ext cx="242773" cy="329184"/>
-          </a:xfrm>
-          <a:prstGeom prst="rect">
-            <a:avLst/>
-          </a:prstGeom>
-        </p:spPr>
-      </p:pic>
-      <p:sp>
-        <p:nvSpPr>
-          <p:cNvPr id="3" name="TextBox 2"/>
-          <p:cNvSpPr txBox="1"/>
-          <p:nvPr/>
-        </p:nvSpPr>
-        <p:spPr>
-          <a:xfrm>
-            <a:off x="1051560" y="182880"/>
-            <a:ext cx="7315200" cy="320040"/>
-          </a:xfrm>
-          <a:prstGeom prst="rect">
-            <a:avLst/>
-          </a:prstGeom>
-          <a:noFill/>
-        </p:spPr>
-        <p:txBody>
-          <a:bodyPr wrap="square" lIns="45720" rIns="45720">
-            <a:spAutoFit/>
-          </a:bodyPr>
-          <a:lstStyle/>
-          <a:p>
-            <a:r>
-              <a:rPr sz="1100" b="0">
-                <a:solidFill>
-                  <a:srgbClr val="5B6770"/>
-                </a:solidFill>
-              </a:rPr>
-              <a:t>CEN429 Güvenli Programlama · Hafta 8</a:t>
-            </a:r>
-          </a:p>
-        </p:txBody>
-      </p:sp>
-      <p:sp>
-        <p:nvSpPr>
-          <p:cNvPr id="4" name="TextBox 3"/>
-          <p:cNvSpPr txBox="1"/>
-          <p:nvPr/>
-        </p:nvSpPr>
-        <p:spPr>
-          <a:xfrm>
-            <a:off x="640080" y="6446520"/>
-            <a:ext cx="7315200" cy="274320"/>
-          </a:xfrm>
-          <a:prstGeom prst="rect">
-            <a:avLst/>
-          </a:prstGeom>
-          <a:noFill/>
-        </p:spPr>
-        <p:txBody>
-          <a:bodyPr wrap="square" lIns="45720" rIns="45720">
-            <a:spAutoFit/>
-          </a:bodyPr>
-          <a:lstStyle/>
-          <a:p>
-            <a:r>
-              <a:rPr sz="1000" b="0">
-                <a:solidFill>
-                  <a:srgbClr val="5B6770"/>
-                </a:solidFill>
-              </a:rPr>
-              <a:t>RTEÜ Bilgisayar Mühendisliği · 2026-2027 Güz</a:t>
-            </a:r>
-          </a:p>
-        </p:txBody>
-      </p:sp>
-      <p:sp>
-        <p:nvSpPr>
-          <p:cNvPr id="5" name="TextBox 4"/>
-          <p:cNvSpPr txBox="1"/>
-          <p:nvPr/>
-        </p:nvSpPr>
-        <p:spPr>
-          <a:xfrm>
-            <a:off x="10637215" y="6446520"/>
-            <a:ext cx="914400" cy="274320"/>
-          </a:xfrm>
-          <a:prstGeom prst="rect">
-            <a:avLst/>
-          </a:prstGeom>
-          <a:noFill/>
-        </p:spPr>
-        <p:txBody>
-          <a:bodyPr wrap="square" lIns="45720" rIns="45720">
-            <a:spAutoFit/>
-          </a:bodyPr>
-          <a:lstStyle/>
-          <a:p>
-            <a:pPr algn="r"/>
-            <a:r>
-              <a:rPr sz="1000" b="0">
-                <a:solidFill>
-                  <a:srgbClr val="5B6770"/>
-                </a:solidFill>
-              </a:rPr>
-              <a:t>31</a:t>
-            </a:r>
-          </a:p>
-        </p:txBody>
-      </p:sp>
-      <p:sp>
-        <p:nvSpPr>
-          <p:cNvPr id="6" name="TextBox 5"/>
-          <p:cNvSpPr txBox="1"/>
-          <p:nvPr/>
-        </p:nvSpPr>
-        <p:spPr>
-          <a:xfrm>
-            <a:off x="640080" y="548640"/>
-            <a:ext cx="10911535" cy="731520"/>
-          </a:xfrm>
-          <a:prstGeom prst="rect">
-            <a:avLst/>
-          </a:prstGeom>
-          <a:noFill/>
-        </p:spPr>
-        <p:txBody>
-          <a:bodyPr wrap="square" lIns="45720" rIns="45720" anchor="ctr">
-            <a:spAutoFit/>
-          </a:bodyPr>
-          <a:lstStyle/>
-          <a:p>
-            <a:r>
-              <a:rPr sz="3000" b="1">
-                <a:solidFill>
-                  <a:srgbClr val="006D77"/>
-                </a:solidFill>
-              </a:rPr>
-              <a:t>Soru 7</a:t>
-            </a:r>
-          </a:p>
-        </p:txBody>
-      </p:sp>
-      <p:sp>
-        <p:nvSpPr>
-          <p:cNvPr id="7" name="TextBox 6"/>
-          <p:cNvSpPr txBox="1"/>
-          <p:nvPr/>
-        </p:nvSpPr>
-        <p:spPr>
-          <a:xfrm>
-            <a:off x="640080" y="1325880"/>
-            <a:ext cx="10911535" cy="439928"/>
-          </a:xfrm>
-          <a:prstGeom prst="rect">
-            <a:avLst/>
-          </a:prstGeom>
-          <a:noFill/>
-        </p:spPr>
-        <p:txBody>
-          <a:bodyPr wrap="square" lIns="45720" rIns="45720">
-            <a:spAutoFit/>
-          </a:bodyPr>
-          <a:lstStyle/>
-          <a:p>
-            <a:pPr algn="l"/>
-            <a:r>
-              <a:rPr sz="2000" b="1">
-                <a:solidFill>
-                  <a:srgbClr val="1F2D3A"/>
-                </a:solidFill>
-              </a:rPr>
-              <a:t>Paroladan anahtar türetirken neden KDF ve tuz?</a:t>
-            </a:r>
-          </a:p>
-        </p:txBody>
-      </p:sp>
-      <p:sp>
-        <p:nvSpPr>
-          <p:cNvPr id="8" name="TextBox 7"/>
-          <p:cNvSpPr txBox="1"/>
-          <p:nvPr/>
-        </p:nvSpPr>
-        <p:spPr>
-          <a:xfrm>
-            <a:off x="640080" y="1875536"/>
-            <a:ext cx="10911535" cy="770128"/>
-          </a:xfrm>
-          <a:prstGeom prst="rect">
-            <a:avLst/>
-          </a:prstGeom>
-          <a:noFill/>
-        </p:spPr>
-        <p:txBody>
-          <a:bodyPr wrap="square" lIns="45720" rIns="45720">
-            <a:spAutoFit/>
-          </a:bodyPr>
-          <a:lstStyle/>
-          <a:p>
-            <a:pPr algn="l"/>
-            <a:r>
-              <a:rPr sz="2000" b="1">
-                <a:solidFill>
-                  <a:srgbClr val="1F2D3A"/>
-                </a:solidFill>
-              </a:rPr>
-              <a:t>Cevap:</a:t>
-            </a:r>
-            <a:r>
-              <a:rPr sz="2000" b="0">
-                <a:solidFill>
-                  <a:srgbClr val="1F2D3A"/>
-                </a:solidFill>
-              </a:rPr>
-              <a:t> Parola düşük entropili; KDF yavaşlatır, tuz aynı parolaların aynı anahtar üretmesini önler (gökkuşağı tablosu).</a:t>
-            </a:r>
-          </a:p>
-        </p:txBody>
-      </p:sp>
-    </p:spTree>
-  </p:cSld>
-  <p:clrMapOvr>
-    <a:masterClrMapping/>
-  </p:clrMapOvr>
-</p:sld>
-</file>
-
-<file path=ppt/slides/slide32.xml><?xml version="1.0" encoding="utf-8"?>
-<p:sld xmlns:a="http://schemas.openxmlformats.org/drawingml/2006/main" xmlns:p="http://schemas.openxmlformats.org/presentationml/2006/main" xmlns:r="http://schemas.openxmlformats.org/officeDocument/2006/relationships">
-  <p:cSld>
-    <p:spTree>
-      <p:nvGrpSpPr>
-        <p:cNvPr id="1" name=""/>
-        <p:cNvGrpSpPr/>
-        <p:nvPr/>
-      </p:nvGrpSpPr>
-      <p:grpSpPr/>
-      <p:pic>
-        <p:nvPicPr>
-          <p:cNvPr id="2" name="Picture 1" descr="rteu_logo_kucuk.jpg"/>
-          <p:cNvPicPr>
-            <a:picLocks noChangeAspect="1"/>
-          </p:cNvPicPr>
-          <p:nvPr/>
-        </p:nvPicPr>
-        <p:blipFill>
-          <a:blip r:embed="rId2"/>
-          <a:stretch>
-            <a:fillRect/>
-          </a:stretch>
-        </p:blipFill>
-        <p:spPr>
-          <a:xfrm>
-            <a:off x="640080" y="164592"/>
-            <a:ext cx="242773" cy="329184"/>
-          </a:xfrm>
-          <a:prstGeom prst="rect">
-            <a:avLst/>
-          </a:prstGeom>
-        </p:spPr>
-      </p:pic>
-      <p:sp>
-        <p:nvSpPr>
-          <p:cNvPr id="3" name="TextBox 2"/>
-          <p:cNvSpPr txBox="1"/>
-          <p:nvPr/>
-        </p:nvSpPr>
-        <p:spPr>
-          <a:xfrm>
-            <a:off x="1051560" y="182880"/>
-            <a:ext cx="7315200" cy="320040"/>
-          </a:xfrm>
-          <a:prstGeom prst="rect">
-            <a:avLst/>
-          </a:prstGeom>
-          <a:noFill/>
-        </p:spPr>
-        <p:txBody>
-          <a:bodyPr wrap="square" lIns="45720" rIns="45720">
-            <a:spAutoFit/>
-          </a:bodyPr>
-          <a:lstStyle/>
-          <a:p>
-            <a:r>
-              <a:rPr sz="1100" b="0">
-                <a:solidFill>
-                  <a:srgbClr val="5B6770"/>
-                </a:solidFill>
-              </a:rPr>
-              <a:t>CEN429 Güvenli Programlama · Hafta 8</a:t>
-            </a:r>
-          </a:p>
-        </p:txBody>
-      </p:sp>
-      <p:sp>
-        <p:nvSpPr>
-          <p:cNvPr id="4" name="TextBox 3"/>
-          <p:cNvSpPr txBox="1"/>
-          <p:nvPr/>
-        </p:nvSpPr>
-        <p:spPr>
-          <a:xfrm>
-            <a:off x="640080" y="6446520"/>
-            <a:ext cx="7315200" cy="274320"/>
-          </a:xfrm>
-          <a:prstGeom prst="rect">
-            <a:avLst/>
-          </a:prstGeom>
-          <a:noFill/>
-        </p:spPr>
-        <p:txBody>
-          <a:bodyPr wrap="square" lIns="45720" rIns="45720">
-            <a:spAutoFit/>
-          </a:bodyPr>
-          <a:lstStyle/>
-          <a:p>
-            <a:r>
-              <a:rPr sz="1000" b="0">
-                <a:solidFill>
-                  <a:srgbClr val="5B6770"/>
-                </a:solidFill>
-              </a:rPr>
-              <a:t>RTEÜ Bilgisayar Mühendisliği · 2026-2027 Güz</a:t>
-            </a:r>
-          </a:p>
-        </p:txBody>
-      </p:sp>
-      <p:sp>
-        <p:nvSpPr>
-          <p:cNvPr id="5" name="TextBox 4"/>
-          <p:cNvSpPr txBox="1"/>
-          <p:nvPr/>
-        </p:nvSpPr>
-        <p:spPr>
-          <a:xfrm>
-            <a:off x="10637215" y="6446520"/>
-            <a:ext cx="914400" cy="274320"/>
-          </a:xfrm>
-          <a:prstGeom prst="rect">
-            <a:avLst/>
-          </a:prstGeom>
-          <a:noFill/>
-        </p:spPr>
-        <p:txBody>
-          <a:bodyPr wrap="square" lIns="45720" rIns="45720">
-            <a:spAutoFit/>
-          </a:bodyPr>
-          <a:lstStyle/>
-          <a:p>
-            <a:pPr algn="r"/>
-            <a:r>
-              <a:rPr sz="1000" b="0">
-                <a:solidFill>
-                  <a:srgbClr val="5B6770"/>
-                </a:solidFill>
-              </a:rPr>
-              <a:t>32</a:t>
-            </a:r>
-          </a:p>
-        </p:txBody>
-      </p:sp>
-      <p:sp>
-        <p:nvSpPr>
-          <p:cNvPr id="6" name="TextBox 5"/>
-          <p:cNvSpPr txBox="1"/>
-          <p:nvPr/>
-        </p:nvSpPr>
-        <p:spPr>
-          <a:xfrm>
-            <a:off x="640080" y="548640"/>
-            <a:ext cx="10911535" cy="731520"/>
-          </a:xfrm>
-          <a:prstGeom prst="rect">
-            <a:avLst/>
-          </a:prstGeom>
-          <a:noFill/>
-        </p:spPr>
-        <p:txBody>
-          <a:bodyPr wrap="square" lIns="45720" rIns="45720" anchor="ctr">
-            <a:spAutoFit/>
-          </a:bodyPr>
-          <a:lstStyle/>
-          <a:p>
-            <a:r>
-              <a:rPr sz="3000" b="1">
-                <a:solidFill>
-                  <a:srgbClr val="006D77"/>
-                </a:solidFill>
-              </a:rPr>
-              <a:t>Soru 8</a:t>
-            </a:r>
-          </a:p>
-        </p:txBody>
-      </p:sp>
-      <p:sp>
-        <p:nvSpPr>
-          <p:cNvPr id="7" name="TextBox 6"/>
-          <p:cNvSpPr txBox="1"/>
-          <p:nvPr/>
-        </p:nvSpPr>
-        <p:spPr>
-          <a:xfrm>
-            <a:off x="640080" y="1325880"/>
-            <a:ext cx="10911535" cy="439928"/>
-          </a:xfrm>
-          <a:prstGeom prst="rect">
-            <a:avLst/>
-          </a:prstGeom>
-          <a:noFill/>
-        </p:spPr>
-        <p:txBody>
-          <a:bodyPr wrap="square" lIns="45720" rIns="45720">
-            <a:spAutoFit/>
-          </a:bodyPr>
-          <a:lstStyle/>
-          <a:p>
-            <a:pPr algn="l"/>
-            <a:r>
-              <a:rPr sz="2000" b="1">
-                <a:solidFill>
-                  <a:srgbClr val="1F2D3A"/>
-                </a:solidFill>
-              </a:rPr>
-              <a:t>En az yetki ilkesi bir örnekle?</a:t>
-            </a:r>
-          </a:p>
-        </p:txBody>
-      </p:sp>
-      <p:sp>
-        <p:nvSpPr>
-          <p:cNvPr id="8" name="TextBox 7"/>
-          <p:cNvSpPr txBox="1"/>
-          <p:nvPr/>
-        </p:nvSpPr>
-        <p:spPr>
-          <a:xfrm>
-            <a:off x="640080" y="1875536"/>
-            <a:ext cx="10911535" cy="770128"/>
-          </a:xfrm>
-          <a:prstGeom prst="rect">
-            <a:avLst/>
-          </a:prstGeom>
-          <a:noFill/>
-        </p:spPr>
-        <p:txBody>
-          <a:bodyPr wrap="square" lIns="45720" rIns="45720">
-            <a:spAutoFit/>
-          </a:bodyPr>
-          <a:lstStyle/>
-          <a:p>
-            <a:pPr algn="l"/>
-            <a:r>
-              <a:rPr sz="2000" b="1">
-                <a:solidFill>
-                  <a:srgbClr val="1F2D3A"/>
-                </a:solidFill>
-              </a:rPr>
-              <a:t>Cevap:</a:t>
-            </a:r>
-            <a:r>
-              <a:rPr sz="2000" b="0">
-                <a:solidFill>
-                  <a:srgbClr val="1F2D3A"/>
-                </a:solidFill>
-              </a:rPr>
-              <a:t> Uygulamanın DB kullanıcısı yalnız </a:t>
-            </a:r>
-            <a:r>
-              <a:rPr sz="2000" b="0">
-                <a:solidFill>
-                  <a:srgbClr val="A1123F"/>
-                </a:solidFill>
-                <a:latin typeface="Consolas"/>
-              </a:rPr>
-              <a:t>SELECT</a:t>
-            </a:r>
-            <a:r>
-              <a:rPr sz="2000" b="0">
-                <a:solidFill>
-                  <a:srgbClr val="1F2D3A"/>
-                </a:solidFill>
-              </a:rPr>
-              <a:t> yapabilsin; </a:t>
-            </a:r>
-            <a:r>
-              <a:rPr sz="2000" b="0">
-                <a:solidFill>
-                  <a:srgbClr val="A1123F"/>
-                </a:solidFill>
-                <a:latin typeface="Consolas"/>
-              </a:rPr>
-              <a:t>DROP</a:t>
-            </a:r>
-            <a:r>
-              <a:rPr sz="2000" b="0">
-                <a:solidFill>
-                  <a:srgbClr val="1F2D3A"/>
-                </a:solidFill>
-              </a:rPr>
-              <a:t> yetkisi olmasın. Fazla yetki = büyük hasar.</a:t>
-            </a:r>
-          </a:p>
-        </p:txBody>
-      </p:sp>
-    </p:spTree>
-  </p:cSld>
-  <p:clrMapOvr>
-    <a:masterClrMapping/>
-  </p:clrMapOvr>
-</p:sld>
-</file>
-
-<file path=ppt/slides/slide33.xml><?xml version="1.0" encoding="utf-8"?>
-<p:sld xmlns:a="http://schemas.openxmlformats.org/drawingml/2006/main" xmlns:p="http://schemas.openxmlformats.org/presentationml/2006/main" xmlns:r="http://schemas.openxmlformats.org/officeDocument/2006/relationships">
-  <p:cSld>
-    <p:spTree>
-      <p:nvGrpSpPr>
-        <p:cNvPr id="1" name=""/>
-        <p:cNvGrpSpPr/>
-        <p:nvPr/>
-      </p:nvGrpSpPr>
-      <p:grpSpPr/>
-      <p:pic>
-        <p:nvPicPr>
-          <p:cNvPr id="2" name="Picture 1" descr="rteu_logo_kucuk.jpg"/>
-          <p:cNvPicPr>
-            <a:picLocks noChangeAspect="1"/>
-          </p:cNvPicPr>
-          <p:nvPr/>
-        </p:nvPicPr>
-        <p:blipFill>
-          <a:blip r:embed="rId2"/>
-          <a:stretch>
-            <a:fillRect/>
-          </a:stretch>
-        </p:blipFill>
-        <p:spPr>
-          <a:xfrm>
-            <a:off x="640080" y="164592"/>
-            <a:ext cx="242773" cy="329184"/>
-          </a:xfrm>
-          <a:prstGeom prst="rect">
-            <a:avLst/>
-          </a:prstGeom>
-        </p:spPr>
-      </p:pic>
-      <p:sp>
-        <p:nvSpPr>
-          <p:cNvPr id="3" name="TextBox 2"/>
-          <p:cNvSpPr txBox="1"/>
-          <p:nvPr/>
-        </p:nvSpPr>
-        <p:spPr>
-          <a:xfrm>
-            <a:off x="1051560" y="182880"/>
-            <a:ext cx="7315200" cy="320040"/>
-          </a:xfrm>
-          <a:prstGeom prst="rect">
-            <a:avLst/>
-          </a:prstGeom>
-          <a:noFill/>
-        </p:spPr>
-        <p:txBody>
-          <a:bodyPr wrap="square" lIns="45720" rIns="45720">
-            <a:spAutoFit/>
-          </a:bodyPr>
-          <a:lstStyle/>
-          <a:p>
-            <a:r>
-              <a:rPr sz="1100" b="0">
-                <a:solidFill>
-                  <a:srgbClr val="5B6770"/>
-                </a:solidFill>
-              </a:rPr>
-              <a:t>CEN429 Güvenli Programlama · Hafta 8</a:t>
-            </a:r>
-          </a:p>
-        </p:txBody>
-      </p:sp>
-      <p:sp>
-        <p:nvSpPr>
-          <p:cNvPr id="4" name="TextBox 3"/>
-          <p:cNvSpPr txBox="1"/>
-          <p:nvPr/>
-        </p:nvSpPr>
-        <p:spPr>
-          <a:xfrm>
-            <a:off x="640080" y="6446520"/>
-            <a:ext cx="7315200" cy="274320"/>
-          </a:xfrm>
-          <a:prstGeom prst="rect">
-            <a:avLst/>
-          </a:prstGeom>
-          <a:noFill/>
-        </p:spPr>
-        <p:txBody>
-          <a:bodyPr wrap="square" lIns="45720" rIns="45720">
-            <a:spAutoFit/>
-          </a:bodyPr>
-          <a:lstStyle/>
-          <a:p>
-            <a:r>
-              <a:rPr sz="1000" b="0">
-                <a:solidFill>
-                  <a:srgbClr val="5B6770"/>
-                </a:solidFill>
-              </a:rPr>
-              <a:t>RTEÜ Bilgisayar Mühendisliği · 2026-2027 Güz</a:t>
-            </a:r>
-          </a:p>
-        </p:txBody>
-      </p:sp>
-      <p:sp>
-        <p:nvSpPr>
-          <p:cNvPr id="5" name="TextBox 4"/>
-          <p:cNvSpPr txBox="1"/>
-          <p:nvPr/>
-        </p:nvSpPr>
-        <p:spPr>
-          <a:xfrm>
-            <a:off x="10637215" y="6446520"/>
-            <a:ext cx="914400" cy="274320"/>
-          </a:xfrm>
-          <a:prstGeom prst="rect">
-            <a:avLst/>
-          </a:prstGeom>
-          <a:noFill/>
-        </p:spPr>
-        <p:txBody>
-          <a:bodyPr wrap="square" lIns="45720" rIns="45720">
-            <a:spAutoFit/>
-          </a:bodyPr>
-          <a:lstStyle/>
-          <a:p>
-            <a:pPr algn="r"/>
-            <a:r>
-              <a:rPr sz="1000" b="0">
-                <a:solidFill>
-                  <a:srgbClr val="5B6770"/>
-                </a:solidFill>
-              </a:rPr>
-              <a:t>33</a:t>
-            </a:r>
-          </a:p>
-        </p:txBody>
-      </p:sp>
-      <p:sp>
-        <p:nvSpPr>
-          <p:cNvPr id="6" name="TextBox 5"/>
-          <p:cNvSpPr txBox="1"/>
-          <p:nvPr/>
-        </p:nvSpPr>
-        <p:spPr>
-          <a:xfrm>
-            <a:off x="640080" y="548640"/>
-            <a:ext cx="10911535" cy="731520"/>
-          </a:xfrm>
-          <a:prstGeom prst="rect">
-            <a:avLst/>
-          </a:prstGeom>
-          <a:noFill/>
-        </p:spPr>
-        <p:txBody>
-          <a:bodyPr wrap="square" lIns="45720" rIns="45720" anchor="ctr">
-            <a:spAutoFit/>
-          </a:bodyPr>
-          <a:lstStyle/>
-          <a:p>
-            <a:r>
-              <a:rPr sz="3000" b="1">
-                <a:solidFill>
-                  <a:srgbClr val="006D77"/>
-                </a:solidFill>
-              </a:rPr>
-              <a:t>Soru 9</a:t>
-            </a:r>
-          </a:p>
-        </p:txBody>
-      </p:sp>
-      <p:sp>
-        <p:nvSpPr>
-          <p:cNvPr id="7" name="TextBox 6"/>
-          <p:cNvSpPr txBox="1"/>
-          <p:nvPr/>
-        </p:nvSpPr>
-        <p:spPr>
-          <a:xfrm>
-            <a:off x="640080" y="1325880"/>
-            <a:ext cx="10911535" cy="439928"/>
-          </a:xfrm>
-          <a:prstGeom prst="rect">
-            <a:avLst/>
-          </a:prstGeom>
-          <a:noFill/>
-        </p:spPr>
-        <p:txBody>
-          <a:bodyPr wrap="square" lIns="45720" rIns="45720">
-            <a:spAutoFit/>
-          </a:bodyPr>
-          <a:lstStyle/>
-          <a:p>
-            <a:pPr algn="l"/>
-            <a:r>
-              <a:rPr sz="2000" b="1">
-                <a:solidFill>
-                  <a:srgbClr val="1F2D3A"/>
-                </a:solidFill>
-              </a:rPr>
-              <a:t>Tehdit modellemede STRIDE'ın "E"si nedir, bir önlem?</a:t>
-            </a:r>
-          </a:p>
-        </p:txBody>
-      </p:sp>
-      <p:sp>
-        <p:nvSpPr>
-          <p:cNvPr id="8" name="TextBox 7"/>
-          <p:cNvSpPr txBox="1"/>
-          <p:nvPr/>
-        </p:nvSpPr>
-        <p:spPr>
-          <a:xfrm>
-            <a:off x="640080" y="1875536"/>
-            <a:ext cx="10911535" cy="770128"/>
-          </a:xfrm>
-          <a:prstGeom prst="rect">
-            <a:avLst/>
-          </a:prstGeom>
-          <a:noFill/>
-        </p:spPr>
-        <p:txBody>
-          <a:bodyPr wrap="square" lIns="45720" rIns="45720">
-            <a:spAutoFit/>
-          </a:bodyPr>
-          <a:lstStyle/>
-          <a:p>
-            <a:pPr algn="l"/>
-            <a:r>
-              <a:rPr sz="2000" b="1">
-                <a:solidFill>
-                  <a:srgbClr val="1F2D3A"/>
-                </a:solidFill>
-              </a:rPr>
-              <a:t>Cevap:</a:t>
-            </a:r>
-            <a:r>
-              <a:rPr sz="2000" b="0">
-                <a:solidFill>
-                  <a:srgbClr val="1F2D3A"/>
-                </a:solidFill>
-              </a:rPr>
-              <a:t> Elevation of privilege (yetki yükseltme). Önlem: en az yetki, yetki denetimi, güvenli varsayılan.</a:t>
-            </a:r>
-          </a:p>
-        </p:txBody>
-      </p:sp>
-    </p:spTree>
-  </p:cSld>
-  <p:clrMapOvr>
-    <a:masterClrMapping/>
-  </p:clrMapOvr>
-</p:sld>
-</file>
-
-<file path=ppt/slides/slide34.xml><?xml version="1.0" encoding="utf-8"?>
-<p:sld xmlns:a="http://schemas.openxmlformats.org/drawingml/2006/main" xmlns:p="http://schemas.openxmlformats.org/presentationml/2006/main" xmlns:r="http://schemas.openxmlformats.org/officeDocument/2006/relationships">
-  <p:cSld>
-    <p:spTree>
-      <p:nvGrpSpPr>
-        <p:cNvPr id="1" name=""/>
-        <p:cNvGrpSpPr/>
-        <p:nvPr/>
-      </p:nvGrpSpPr>
-      <p:grpSpPr/>
-      <p:pic>
-        <p:nvPicPr>
-          <p:cNvPr id="2" name="Picture 1" descr="rteu_logo_kucuk.jpg"/>
-          <p:cNvPicPr>
-            <a:picLocks noChangeAspect="1"/>
-          </p:cNvPicPr>
-          <p:nvPr/>
-        </p:nvPicPr>
-        <p:blipFill>
-          <a:blip r:embed="rId2"/>
-          <a:stretch>
-            <a:fillRect/>
-          </a:stretch>
-        </p:blipFill>
-        <p:spPr>
-          <a:xfrm>
-            <a:off x="640080" y="164592"/>
-            <a:ext cx="242773" cy="329184"/>
-          </a:xfrm>
-          <a:prstGeom prst="rect">
-            <a:avLst/>
-          </a:prstGeom>
-        </p:spPr>
-      </p:pic>
-      <p:sp>
-        <p:nvSpPr>
-          <p:cNvPr id="3" name="TextBox 2"/>
-          <p:cNvSpPr txBox="1"/>
-          <p:nvPr/>
-        </p:nvSpPr>
-        <p:spPr>
-          <a:xfrm>
-            <a:off x="1051560" y="182880"/>
-            <a:ext cx="7315200" cy="320040"/>
-          </a:xfrm>
-          <a:prstGeom prst="rect">
-            <a:avLst/>
-          </a:prstGeom>
-          <a:noFill/>
-        </p:spPr>
-        <p:txBody>
-          <a:bodyPr wrap="square" lIns="45720" rIns="45720">
-            <a:spAutoFit/>
-          </a:bodyPr>
-          <a:lstStyle/>
-          <a:p>
-            <a:r>
-              <a:rPr sz="1100" b="0">
-                <a:solidFill>
-                  <a:srgbClr val="5B6770"/>
-                </a:solidFill>
-              </a:rPr>
-              <a:t>CEN429 Güvenli Programlama · Hafta 8</a:t>
-            </a:r>
-          </a:p>
-        </p:txBody>
-      </p:sp>
-      <p:sp>
-        <p:nvSpPr>
-          <p:cNvPr id="4" name="TextBox 3"/>
-          <p:cNvSpPr txBox="1"/>
-          <p:nvPr/>
-        </p:nvSpPr>
-        <p:spPr>
-          <a:xfrm>
-            <a:off x="640080" y="6446520"/>
-            <a:ext cx="7315200" cy="274320"/>
-          </a:xfrm>
-          <a:prstGeom prst="rect">
-            <a:avLst/>
-          </a:prstGeom>
-          <a:noFill/>
-        </p:spPr>
-        <p:txBody>
-          <a:bodyPr wrap="square" lIns="45720" rIns="45720">
-            <a:spAutoFit/>
-          </a:bodyPr>
-          <a:lstStyle/>
-          <a:p>
-            <a:r>
-              <a:rPr sz="1000" b="0">
-                <a:solidFill>
-                  <a:srgbClr val="5B6770"/>
-                </a:solidFill>
-              </a:rPr>
-              <a:t>RTEÜ Bilgisayar Mühendisliği · 2026-2027 Güz</a:t>
-            </a:r>
-          </a:p>
-        </p:txBody>
-      </p:sp>
-      <p:sp>
-        <p:nvSpPr>
-          <p:cNvPr id="5" name="TextBox 4"/>
-          <p:cNvSpPr txBox="1"/>
-          <p:nvPr/>
-        </p:nvSpPr>
-        <p:spPr>
-          <a:xfrm>
-            <a:off x="10637215" y="6446520"/>
-            <a:ext cx="914400" cy="274320"/>
-          </a:xfrm>
-          <a:prstGeom prst="rect">
-            <a:avLst/>
-          </a:prstGeom>
-          <a:noFill/>
-        </p:spPr>
-        <p:txBody>
-          <a:bodyPr wrap="square" lIns="45720" rIns="45720">
-            <a:spAutoFit/>
-          </a:bodyPr>
-          <a:lstStyle/>
-          <a:p>
-            <a:pPr algn="r"/>
-            <a:r>
-              <a:rPr sz="1000" b="0">
-                <a:solidFill>
-                  <a:srgbClr val="5B6770"/>
-                </a:solidFill>
-              </a:rPr>
-              <a:t>34</a:t>
-            </a:r>
-          </a:p>
-        </p:txBody>
-      </p:sp>
-      <p:sp>
-        <p:nvSpPr>
-          <p:cNvPr id="6" name="TextBox 5"/>
-          <p:cNvSpPr txBox="1"/>
-          <p:nvPr/>
-        </p:nvSpPr>
-        <p:spPr>
-          <a:xfrm>
-            <a:off x="640080" y="548640"/>
-            <a:ext cx="10911535" cy="731520"/>
-          </a:xfrm>
-          <a:prstGeom prst="rect">
-            <a:avLst/>
-          </a:prstGeom>
-          <a:noFill/>
-        </p:spPr>
-        <p:txBody>
-          <a:bodyPr wrap="square" lIns="45720" rIns="45720" anchor="ctr">
-            <a:spAutoFit/>
-          </a:bodyPr>
-          <a:lstStyle/>
-          <a:p>
-            <a:r>
-              <a:rPr sz="3000" b="1">
-                <a:solidFill>
-                  <a:srgbClr val="006D77"/>
-                </a:solidFill>
-              </a:rPr>
-              <a:t>Soru 10</a:t>
-            </a:r>
-          </a:p>
-        </p:txBody>
-      </p:sp>
-      <p:sp>
-        <p:nvSpPr>
-          <p:cNvPr id="7" name="TextBox 6"/>
-          <p:cNvSpPr txBox="1"/>
-          <p:nvPr/>
-        </p:nvSpPr>
-        <p:spPr>
-          <a:xfrm>
-            <a:off x="640080" y="1325880"/>
-            <a:ext cx="10911535" cy="439928"/>
-          </a:xfrm>
-          <a:prstGeom prst="rect">
-            <a:avLst/>
-          </a:prstGeom>
-          <a:noFill/>
-        </p:spPr>
-        <p:txBody>
-          <a:bodyPr wrap="square" lIns="45720" rIns="45720">
-            <a:spAutoFit/>
-          </a:bodyPr>
-          <a:lstStyle/>
-          <a:p>
-            <a:pPr algn="l"/>
-            <a:r>
-              <a:rPr sz="2000" b="1">
-                <a:solidFill>
-                  <a:srgbClr val="1F2D3A"/>
-                </a:solidFill>
-              </a:rPr>
-              <a:t>Deserialization neden tehlikeli, çözüm?</a:t>
-            </a:r>
-          </a:p>
-        </p:txBody>
-      </p:sp>
-      <p:sp>
-        <p:nvSpPr>
-          <p:cNvPr id="8" name="TextBox 7"/>
-          <p:cNvSpPr txBox="1"/>
-          <p:nvPr/>
-        </p:nvSpPr>
-        <p:spPr>
-          <a:xfrm>
-            <a:off x="640080" y="1875536"/>
-            <a:ext cx="10911535" cy="770128"/>
-          </a:xfrm>
-          <a:prstGeom prst="rect">
-            <a:avLst/>
-          </a:prstGeom>
-          <a:noFill/>
-        </p:spPr>
-        <p:txBody>
-          <a:bodyPr wrap="square" lIns="45720" rIns="45720">
-            <a:spAutoFit/>
-          </a:bodyPr>
-          <a:lstStyle/>
-          <a:p>
-            <a:pPr algn="l"/>
-            <a:r>
-              <a:rPr sz="2000" b="1">
-                <a:solidFill>
-                  <a:srgbClr val="1F2D3A"/>
-                </a:solidFill>
-              </a:rPr>
-              <a:t>Cevap:</a:t>
-            </a:r>
-            <a:r>
-              <a:rPr sz="2000" b="0">
-                <a:solidFill>
-                  <a:srgbClr val="1F2D3A"/>
-                </a:solidFill>
-              </a:rPr>
-              <a:t> Çıkarma sırasında kod çalışabilir (gadget). Çözüm: veri biçimi + şema; zorunda kalınırsa beyaz liste filtresi.</a:t>
-            </a:r>
-          </a:p>
-        </p:txBody>
-      </p:sp>
-    </p:spTree>
-  </p:cSld>
-  <p:clrMapOvr>
-    <a:masterClrMapping/>
-  </p:clrMapOvr>
-</p:sld>
-</file>
-
-<file path=ppt/slides/slide35.xml><?xml version="1.0" encoding="utf-8"?>
-<p:sld xmlns:a="http://schemas.openxmlformats.org/drawingml/2006/main" xmlns:p="http://schemas.openxmlformats.org/presentationml/2006/main" xmlns:r="http://schemas.openxmlformats.org/officeDocument/2006/relationships">
-  <p:cSld>
-    <p:spTree>
-      <p:nvGrpSpPr>
-        <p:cNvPr id="1" name=""/>
-        <p:cNvGrpSpPr/>
-        <p:nvPr/>
-      </p:nvGrpSpPr>
-      <p:grpSpPr/>
-      <p:pic>
-        <p:nvPicPr>
-          <p:cNvPr id="2" name="Picture 1" descr="rteu_logo_kucuk.jpg"/>
-          <p:cNvPicPr>
-            <a:picLocks noChangeAspect="1"/>
-          </p:cNvPicPr>
-          <p:nvPr/>
-        </p:nvPicPr>
-        <p:blipFill>
-          <a:blip r:embed="rId2"/>
-          <a:stretch>
-            <a:fillRect/>
-          </a:stretch>
-        </p:blipFill>
-        <p:spPr>
-          <a:xfrm>
-            <a:off x="640080" y="164592"/>
-            <a:ext cx="242773" cy="329184"/>
-          </a:xfrm>
-          <a:prstGeom prst="rect">
-            <a:avLst/>
-          </a:prstGeom>
-        </p:spPr>
-      </p:pic>
-      <p:sp>
-        <p:nvSpPr>
-          <p:cNvPr id="3" name="TextBox 2"/>
-          <p:cNvSpPr txBox="1"/>
-          <p:nvPr/>
-        </p:nvSpPr>
-        <p:spPr>
-          <a:xfrm>
-            <a:off x="1051560" y="182880"/>
-            <a:ext cx="7315200" cy="320040"/>
-          </a:xfrm>
-          <a:prstGeom prst="rect">
-            <a:avLst/>
-          </a:prstGeom>
-          <a:noFill/>
-        </p:spPr>
-        <p:txBody>
-          <a:bodyPr wrap="square" lIns="45720" rIns="45720">
-            <a:spAutoFit/>
-          </a:bodyPr>
-          <a:lstStyle/>
-          <a:p>
-            <a:r>
-              <a:rPr sz="1100" b="0">
-                <a:solidFill>
-                  <a:srgbClr val="5B6770"/>
-                </a:solidFill>
-              </a:rPr>
-              <a:t>CEN429 Güvenli Programlama · Hafta 8</a:t>
-            </a:r>
-          </a:p>
-        </p:txBody>
-      </p:sp>
-      <p:sp>
-        <p:nvSpPr>
-          <p:cNvPr id="4" name="TextBox 3"/>
-          <p:cNvSpPr txBox="1"/>
-          <p:nvPr/>
-        </p:nvSpPr>
-        <p:spPr>
-          <a:xfrm>
-            <a:off x="640080" y="6446520"/>
-            <a:ext cx="7315200" cy="274320"/>
-          </a:xfrm>
-          <a:prstGeom prst="rect">
-            <a:avLst/>
-          </a:prstGeom>
-          <a:noFill/>
-        </p:spPr>
-        <p:txBody>
-          <a:bodyPr wrap="square" lIns="45720" rIns="45720">
-            <a:spAutoFit/>
-          </a:bodyPr>
-          <a:lstStyle/>
-          <a:p>
-            <a:r>
-              <a:rPr sz="1000" b="0">
-                <a:solidFill>
-                  <a:srgbClr val="5B6770"/>
-                </a:solidFill>
-              </a:rPr>
-              <a:t>RTEÜ Bilgisayar Mühendisliği · 2026-2027 Güz</a:t>
-            </a:r>
-          </a:p>
-        </p:txBody>
-      </p:sp>
-      <p:sp>
-        <p:nvSpPr>
-          <p:cNvPr id="5" name="TextBox 4"/>
-          <p:cNvSpPr txBox="1"/>
-          <p:nvPr/>
-        </p:nvSpPr>
-        <p:spPr>
-          <a:xfrm>
-            <a:off x="10637215" y="6446520"/>
-            <a:ext cx="914400" cy="274320"/>
-          </a:xfrm>
-          <a:prstGeom prst="rect">
-            <a:avLst/>
-          </a:prstGeom>
-          <a:noFill/>
-        </p:spPr>
-        <p:txBody>
-          <a:bodyPr wrap="square" lIns="45720" rIns="45720">
-            <a:spAutoFit/>
-          </a:bodyPr>
-          <a:lstStyle/>
-          <a:p>
-            <a:pPr algn="r"/>
-            <a:r>
-              <a:rPr sz="1000" b="0">
-                <a:solidFill>
-                  <a:srgbClr val="5B6770"/>
-                </a:solidFill>
-              </a:rPr>
-              <a:t>35</a:t>
-            </a:r>
-          </a:p>
-        </p:txBody>
-      </p:sp>
-      <p:sp>
-        <p:nvSpPr>
-          <p:cNvPr id="6" name="TextBox 5"/>
-          <p:cNvSpPr txBox="1"/>
-          <p:nvPr/>
-        </p:nvSpPr>
-        <p:spPr>
-          <a:xfrm>
-            <a:off x="640080" y="548640"/>
-            <a:ext cx="10911535" cy="731520"/>
-          </a:xfrm>
-          <a:prstGeom prst="rect">
-            <a:avLst/>
-          </a:prstGeom>
-          <a:noFill/>
-        </p:spPr>
-        <p:txBody>
-          <a:bodyPr wrap="square" lIns="45720" rIns="45720" anchor="ctr">
-            <a:spAutoFit/>
-          </a:bodyPr>
-          <a:lstStyle/>
-          <a:p>
-            <a:r>
-              <a:rPr sz="3000" b="1">
-                <a:solidFill>
-                  <a:srgbClr val="006D77"/>
-                </a:solidFill>
-              </a:rPr>
-              <a:t>Örnek · çoktan seçmeli</a:t>
-            </a:r>
-          </a:p>
-        </p:txBody>
-      </p:sp>
-      <p:sp>
-        <p:nvSpPr>
-          <p:cNvPr id="7" name="TextBox 6"/>
-          <p:cNvSpPr txBox="1"/>
-          <p:nvPr/>
-        </p:nvSpPr>
-        <p:spPr>
-          <a:xfrm>
-            <a:off x="640080" y="1325880"/>
-            <a:ext cx="10911535" cy="439928"/>
-          </a:xfrm>
-          <a:prstGeom prst="rect">
-            <a:avLst/>
-          </a:prstGeom>
-          <a:noFill/>
-        </p:spPr>
-        <p:txBody>
-          <a:bodyPr wrap="square" lIns="45720" rIns="45720">
-            <a:spAutoFit/>
-          </a:bodyPr>
-          <a:lstStyle/>
-          <a:p>
-            <a:pPr algn="l"/>
-            <a:r>
-              <a:rPr sz="2000" b="1">
-                <a:solidFill>
-                  <a:srgbClr val="1F2D3A"/>
-                </a:solidFill>
-              </a:rPr>
-              <a:t>Aşağıdakilerden hangisi bir AEAD kipidir?</a:t>
-            </a:r>
-          </a:p>
-        </p:txBody>
-      </p:sp>
-      <p:sp>
-        <p:nvSpPr>
-          <p:cNvPr id="8" name="TextBox 7"/>
-          <p:cNvSpPr txBox="1"/>
-          <p:nvPr/>
-        </p:nvSpPr>
-        <p:spPr>
-          <a:xfrm>
-            <a:off x="640080" y="1875536"/>
-            <a:ext cx="10911535" cy="439928"/>
-          </a:xfrm>
-          <a:prstGeom prst="rect">
-            <a:avLst/>
-          </a:prstGeom>
-          <a:noFill/>
-        </p:spPr>
-        <p:txBody>
-          <a:bodyPr wrap="square" lIns="45720" rIns="45720">
-            <a:spAutoFit/>
-          </a:bodyPr>
-          <a:lstStyle/>
-          <a:p>
-            <a:pPr algn="l"/>
-            <a:r>
-              <a:rPr sz="2000" b="0">
-                <a:solidFill>
-                  <a:srgbClr val="1F2D3A"/>
-                </a:solidFill>
-              </a:rPr>
-              <a:t>A) ECB B) CBC C) </a:t>
-            </a:r>
-            <a:r>
-              <a:rPr sz="2000" b="1">
-                <a:solidFill>
-                  <a:srgbClr val="1F2D3A"/>
-                </a:solidFill>
-              </a:rPr>
-              <a:t>GCM</a:t>
-            </a:r>
-            <a:r>
-              <a:rPr sz="2000" b="0">
-                <a:solidFill>
-                  <a:srgbClr val="1F2D3A"/>
-                </a:solidFill>
-              </a:rPr>
-              <a:t> ✓ D) Ham RSA</a:t>
-            </a:r>
-          </a:p>
-        </p:txBody>
-      </p:sp>
-    </p:spTree>
-  </p:cSld>
-  <p:clrMapOvr>
-    <a:masterClrMapping/>
-  </p:clrMapOvr>
-</p:sld>
-</file>
-
-<file path=ppt/slides/slide36.xml><?xml version="1.0" encoding="utf-8"?>
-<p:sld xmlns:a="http://schemas.openxmlformats.org/drawingml/2006/main" xmlns:p="http://schemas.openxmlformats.org/presentationml/2006/main" xmlns:r="http://schemas.openxmlformats.org/officeDocument/2006/relationships">
-  <p:cSld>
-    <p:spTree>
-      <p:nvGrpSpPr>
-        <p:cNvPr id="1" name=""/>
-        <p:cNvGrpSpPr/>
-        <p:nvPr/>
-      </p:nvGrpSpPr>
-      <p:grpSpPr/>
-      <p:pic>
-        <p:nvPicPr>
-          <p:cNvPr id="2" name="Picture 1" descr="rteu_logo_kucuk.jpg"/>
-          <p:cNvPicPr>
-            <a:picLocks noChangeAspect="1"/>
-          </p:cNvPicPr>
-          <p:nvPr/>
-        </p:nvPicPr>
-        <p:blipFill>
-          <a:blip r:embed="rId2"/>
-          <a:stretch>
-            <a:fillRect/>
-          </a:stretch>
-        </p:blipFill>
-        <p:spPr>
-          <a:xfrm>
-            <a:off x="640080" y="164592"/>
-            <a:ext cx="242773" cy="329184"/>
-          </a:xfrm>
-          <a:prstGeom prst="rect">
-            <a:avLst/>
-          </a:prstGeom>
-        </p:spPr>
-      </p:pic>
-      <p:sp>
-        <p:nvSpPr>
-          <p:cNvPr id="3" name="TextBox 2"/>
-          <p:cNvSpPr txBox="1"/>
-          <p:nvPr/>
-        </p:nvSpPr>
-        <p:spPr>
-          <a:xfrm>
-            <a:off x="1051560" y="182880"/>
-            <a:ext cx="7315200" cy="320040"/>
-          </a:xfrm>
-          <a:prstGeom prst="rect">
-            <a:avLst/>
-          </a:prstGeom>
-          <a:noFill/>
-        </p:spPr>
-        <p:txBody>
-          <a:bodyPr wrap="square" lIns="45720" rIns="45720">
-            <a:spAutoFit/>
-          </a:bodyPr>
-          <a:lstStyle/>
-          <a:p>
-            <a:r>
-              <a:rPr sz="1100" b="0">
-                <a:solidFill>
-                  <a:srgbClr val="5B6770"/>
-                </a:solidFill>
-              </a:rPr>
-              <a:t>CEN429 Güvenli Programlama · Hafta 8</a:t>
-            </a:r>
-          </a:p>
-        </p:txBody>
-      </p:sp>
-      <p:sp>
-        <p:nvSpPr>
-          <p:cNvPr id="4" name="TextBox 3"/>
-          <p:cNvSpPr txBox="1"/>
-          <p:nvPr/>
-        </p:nvSpPr>
-        <p:spPr>
-          <a:xfrm>
-            <a:off x="640080" y="6446520"/>
-            <a:ext cx="7315200" cy="274320"/>
-          </a:xfrm>
-          <a:prstGeom prst="rect">
-            <a:avLst/>
-          </a:prstGeom>
-          <a:noFill/>
-        </p:spPr>
-        <p:txBody>
-          <a:bodyPr wrap="square" lIns="45720" rIns="45720">
-            <a:spAutoFit/>
-          </a:bodyPr>
-          <a:lstStyle/>
-          <a:p>
-            <a:r>
-              <a:rPr sz="1000" b="0">
-                <a:solidFill>
-                  <a:srgbClr val="5B6770"/>
-                </a:solidFill>
-              </a:rPr>
-              <a:t>RTEÜ Bilgisayar Mühendisliği · 2026-2027 Güz</a:t>
-            </a:r>
-          </a:p>
-        </p:txBody>
-      </p:sp>
-      <p:sp>
-        <p:nvSpPr>
-          <p:cNvPr id="5" name="TextBox 4"/>
-          <p:cNvSpPr txBox="1"/>
-          <p:nvPr/>
-        </p:nvSpPr>
-        <p:spPr>
-          <a:xfrm>
-            <a:off x="10637215" y="6446520"/>
-            <a:ext cx="914400" cy="274320"/>
-          </a:xfrm>
-          <a:prstGeom prst="rect">
-            <a:avLst/>
-          </a:prstGeom>
-          <a:noFill/>
-        </p:spPr>
-        <p:txBody>
-          <a:bodyPr wrap="square" lIns="45720" rIns="45720">
-            <a:spAutoFit/>
-          </a:bodyPr>
-          <a:lstStyle/>
-          <a:p>
-            <a:pPr algn="r"/>
-            <a:r>
-              <a:rPr sz="1000" b="0">
-                <a:solidFill>
-                  <a:srgbClr val="5B6770"/>
-                </a:solidFill>
-              </a:rPr>
-              <a:t>36</a:t>
-            </a:r>
-          </a:p>
-        </p:txBody>
-      </p:sp>
-      <p:sp>
-        <p:nvSpPr>
-          <p:cNvPr id="6" name="TextBox 5"/>
-          <p:cNvSpPr txBox="1"/>
-          <p:nvPr/>
-        </p:nvSpPr>
-        <p:spPr>
-          <a:xfrm>
-            <a:off x="640080" y="548640"/>
-            <a:ext cx="10911535" cy="731520"/>
-          </a:xfrm>
-          <a:prstGeom prst="rect">
-            <a:avLst/>
-          </a:prstGeom>
-          <a:noFill/>
-        </p:spPr>
-        <p:txBody>
-          <a:bodyPr wrap="square" lIns="45720" rIns="45720" anchor="ctr">
-            <a:spAutoFit/>
-          </a:bodyPr>
-          <a:lstStyle/>
-          <a:p>
-            <a:r>
-              <a:rPr sz="3000" b="1">
-                <a:solidFill>
-                  <a:srgbClr val="006D77"/>
-                </a:solidFill>
-              </a:rPr>
-              <a:t>Örnek · doğru/yanlış</a:t>
-            </a:r>
-          </a:p>
-        </p:txBody>
-      </p:sp>
-      <p:sp>
-        <p:nvSpPr>
-          <p:cNvPr id="7" name="TextBox 6"/>
-          <p:cNvSpPr txBox="1"/>
-          <p:nvPr/>
-        </p:nvSpPr>
-        <p:spPr>
-          <a:xfrm>
-            <a:off x="640080" y="1325880"/>
-            <a:ext cx="10911535" cy="1219200"/>
-          </a:xfrm>
-          <a:prstGeom prst="rect">
-            <a:avLst/>
-          </a:prstGeom>
-          <a:noFill/>
-        </p:spPr>
-        <p:txBody>
-          <a:bodyPr wrap="square" lIns="45720" rIns="45720">
-            <a:spAutoFit/>
-          </a:bodyPr>
-          <a:lstStyle/>
-          <a:p>
-            <a:pPr>
-              <a:spcAft>
-                <a:spcPts val="300"/>
-              </a:spcAft>
-            </a:pPr>
-            <a:r>
-              <a:rPr sz="2000" b="1">
-                <a:solidFill>
-                  <a:srgbClr val="006D77"/>
-                </a:solidFill>
-              </a:rPr>
-              <a:t>• </a:t>
-            </a:r>
-            <a:r>
-              <a:rPr sz="2000" b="0">
-                <a:solidFill>
-                  <a:srgbClr val="1F2D3A"/>
-                </a:solidFill>
-              </a:rPr>
-              <a:t>Gizleme hatayı düzeltir. </a:t>
-            </a:r>
-            <a:r>
-              <a:rPr sz="2000" b="1">
-                <a:solidFill>
-                  <a:srgbClr val="1F2D3A"/>
-                </a:solidFill>
-              </a:rPr>
-              <a:t>(Y)</a:t>
-            </a:r>
-          </a:p>
-          <a:p>
-            <a:pPr>
-              <a:spcAft>
-                <a:spcPts val="300"/>
-              </a:spcAft>
-            </a:pPr>
-            <a:r>
-              <a:rPr sz="2000" b="1">
-                <a:solidFill>
-                  <a:srgbClr val="006D77"/>
-                </a:solidFill>
-              </a:rPr>
-              <a:t>• </a:t>
-            </a:r>
-            <a:r>
-              <a:rPr sz="2000" b="0">
-                <a:solidFill>
-                  <a:srgbClr val="1F2D3A"/>
-                </a:solidFill>
-              </a:rPr>
-              <a:t>Nonce gizli olmalı. </a:t>
-            </a:r>
-            <a:r>
-              <a:rPr sz="2000" b="1">
-                <a:solidFill>
-                  <a:srgbClr val="1F2D3A"/>
-                </a:solidFill>
-              </a:rPr>
-              <a:t>(Y — benzersiz olmalı, gizli değil)</a:t>
-            </a:r>
-          </a:p>
-          <a:p>
-            <a:pPr>
-              <a:spcAft>
-                <a:spcPts val="300"/>
-              </a:spcAft>
-            </a:pPr>
-            <a:r>
-              <a:rPr sz="2000" b="1">
-                <a:solidFill>
-                  <a:srgbClr val="006D77"/>
-                </a:solidFill>
-              </a:rPr>
-              <a:t>• </a:t>
-            </a:r>
-            <a:r>
-              <a:rPr sz="2000" b="0">
-                <a:solidFill>
-                  <a:srgbClr val="1F2D3A"/>
-                </a:solidFill>
-              </a:rPr>
-              <a:t>Parametreli sorgu SQL enjeksiyonunu önler. </a:t>
-            </a:r>
-            <a:r>
-              <a:rPr sz="2000" b="1">
-                <a:solidFill>
-                  <a:srgbClr val="1F2D3A"/>
-                </a:solidFill>
-              </a:rPr>
-              <a:t>(D)</a:t>
-            </a:r>
-          </a:p>
-        </p:txBody>
-      </p:sp>
-    </p:spTree>
-  </p:cSld>
-  <p:clrMapOvr>
-    <a:masterClrMapping/>
-  </p:clrMapOvr>
-</p:sld>
-</file>
-
-<file path=ppt/slides/slide37.xml><?xml version="1.0" encoding="utf-8"?>
-<p:sld xmlns:a="http://schemas.openxmlformats.org/drawingml/2006/main" xmlns:p="http://schemas.openxmlformats.org/presentationml/2006/main" xmlns:r="http://schemas.openxmlformats.org/officeDocument/2006/relationships">
-  <p:cSld>
-    <p:spTree>
-      <p:nvGrpSpPr>
-        <p:cNvPr id="1" name=""/>
-        <p:cNvGrpSpPr/>
-        <p:nvPr/>
-      </p:nvGrpSpPr>
-      <p:grpSpPr/>
-      <p:pic>
-        <p:nvPicPr>
-          <p:cNvPr id="2" name="Picture 1" descr="rteu_logo_kucuk.jpg"/>
-          <p:cNvPicPr>
-            <a:picLocks noChangeAspect="1"/>
-          </p:cNvPicPr>
-          <p:nvPr/>
-        </p:nvPicPr>
-        <p:blipFill>
-          <a:blip r:embed="rId2"/>
-          <a:stretch>
-            <a:fillRect/>
-          </a:stretch>
-        </p:blipFill>
-        <p:spPr>
-          <a:xfrm>
-            <a:off x="640080" y="164592"/>
-            <a:ext cx="242773" cy="329184"/>
-          </a:xfrm>
-          <a:prstGeom prst="rect">
-            <a:avLst/>
-          </a:prstGeom>
-        </p:spPr>
-      </p:pic>
-      <p:sp>
-        <p:nvSpPr>
-          <p:cNvPr id="3" name="TextBox 2"/>
-          <p:cNvSpPr txBox="1"/>
-          <p:nvPr/>
-        </p:nvSpPr>
-        <p:spPr>
-          <a:xfrm>
-            <a:off x="1051560" y="182880"/>
-            <a:ext cx="7315200" cy="320040"/>
-          </a:xfrm>
-          <a:prstGeom prst="rect">
-            <a:avLst/>
-          </a:prstGeom>
-          <a:noFill/>
-        </p:spPr>
-        <p:txBody>
-          <a:bodyPr wrap="square" lIns="45720" rIns="45720">
-            <a:spAutoFit/>
-          </a:bodyPr>
-          <a:lstStyle/>
-          <a:p>
-            <a:r>
-              <a:rPr sz="1100" b="0">
-                <a:solidFill>
-                  <a:srgbClr val="5B6770"/>
-                </a:solidFill>
-              </a:rPr>
-              <a:t>CEN429 Güvenli Programlama · Hafta 8</a:t>
-            </a:r>
-          </a:p>
-        </p:txBody>
-      </p:sp>
-      <p:sp>
-        <p:nvSpPr>
-          <p:cNvPr id="4" name="TextBox 3"/>
-          <p:cNvSpPr txBox="1"/>
-          <p:nvPr/>
-        </p:nvSpPr>
-        <p:spPr>
-          <a:xfrm>
-            <a:off x="640080" y="6446520"/>
-            <a:ext cx="7315200" cy="274320"/>
-          </a:xfrm>
-          <a:prstGeom prst="rect">
-            <a:avLst/>
-          </a:prstGeom>
-          <a:noFill/>
-        </p:spPr>
-        <p:txBody>
-          <a:bodyPr wrap="square" lIns="45720" rIns="45720">
-            <a:spAutoFit/>
-          </a:bodyPr>
-          <a:lstStyle/>
-          <a:p>
-            <a:r>
-              <a:rPr sz="1000" b="0">
-                <a:solidFill>
-                  <a:srgbClr val="5B6770"/>
-                </a:solidFill>
-              </a:rPr>
-              <a:t>RTEÜ Bilgisayar Mühendisliği · 2026-2027 Güz</a:t>
-            </a:r>
-          </a:p>
-        </p:txBody>
-      </p:sp>
-      <p:sp>
-        <p:nvSpPr>
-          <p:cNvPr id="5" name="TextBox 4"/>
-          <p:cNvSpPr txBox="1"/>
-          <p:nvPr/>
-        </p:nvSpPr>
-        <p:spPr>
-          <a:xfrm>
-            <a:off x="10637215" y="6446520"/>
-            <a:ext cx="914400" cy="274320"/>
-          </a:xfrm>
-          <a:prstGeom prst="rect">
-            <a:avLst/>
-          </a:prstGeom>
-          <a:noFill/>
-        </p:spPr>
-        <p:txBody>
-          <a:bodyPr wrap="square" lIns="45720" rIns="45720">
-            <a:spAutoFit/>
-          </a:bodyPr>
-          <a:lstStyle/>
-          <a:p>
-            <a:pPr algn="r"/>
-            <a:r>
-              <a:rPr sz="1000" b="0">
-                <a:solidFill>
-                  <a:srgbClr val="5B6770"/>
-                </a:solidFill>
-              </a:rPr>
-              <a:t>37</a:t>
-            </a:r>
-          </a:p>
-        </p:txBody>
-      </p:sp>
-      <p:sp>
-        <p:nvSpPr>
-          <p:cNvPr id="6" name="TextBox 5"/>
-          <p:cNvSpPr txBox="1"/>
-          <p:nvPr/>
-        </p:nvSpPr>
-        <p:spPr>
-          <a:xfrm>
-            <a:off x="640080" y="548640"/>
-            <a:ext cx="10911535" cy="731520"/>
-          </a:xfrm>
-          <a:prstGeom prst="rect">
-            <a:avLst/>
-          </a:prstGeom>
-          <a:noFill/>
-        </p:spPr>
-        <p:txBody>
-          <a:bodyPr wrap="square" lIns="45720" rIns="45720" anchor="ctr">
-            <a:spAutoFit/>
-          </a:bodyPr>
-          <a:lstStyle/>
-          <a:p>
-            <a:r>
-              <a:rPr sz="3000" b="1">
-                <a:solidFill>
-                  <a:srgbClr val="006D77"/>
-                </a:solidFill>
-              </a:rPr>
-              <a:t>Çalışma planı</a:t>
-            </a:r>
-          </a:p>
-        </p:txBody>
-      </p:sp>
-      <p:sp>
-        <p:nvSpPr>
-          <p:cNvPr id="7" name="TextBox 6"/>
-          <p:cNvSpPr txBox="1"/>
-          <p:nvPr/>
-        </p:nvSpPr>
-        <p:spPr>
-          <a:xfrm>
-            <a:off x="640080" y="1325880"/>
-            <a:ext cx="10911535" cy="1219200"/>
-          </a:xfrm>
-          <a:prstGeom prst="rect">
-            <a:avLst/>
-          </a:prstGeom>
-          <a:noFill/>
-        </p:spPr>
-        <p:txBody>
-          <a:bodyPr wrap="square" lIns="45720" rIns="45720">
-            <a:spAutoFit/>
-          </a:bodyPr>
-          <a:lstStyle/>
-          <a:p>
-            <a:pPr>
-              <a:spcAft>
-                <a:spcPts val="300"/>
-              </a:spcAft>
-            </a:pPr>
-            <a:r>
-              <a:rPr sz="2000" b="1">
-                <a:solidFill>
-                  <a:srgbClr val="006D77"/>
-                </a:solidFill>
-              </a:rPr>
-              <a:t>• </a:t>
-            </a:r>
-            <a:r>
-              <a:rPr sz="2000" b="0">
-                <a:solidFill>
-                  <a:srgbClr val="1F2D3A"/>
-                </a:solidFill>
-              </a:rPr>
-              <a:t>Her haftanın "Kendini sınama"sını cevaba bakmadan yap.</a:t>
-            </a:r>
-          </a:p>
-          <a:p>
-            <a:pPr>
-              <a:spcAft>
-                <a:spcPts val="300"/>
-              </a:spcAft>
-            </a:pPr>
-            <a:r>
-              <a:rPr sz="2000" b="1">
-                <a:solidFill>
-                  <a:srgbClr val="006D77"/>
-                </a:solidFill>
-              </a:rPr>
-              <a:t>• </a:t>
-            </a:r>
-            <a:r>
-              <a:rPr sz="2000" b="0">
-                <a:solidFill>
-                  <a:srgbClr val="1F2D3A"/>
-                </a:solidFill>
-              </a:rPr>
-              <a:t>Sık karıştırılanları ezberden değil </a:t>
-            </a:r>
-            <a:r>
-              <a:rPr sz="2000" b="1">
-                <a:solidFill>
-                  <a:srgbClr val="1F2D3A"/>
-                </a:solidFill>
-              </a:rPr>
-              <a:t>nedeniyle</a:t>
-            </a:r>
-            <a:r>
-              <a:rPr sz="2000" b="0">
-                <a:solidFill>
-                  <a:srgbClr val="1F2D3A"/>
-                </a:solidFill>
-              </a:rPr>
-              <a:t> öğren.</a:t>
-            </a:r>
-          </a:p>
-          <a:p>
-            <a:pPr>
-              <a:spcAft>
-                <a:spcPts val="300"/>
-              </a:spcAft>
-            </a:pPr>
-            <a:r>
-              <a:rPr sz="2000" b="1">
-                <a:solidFill>
-                  <a:srgbClr val="006D77"/>
-                </a:solidFill>
-              </a:rPr>
-              <a:t>• </a:t>
-            </a:r>
-            <a:r>
-              <a:rPr sz="2000" b="0">
-                <a:solidFill>
-                  <a:srgbClr val="1F2D3A"/>
-                </a:solidFill>
-              </a:rPr>
-              <a:t>3. ve 4. haftanın demolarını bir kez daha gözden geçir.</a:t>
-            </a:r>
-          </a:p>
-        </p:txBody>
-      </p:sp>
-    </p:spTree>
-  </p:cSld>
-  <p:clrMapOvr>
-    <a:masterClrMapping/>
-  </p:clrMapOvr>
-</p:sld>
-</file>
-
-<file path=ppt/slides/slide38.xml><?xml version="1.0" encoding="utf-8"?>
-<p:sld xmlns:a="http://schemas.openxmlformats.org/drawingml/2006/main" xmlns:p="http://schemas.openxmlformats.org/presentationml/2006/main" xmlns:r="http://schemas.openxmlformats.org/officeDocument/2006/relationships">
-  <p:cSld>
-    <p:spTree>
-      <p:nvGrpSpPr>
-        <p:cNvPr id="1" name=""/>
-        <p:cNvGrpSpPr/>
-        <p:nvPr/>
-      </p:nvGrpSpPr>
-      <p:grpSpPr/>
-      <p:pic>
-        <p:nvPicPr>
-          <p:cNvPr id="2" name="Picture 1" descr="rteu_logo_kucuk.jpg"/>
-          <p:cNvPicPr>
-            <a:picLocks noChangeAspect="1"/>
-          </p:cNvPicPr>
-          <p:nvPr/>
-        </p:nvPicPr>
-        <p:blipFill>
-          <a:blip r:embed="rId2"/>
-          <a:stretch>
-            <a:fillRect/>
-          </a:stretch>
-        </p:blipFill>
-        <p:spPr>
-          <a:xfrm>
-            <a:off x="640080" y="164592"/>
-            <a:ext cx="242773" cy="329184"/>
-          </a:xfrm>
-          <a:prstGeom prst="rect">
-            <a:avLst/>
-          </a:prstGeom>
-        </p:spPr>
-      </p:pic>
-      <p:sp>
-        <p:nvSpPr>
-          <p:cNvPr id="3" name="TextBox 2"/>
-          <p:cNvSpPr txBox="1"/>
-          <p:nvPr/>
-        </p:nvSpPr>
-        <p:spPr>
-          <a:xfrm>
-            <a:off x="1051560" y="182880"/>
-            <a:ext cx="7315200" cy="320040"/>
-          </a:xfrm>
-          <a:prstGeom prst="rect">
-            <a:avLst/>
-          </a:prstGeom>
-          <a:noFill/>
-        </p:spPr>
-        <p:txBody>
-          <a:bodyPr wrap="square" lIns="45720" rIns="45720">
-            <a:spAutoFit/>
-          </a:bodyPr>
-          <a:lstStyle/>
-          <a:p>
-            <a:r>
-              <a:rPr sz="1100" b="0">
-                <a:solidFill>
-                  <a:srgbClr val="5B6770"/>
-                </a:solidFill>
-              </a:rPr>
-              <a:t>CEN429 Güvenli Programlama · Hafta 8</a:t>
-            </a:r>
-          </a:p>
-        </p:txBody>
-      </p:sp>
-      <p:sp>
-        <p:nvSpPr>
-          <p:cNvPr id="4" name="TextBox 3"/>
-          <p:cNvSpPr txBox="1"/>
-          <p:nvPr/>
-        </p:nvSpPr>
-        <p:spPr>
-          <a:xfrm>
-            <a:off x="640080" y="6446520"/>
-            <a:ext cx="7315200" cy="274320"/>
-          </a:xfrm>
-          <a:prstGeom prst="rect">
-            <a:avLst/>
-          </a:prstGeom>
-          <a:noFill/>
-        </p:spPr>
-        <p:txBody>
-          <a:bodyPr wrap="square" lIns="45720" rIns="45720">
-            <a:spAutoFit/>
-          </a:bodyPr>
-          <a:lstStyle/>
-          <a:p>
-            <a:r>
-              <a:rPr sz="1000" b="0">
-                <a:solidFill>
-                  <a:srgbClr val="5B6770"/>
-                </a:solidFill>
-              </a:rPr>
-              <a:t>RTEÜ Bilgisayar Mühendisliği · 2026-2027 Güz</a:t>
-            </a:r>
-          </a:p>
-        </p:txBody>
-      </p:sp>
-      <p:sp>
-        <p:nvSpPr>
-          <p:cNvPr id="5" name="TextBox 4"/>
-          <p:cNvSpPr txBox="1"/>
-          <p:nvPr/>
-        </p:nvSpPr>
-        <p:spPr>
-          <a:xfrm>
-            <a:off x="10637215" y="6446520"/>
-            <a:ext cx="914400" cy="274320"/>
-          </a:xfrm>
-          <a:prstGeom prst="rect">
-            <a:avLst/>
-          </a:prstGeom>
-          <a:noFill/>
-        </p:spPr>
-        <p:txBody>
-          <a:bodyPr wrap="square" lIns="45720" rIns="45720">
-            <a:spAutoFit/>
-          </a:bodyPr>
-          <a:lstStyle/>
-          <a:p>
-            <a:pPr algn="r"/>
-            <a:r>
-              <a:rPr sz="1000" b="0">
-                <a:solidFill>
-                  <a:srgbClr val="5B6770"/>
-                </a:solidFill>
-              </a:rPr>
-              <a:t>38</a:t>
-            </a:r>
-          </a:p>
-        </p:txBody>
-      </p:sp>
-      <p:sp>
-        <p:nvSpPr>
-          <p:cNvPr id="6" name="TextBox 5"/>
-          <p:cNvSpPr txBox="1"/>
-          <p:nvPr/>
-        </p:nvSpPr>
-        <p:spPr>
-          <a:xfrm>
-            <a:off x="640080" y="548640"/>
-            <a:ext cx="10911535" cy="731520"/>
-          </a:xfrm>
-          <a:prstGeom prst="rect">
-            <a:avLst/>
-          </a:prstGeom>
-          <a:noFill/>
-        </p:spPr>
-        <p:txBody>
-          <a:bodyPr wrap="square" lIns="45720" rIns="45720" anchor="ctr">
-            <a:spAutoFit/>
-          </a:bodyPr>
-          <a:lstStyle/>
-          <a:p>
-            <a:r>
-              <a:rPr sz="3000" b="1">
-                <a:solidFill>
-                  <a:srgbClr val="006D77"/>
-                </a:solidFill>
-              </a:rPr>
-              <a:t>Son söz (Quiz-1 hazırlık)</a:t>
-            </a:r>
-          </a:p>
-        </p:txBody>
-      </p:sp>
-      <p:sp>
-        <p:nvSpPr>
-          <p:cNvPr id="7" name="Rectangle 6"/>
-          <p:cNvSpPr/>
-          <p:nvPr/>
-        </p:nvSpPr>
-        <p:spPr>
-          <a:xfrm>
-            <a:off x="640080" y="1325880"/>
-            <a:ext cx="10911535" cy="934719"/>
-          </a:xfrm>
-          <a:prstGeom prst="rect">
-            <a:avLst/>
-          </a:prstGeom>
-          <a:solidFill>
-            <a:srgbClr val="EEF7F8"/>
-          </a:solidFill>
-          <a:ln>
-            <a:solidFill>
-              <a:srgbClr val="006D77"/>
-            </a:solidFill>
-          </a:ln>
-        </p:spPr>
-        <p:style>
-          <a:lnRef idx="1">
-            <a:schemeClr val="accent1"/>
-          </a:lnRef>
-          <a:fillRef idx="3">
-            <a:schemeClr val="accent1"/>
-          </a:fillRef>
-          <a:effectRef idx="2">
-            <a:schemeClr val="accent1"/>
-          </a:effectRef>
-          <a:fontRef idx="minor">
-            <a:schemeClr val="lt1"/>
-          </a:fontRef>
-        </p:style>
-        <p:txBody>
-          <a:bodyPr rtlCol="0" anchor="ctr" wrap="square" lIns="182880"/>
-          <a:lstStyle/>
-          <a:p>
-            <a:pPr algn="l"/>
-            <a:r>
-              <a:rPr sz="2000" b="0">
-                <a:solidFill>
-                  <a:srgbClr val="1F2D3A"/>
-                </a:solidFill>
-              </a:rPr>
-              <a:t>Ezber değil, </a:t>
-            </a:r>
-            <a:r>
-              <a:rPr sz="2000" b="1">
-                <a:solidFill>
-                  <a:srgbClr val="1F2D3A"/>
-                </a:solidFill>
-              </a:rPr>
-              <a:t>neden</a:t>
-            </a:r>
-            <a:r>
-              <a:rPr sz="2000" b="0">
-                <a:solidFill>
-                  <a:srgbClr val="1F2D3A"/>
-                </a:solidFill>
-              </a:rPr>
-              <a:t> ölçülür: "neden bu kip?", "neden bu denetim?", "neyi korumaz?"</a:t>
-            </a:r>
-          </a:p>
-        </p:txBody>
-      </p:sp>
-      <p:sp>
-        <p:nvSpPr>
-          <p:cNvPr id="8" name="TextBox 7"/>
-          <p:cNvSpPr txBox="1"/>
-          <p:nvPr/>
-        </p:nvSpPr>
-        <p:spPr>
-          <a:xfrm>
-            <a:off x="640080" y="2370328"/>
-            <a:ext cx="10911535" cy="439928"/>
-          </a:xfrm>
-          <a:prstGeom prst="rect">
-            <a:avLst/>
-          </a:prstGeom>
-          <a:noFill/>
-        </p:spPr>
-        <p:txBody>
-          <a:bodyPr wrap="square" lIns="45720" rIns="45720">
-            <a:spAutoFit/>
-          </a:bodyPr>
-          <a:lstStyle/>
-          <a:p>
-            <a:pPr algn="l"/>
-            <a:r>
-              <a:rPr sz="2000" b="0">
-                <a:solidFill>
-                  <a:srgbClr val="1F2D3A"/>
-                </a:solidFill>
-              </a:rPr>
-              <a:t>İyi şanslar.</a:t>
-            </a:r>
-          </a:p>
-        </p:txBody>
-      </p:sp>
-    </p:spTree>
-  </p:cSld>
-  <p:clrMapOvr>
-    <a:masterClrMapping/>
-  </p:clrMapOvr>
-</p:sld>
-</file>
-
-<file path=ppt/slides/slide4.xml><?xml version="1.0" encoding="utf-8"?>
-<p:sld xmlns:a="http://schemas.openxmlformats.org/drawingml/2006/main" xmlns:p="http://schemas.openxmlformats.org/presentationml/2006/main" xmlns:r="http://schemas.openxmlformats.org/officeDocument/2006/relationships">
-  <p:cSld>
-    <p:spTree>
-      <p:nvGrpSpPr>
-        <p:cNvPr id="1" name=""/>
-        <p:cNvGrpSpPr/>
-        <p:nvPr/>
-      </p:nvGrpSpPr>
-      <p:grpSpPr/>
-      <p:pic>
-        <p:nvPicPr>
-          <p:cNvPr id="2" name="Picture 1" descr="rteu_logo_kucuk.jpg"/>
-          <p:cNvPicPr>
-            <a:picLocks noChangeAspect="1"/>
-          </p:cNvPicPr>
-          <p:nvPr/>
-        </p:nvPicPr>
-        <p:blipFill>
-          <a:blip r:embed="rId2"/>
-          <a:stretch>
-            <a:fillRect/>
-          </a:stretch>
-        </p:blipFill>
-        <p:spPr>
-          <a:xfrm>
-            <a:off x="640080" y="164592"/>
-            <a:ext cx="242773" cy="329184"/>
-          </a:xfrm>
-          <a:prstGeom prst="rect">
-            <a:avLst/>
-          </a:prstGeom>
-        </p:spPr>
-      </p:pic>
-      <p:sp>
-        <p:nvSpPr>
-          <p:cNvPr id="3" name="TextBox 2"/>
-          <p:cNvSpPr txBox="1"/>
-          <p:nvPr/>
-        </p:nvSpPr>
-        <p:spPr>
-          <a:xfrm>
-            <a:off x="1051560" y="182880"/>
-            <a:ext cx="7315200" cy="320040"/>
-          </a:xfrm>
-          <a:prstGeom prst="rect">
-            <a:avLst/>
-          </a:prstGeom>
-          <a:noFill/>
-        </p:spPr>
-        <p:txBody>
-          <a:bodyPr wrap="square" lIns="45720" rIns="45720">
-            <a:spAutoFit/>
-          </a:bodyPr>
-          <a:lstStyle/>
-          <a:p>
-            <a:r>
-              <a:rPr sz="1100" b="0">
-                <a:solidFill>
-                  <a:srgbClr val="5B6770"/>
-                </a:solidFill>
-              </a:rPr>
-              <a:t>CEN429 Güvenli Programlama · Hafta 8</a:t>
-            </a:r>
-          </a:p>
-        </p:txBody>
-      </p:sp>
-      <p:sp>
-        <p:nvSpPr>
-          <p:cNvPr id="4" name="TextBox 3"/>
-          <p:cNvSpPr txBox="1"/>
-          <p:nvPr/>
-        </p:nvSpPr>
-        <p:spPr>
-          <a:xfrm>
-            <a:off x="640080" y="6446520"/>
-            <a:ext cx="7315200" cy="274320"/>
-          </a:xfrm>
-          <a:prstGeom prst="rect">
-            <a:avLst/>
-          </a:prstGeom>
-          <a:noFill/>
-        </p:spPr>
-        <p:txBody>
-          <a:bodyPr wrap="square" lIns="45720" rIns="45720">
-            <a:spAutoFit/>
-          </a:bodyPr>
-          <a:lstStyle/>
-          <a:p>
-            <a:r>
-              <a:rPr sz="1000" b="0">
-                <a:solidFill>
-                  <a:srgbClr val="5B6770"/>
-                </a:solidFill>
-              </a:rPr>
-              <a:t>RTEÜ Bilgisayar Mühendisliği · 2026-2027 Güz</a:t>
-            </a:r>
-          </a:p>
-        </p:txBody>
-      </p:sp>
-      <p:sp>
-        <p:nvSpPr>
-          <p:cNvPr id="5" name="TextBox 4"/>
-          <p:cNvSpPr txBox="1"/>
-          <p:nvPr/>
-        </p:nvSpPr>
-        <p:spPr>
-          <a:xfrm>
-            <a:off x="10637215" y="6446520"/>
-            <a:ext cx="914400" cy="274320"/>
-          </a:xfrm>
-          <a:prstGeom prst="rect">
-            <a:avLst/>
-          </a:prstGeom>
-          <a:noFill/>
-        </p:spPr>
-        <p:txBody>
-          <a:bodyPr wrap="square" lIns="45720" rIns="45720">
-            <a:spAutoFit/>
-          </a:bodyPr>
-          <a:lstStyle/>
-          <a:p>
-            <a:pPr algn="r"/>
-            <a:r>
-              <a:rPr sz="1000" b="0">
-                <a:solidFill>
-                  <a:srgbClr val="5B6770"/>
-                </a:solidFill>
-              </a:rPr>
-              <a:t>4</a:t>
             </a:r>
           </a:p>
         </p:txBody>
@@ -13343,6 +10185,40 @@
           </a:graphicData>
         </a:graphic>
       </p:graphicFrame>
+      <p:sp>
+        <p:nvSpPr>
+          <p:cNvPr id="8" name="TextBox 7"/>
+          <p:cNvSpPr txBox="1"/>
+          <p:nvPr/>
+        </p:nvSpPr>
+        <p:spPr>
+          <a:xfrm>
+            <a:off x="640080" y="4365345"/>
+            <a:ext cx="10911535" cy="406908"/>
+          </a:xfrm>
+          <a:prstGeom prst="rect">
+            <a:avLst/>
+          </a:prstGeom>
+          <a:noFill/>
+        </p:spPr>
+        <p:txBody>
+          <a:bodyPr wrap="square" lIns="45720" rIns="45720">
+            <a:spAutoFit/>
+          </a:bodyPr>
+          <a:lstStyle/>
+          <a:p>
+            <a:pPr algn="l"/>
+            <a:r>
+              <a:rPr sz="1800" b="0" i="1">
+                <a:solidFill>
+                  <a:srgbClr val="1F2D3A"/>
+                </a:solidFill>
+              </a:rPr>
+              <a:t>Ek not: 2. hafta — güven sınırı ve en az yetki ilkesi.</a:t>
+            </a:r>
+          </a:p>
+        </p:txBody>
+      </p:sp>
     </p:spTree>
   </p:cSld>
   <p:clrMapOvr>
@@ -13351,7 +10227,7 @@
 </p:sld>
 </file>
 
-<file path=ppt/slides/slide5.xml><?xml version="1.0" encoding="utf-8"?>
+<file path=ppt/slides/slide4.xml><?xml version="1.0" encoding="utf-8"?>
 <p:sld xmlns:a="http://schemas.openxmlformats.org/drawingml/2006/main" xmlns:p="http://schemas.openxmlformats.org/presentationml/2006/main" xmlns:r="http://schemas.openxmlformats.org/officeDocument/2006/relationships">
   <p:cSld>
     <p:spTree>
@@ -13480,206 +10356,7 @@
                   <a:srgbClr val="5B6770"/>
                 </a:solidFill>
               </a:rPr>
-              <a:t>5</a:t>
-            </a:r>
-          </a:p>
-        </p:txBody>
-      </p:sp>
-      <p:sp>
-        <p:nvSpPr>
-          <p:cNvPr id="6" name="TextBox 5"/>
-          <p:cNvSpPr txBox="1"/>
-          <p:nvPr/>
-        </p:nvSpPr>
-        <p:spPr>
-          <a:xfrm>
-            <a:off x="640080" y="548640"/>
-            <a:ext cx="10911535" cy="731520"/>
-          </a:xfrm>
-          <a:prstGeom prst="rect">
-            <a:avLst/>
-          </a:prstGeom>
-          <a:noFill/>
-        </p:spPr>
-        <p:txBody>
-          <a:bodyPr wrap="square" lIns="45720" rIns="45720" anchor="ctr">
-            <a:spAutoFit/>
-          </a:bodyPr>
-          <a:lstStyle/>
-          <a:p>
-            <a:r>
-              <a:rPr sz="3000" b="1">
-                <a:solidFill>
-                  <a:srgbClr val="006D77"/>
-                </a:solidFill>
-              </a:rPr>
-              <a:t>Quiz-1 kapsamı — şema</a:t>
-            </a:r>
-          </a:p>
-        </p:txBody>
-      </p:sp>
-      <p:pic>
-        <p:nvPicPr>
-          <p:cNvPr id="7" name="Picture 6" descr="h08-01-kapsam.png"/>
-          <p:cNvPicPr>
-            <a:picLocks noChangeAspect="1"/>
-          </p:cNvPicPr>
-          <p:nvPr/>
-        </p:nvPicPr>
-        <p:blipFill>
-          <a:blip r:embed="rId3"/>
-          <a:stretch>
-            <a:fillRect/>
-          </a:stretch>
-        </p:blipFill>
-        <p:spPr>
-          <a:xfrm>
-            <a:off x="2046645" y="1325880"/>
-            <a:ext cx="8098404" cy="4060751"/>
-          </a:xfrm>
-          <a:prstGeom prst="rect">
-            <a:avLst/>
-          </a:prstGeom>
-        </p:spPr>
-      </p:pic>
-    </p:spTree>
-  </p:cSld>
-  <p:clrMapOvr>
-    <a:masterClrMapping/>
-  </p:clrMapOvr>
-</p:sld>
-</file>
-
-<file path=ppt/slides/slide6.xml><?xml version="1.0" encoding="utf-8"?>
-<p:sld xmlns:a="http://schemas.openxmlformats.org/drawingml/2006/main" xmlns:p="http://schemas.openxmlformats.org/presentationml/2006/main" xmlns:r="http://schemas.openxmlformats.org/officeDocument/2006/relationships">
-  <p:cSld>
-    <p:spTree>
-      <p:nvGrpSpPr>
-        <p:cNvPr id="1" name=""/>
-        <p:cNvGrpSpPr/>
-        <p:nvPr/>
-      </p:nvGrpSpPr>
-      <p:grpSpPr/>
-      <p:pic>
-        <p:nvPicPr>
-          <p:cNvPr id="2" name="Picture 1" descr="rteu_logo_kucuk.jpg"/>
-          <p:cNvPicPr>
-            <a:picLocks noChangeAspect="1"/>
-          </p:cNvPicPr>
-          <p:nvPr/>
-        </p:nvPicPr>
-        <p:blipFill>
-          <a:blip r:embed="rId2"/>
-          <a:stretch>
-            <a:fillRect/>
-          </a:stretch>
-        </p:blipFill>
-        <p:spPr>
-          <a:xfrm>
-            <a:off x="640080" y="164592"/>
-            <a:ext cx="242773" cy="329184"/>
-          </a:xfrm>
-          <a:prstGeom prst="rect">
-            <a:avLst/>
-          </a:prstGeom>
-        </p:spPr>
-      </p:pic>
-      <p:sp>
-        <p:nvSpPr>
-          <p:cNvPr id="3" name="TextBox 2"/>
-          <p:cNvSpPr txBox="1"/>
-          <p:nvPr/>
-        </p:nvSpPr>
-        <p:spPr>
-          <a:xfrm>
-            <a:off x="1051560" y="182880"/>
-            <a:ext cx="7315200" cy="320040"/>
-          </a:xfrm>
-          <a:prstGeom prst="rect">
-            <a:avLst/>
-          </a:prstGeom>
-          <a:noFill/>
-        </p:spPr>
-        <p:txBody>
-          <a:bodyPr wrap="square" lIns="45720" rIns="45720">
-            <a:spAutoFit/>
-          </a:bodyPr>
-          <a:lstStyle/>
-          <a:p>
-            <a:r>
-              <a:rPr sz="1100" b="0">
-                <a:solidFill>
-                  <a:srgbClr val="5B6770"/>
-                </a:solidFill>
-              </a:rPr>
-              <a:t>CEN429 Güvenli Programlama · Hafta 8</a:t>
-            </a:r>
-          </a:p>
-        </p:txBody>
-      </p:sp>
-      <p:sp>
-        <p:nvSpPr>
-          <p:cNvPr id="4" name="TextBox 3"/>
-          <p:cNvSpPr txBox="1"/>
-          <p:nvPr/>
-        </p:nvSpPr>
-        <p:spPr>
-          <a:xfrm>
-            <a:off x="640080" y="6446520"/>
-            <a:ext cx="7315200" cy="274320"/>
-          </a:xfrm>
-          <a:prstGeom prst="rect">
-            <a:avLst/>
-          </a:prstGeom>
-          <a:noFill/>
-        </p:spPr>
-        <p:txBody>
-          <a:bodyPr wrap="square" lIns="45720" rIns="45720">
-            <a:spAutoFit/>
-          </a:bodyPr>
-          <a:lstStyle/>
-          <a:p>
-            <a:r>
-              <a:rPr sz="1000" b="0">
-                <a:solidFill>
-                  <a:srgbClr val="5B6770"/>
-                </a:solidFill>
-              </a:rPr>
-              <a:t>RTEÜ Bilgisayar Mühendisliği · 2026-2027 Güz</a:t>
-            </a:r>
-          </a:p>
-        </p:txBody>
-      </p:sp>
-      <p:sp>
-        <p:nvSpPr>
-          <p:cNvPr id="5" name="TextBox 4"/>
-          <p:cNvSpPr txBox="1"/>
-          <p:nvPr/>
-        </p:nvSpPr>
-        <p:spPr>
-          <a:xfrm>
-            <a:off x="10637215" y="6446520"/>
-            <a:ext cx="914400" cy="274320"/>
-          </a:xfrm>
-          <a:prstGeom prst="rect">
-            <a:avLst/>
-          </a:prstGeom>
-          <a:noFill/>
-        </p:spPr>
-        <p:txBody>
-          <a:bodyPr wrap="square" lIns="45720" rIns="45720">
-            <a:spAutoFit/>
-          </a:bodyPr>
-          <a:lstStyle/>
-          <a:p>
-            <a:pPr algn="r"/>
-            <a:r>
-              <a:rPr sz="1000" b="0">
-                <a:solidFill>
-                  <a:srgbClr val="5B6770"/>
-                </a:solidFill>
-              </a:rPr>
-              <a:t>6</a:t>
+              <a:t>4</a:t>
             </a:r>
           </a:p>
         </p:txBody>
@@ -13727,7 +10404,7 @@
         </p:nvGraphicFramePr>
         <p:xfrm>
           <a:off x="640080" y="1325880"/>
-          <a:ext cx="10911534" cy="2715768"/>
+          <a:ext cx="10911534" cy="2929737"/>
         </p:xfrm>
         <a:graphic>
           <a:graphicData uri="http://schemas.openxmlformats.org/drawingml/2006/table">
@@ -13736,10 +10413,10 @@
                 <a:tableStyleId>{5C22544A-7EE6-4342-B048-85BDC9FD1C3A}</a:tableStyleId>
               </a:tblPr>
               <a:tblGrid>
-                <a:gridCol w="516862"/>
-                <a:gridCol w="10394672"/>
+                <a:gridCol w="476717"/>
+                <a:gridCol w="10434817"/>
               </a:tblGrid>
-              <a:tr h="678942">
+              <a:tr h="732434">
                 <a:tc>
                   <a:txBody>
                     <a:bodyPr wrap="square"/>
@@ -13783,7 +10460,7 @@
                   </a:tcPr>
                 </a:tc>
               </a:tr>
-              <a:tr h="678942">
+              <a:tr h="732434">
                 <a:tc>
                   <a:txBody>
                     <a:bodyPr wrap="square"/>
@@ -13816,7 +10493,7 @@
                             <a:srgbClr val="1F2D3A"/>
                           </a:solidFill>
                         </a:rPr>
-                        <a:t>SEI CERT · girdi doğrulama · biçim dizisi · UAF · tamsayı/UB · hata işleme, sinyaller · statik analiz · sanitizer · fuzzing · kanarya/FORTIFY/ASLR/NX/RELRO/CFI · gizlemeye giriş</a:t>
+                        <a:t>SEI CERT · girdi doğrulama · biçim dizesi (format string) · UAF · tamsayı/UB · hata işleme, sinyaller · statik analiz · sanitizer · fuzzing · kanarya/FORTIFY/ASLR/NX/RELRO/CFI · gizlemeye giriş</a:t>
                       </a:r>
                     </a:p>
                   </a:txBody>
@@ -13827,7 +10504,7 @@
                   </a:tcPr>
                 </a:tc>
               </a:tr>
-              <a:tr h="678942">
+              <a:tr h="732434">
                 <a:tc>
                   <a:txBody>
                     <a:bodyPr wrap="square"/>
@@ -13871,7 +10548,7 @@
                   </a:tcPr>
                 </a:tc>
               </a:tr>
-              <a:tr h="678942">
+              <a:tr h="732435">
                 <a:tc>
                   <a:txBody>
                     <a:bodyPr wrap="square"/>
@@ -13919,6 +10596,40 @@
           </a:graphicData>
         </a:graphic>
       </p:graphicFrame>
+      <p:sp>
+        <p:nvSpPr>
+          <p:cNvPr id="8" name="TextBox 7"/>
+          <p:cNvSpPr txBox="1"/>
+          <p:nvPr/>
+        </p:nvSpPr>
+        <p:spPr>
+          <a:xfrm>
+            <a:off x="640080" y="4365345"/>
+            <a:ext cx="10911535" cy="704088"/>
+          </a:xfrm>
+          <a:prstGeom prst="rect">
+            <a:avLst/>
+          </a:prstGeom>
+          <a:noFill/>
+        </p:spPr>
+        <p:txBody>
+          <a:bodyPr wrap="square" lIns="45720" rIns="45720">
+            <a:spAutoFit/>
+          </a:bodyPr>
+          <a:lstStyle/>
+          <a:p>
+            <a:pPr algn="l"/>
+            <a:r>
+              <a:rPr sz="1800" b="0" i="1">
+                <a:solidFill>
+                  <a:srgbClr val="1F2D3A"/>
+                </a:solidFill>
+              </a:rPr>
+              <a:t>Ek not: 4. hafta — üç katman (kod → derleyici/OS → gizleme); 5. hafta — yönetilen dil bellek hatasını çözer, enjeksiyonu çözmez.</a:t>
+            </a:r>
+          </a:p>
+        </p:txBody>
+      </p:sp>
     </p:spTree>
   </p:cSld>
   <p:clrMapOvr>
@@ -13927,7 +10638,7 @@
 </p:sld>
 </file>
 
-<file path=ppt/slides/slide7.xml><?xml version="1.0" encoding="utf-8"?>
+<file path=ppt/slides/slide5.xml><?xml version="1.0" encoding="utf-8"?>
 <p:sld xmlns:a="http://schemas.openxmlformats.org/drawingml/2006/main" xmlns:p="http://schemas.openxmlformats.org/presentationml/2006/main" xmlns:r="http://schemas.openxmlformats.org/officeDocument/2006/relationships">
   <p:cSld>
     <p:spTree>
@@ -14056,7 +10767,7 @@
                   <a:srgbClr val="5B6770"/>
                 </a:solidFill>
               </a:rPr>
-              <a:t>7</a:t>
+              <a:t>5</a:t>
             </a:r>
           </a:p>
         </p:txBody>
@@ -14089,14 +10800,14 @@
                   <a:srgbClr val="006D77"/>
                 </a:solidFill>
               </a:rPr>
-              <a:t>Soru tipleri — şema</a:t>
+              <a:t>Quiz-1 kapsamı — şema</a:t>
             </a:r>
           </a:p>
         </p:txBody>
       </p:sp>
       <p:pic>
         <p:nvPicPr>
-          <p:cNvPr id="7" name="Picture 6" descr="h08-02-soru-tipleri.png"/>
+          <p:cNvPr id="7" name="Picture 6" descr="h08-01-kapsam.png"/>
           <p:cNvPicPr>
             <a:picLocks noChangeAspect="1"/>
           </p:cNvPicPr>
@@ -14110,8 +10821,8 @@
         </p:blipFill>
         <p:spPr>
           <a:xfrm>
-            <a:off x="2046645" y="1325880"/>
-            <a:ext cx="8098404" cy="3210484"/>
+            <a:off x="1971189" y="1325880"/>
+            <a:ext cx="8249317" cy="4828032"/>
           </a:xfrm>
           <a:prstGeom prst="rect">
             <a:avLst/>
@@ -14126,7 +10837,7 @@
 </p:sld>
 </file>
 
-<file path=ppt/slides/slide8.xml><?xml version="1.0" encoding="utf-8"?>
+<file path=ppt/slides/slide6.xml><?xml version="1.0" encoding="utf-8"?>
 <p:sld xmlns:a="http://schemas.openxmlformats.org/drawingml/2006/main" xmlns:p="http://schemas.openxmlformats.org/presentationml/2006/main" xmlns:r="http://schemas.openxmlformats.org/officeDocument/2006/relationships">
   <p:cSld>
     <p:spTree>
@@ -14255,7 +10966,7 @@
                   <a:srgbClr val="5B6770"/>
                 </a:solidFill>
               </a:rPr>
-              <a:t>8</a:t>
+              <a:t>6</a:t>
             </a:r>
           </a:p>
         </p:txBody>
@@ -14848,7 +11559,7 @@
 </p:sld>
 </file>
 
-<file path=ppt/slides/slide9.xml><?xml version="1.0" encoding="utf-8"?>
+<file path=ppt/slides/slide7.xml><?xml version="1.0" encoding="utf-8"?>
 <p:sld xmlns:a="http://schemas.openxmlformats.org/drawingml/2006/main" xmlns:p="http://schemas.openxmlformats.org/presentationml/2006/main" xmlns:r="http://schemas.openxmlformats.org/officeDocument/2006/relationships">
   <p:cSld>
     <p:spTree>
@@ -14977,7 +11688,7 @@
                   <a:srgbClr val="5B6770"/>
                 </a:solidFill>
               </a:rPr>
-              <a:t>9</a:t>
+              <a:t>7</a:t>
             </a:r>
           </a:p>
         </p:txBody>
@@ -15425,7 +12136,7 @@
                             <a:srgbClr val="1F2D3A"/>
                           </a:solidFill>
                         </a:rPr>
-                        <a:t>Adlar · dizgeler</a:t>
+                        <a:t>Adlar · dizeler (string)</a:t>
                       </a:r>
                     </a:p>
                   </a:txBody>
@@ -15635,6 +12346,732 @@
           </a:graphicData>
         </a:graphic>
       </p:graphicFrame>
+    </p:spTree>
+  </p:cSld>
+  <p:clrMapOvr>
+    <a:masterClrMapping/>
+  </p:clrMapOvr>
+</p:sld>
+</file>
+
+<file path=ppt/slides/slide8.xml><?xml version="1.0" encoding="utf-8"?>
+<p:sld xmlns:a="http://schemas.openxmlformats.org/drawingml/2006/main" xmlns:p="http://schemas.openxmlformats.org/presentationml/2006/main" xmlns:r="http://schemas.openxmlformats.org/officeDocument/2006/relationships">
+  <p:cSld>
+    <p:spTree>
+      <p:nvGrpSpPr>
+        <p:cNvPr id="1" name=""/>
+        <p:cNvGrpSpPr/>
+        <p:nvPr/>
+      </p:nvGrpSpPr>
+      <p:grpSpPr/>
+      <p:pic>
+        <p:nvPicPr>
+          <p:cNvPr id="2" name="Picture 1" descr="rteu_logo_kucuk.jpg"/>
+          <p:cNvPicPr>
+            <a:picLocks noChangeAspect="1"/>
+          </p:cNvPicPr>
+          <p:nvPr/>
+        </p:nvPicPr>
+        <p:blipFill>
+          <a:blip r:embed="rId2"/>
+          <a:stretch>
+            <a:fillRect/>
+          </a:stretch>
+        </p:blipFill>
+        <p:spPr>
+          <a:xfrm>
+            <a:off x="640080" y="164592"/>
+            <a:ext cx="242773" cy="329184"/>
+          </a:xfrm>
+          <a:prstGeom prst="rect">
+            <a:avLst/>
+          </a:prstGeom>
+        </p:spPr>
+      </p:pic>
+      <p:sp>
+        <p:nvSpPr>
+          <p:cNvPr id="3" name="TextBox 2"/>
+          <p:cNvSpPr txBox="1"/>
+          <p:nvPr/>
+        </p:nvSpPr>
+        <p:spPr>
+          <a:xfrm>
+            <a:off x="1051560" y="182880"/>
+            <a:ext cx="7315200" cy="320040"/>
+          </a:xfrm>
+          <a:prstGeom prst="rect">
+            <a:avLst/>
+          </a:prstGeom>
+          <a:noFill/>
+        </p:spPr>
+        <p:txBody>
+          <a:bodyPr wrap="square" lIns="45720" rIns="45720">
+            <a:spAutoFit/>
+          </a:bodyPr>
+          <a:lstStyle/>
+          <a:p>
+            <a:r>
+              <a:rPr sz="1100" b="0">
+                <a:solidFill>
+                  <a:srgbClr val="5B6770"/>
+                </a:solidFill>
+              </a:rPr>
+              <a:t>CEN429 Güvenli Programlama · Hafta 8</a:t>
+            </a:r>
+          </a:p>
+        </p:txBody>
+      </p:sp>
+      <p:sp>
+        <p:nvSpPr>
+          <p:cNvPr id="4" name="TextBox 3"/>
+          <p:cNvSpPr txBox="1"/>
+          <p:nvPr/>
+        </p:nvSpPr>
+        <p:spPr>
+          <a:xfrm>
+            <a:off x="640080" y="6446520"/>
+            <a:ext cx="7315200" cy="274320"/>
+          </a:xfrm>
+          <a:prstGeom prst="rect">
+            <a:avLst/>
+          </a:prstGeom>
+          <a:noFill/>
+        </p:spPr>
+        <p:txBody>
+          <a:bodyPr wrap="square" lIns="45720" rIns="45720">
+            <a:spAutoFit/>
+          </a:bodyPr>
+          <a:lstStyle/>
+          <a:p>
+            <a:r>
+              <a:rPr sz="1000" b="0">
+                <a:solidFill>
+                  <a:srgbClr val="5B6770"/>
+                </a:solidFill>
+              </a:rPr>
+              <a:t>RTEÜ Bilgisayar Mühendisliği · 2026-2027 Güz</a:t>
+            </a:r>
+          </a:p>
+        </p:txBody>
+      </p:sp>
+      <p:sp>
+        <p:nvSpPr>
+          <p:cNvPr id="5" name="TextBox 4"/>
+          <p:cNvSpPr txBox="1"/>
+          <p:nvPr/>
+        </p:nvSpPr>
+        <p:spPr>
+          <a:xfrm>
+            <a:off x="10637215" y="6446520"/>
+            <a:ext cx="914400" cy="274320"/>
+          </a:xfrm>
+          <a:prstGeom prst="rect">
+            <a:avLst/>
+          </a:prstGeom>
+          <a:noFill/>
+        </p:spPr>
+        <p:txBody>
+          <a:bodyPr wrap="square" lIns="45720" rIns="45720">
+            <a:spAutoFit/>
+          </a:bodyPr>
+          <a:lstStyle/>
+          <a:p>
+            <a:pPr algn="r"/>
+            <a:r>
+              <a:rPr sz="1000" b="0">
+                <a:solidFill>
+                  <a:srgbClr val="5B6770"/>
+                </a:solidFill>
+              </a:rPr>
+              <a:t>8</a:t>
+            </a:r>
+          </a:p>
+        </p:txBody>
+      </p:sp>
+      <p:sp>
+        <p:nvSpPr>
+          <p:cNvPr id="6" name="TextBox 5"/>
+          <p:cNvSpPr txBox="1"/>
+          <p:nvPr/>
+        </p:nvSpPr>
+        <p:spPr>
+          <a:xfrm>
+            <a:off x="640080" y="548640"/>
+            <a:ext cx="10911535" cy="731520"/>
+          </a:xfrm>
+          <a:prstGeom prst="rect">
+            <a:avLst/>
+          </a:prstGeom>
+          <a:noFill/>
+        </p:spPr>
+        <p:txBody>
+          <a:bodyPr wrap="square" lIns="45720" rIns="45720" anchor="ctr">
+            <a:spAutoFit/>
+          </a:bodyPr>
+          <a:lstStyle/>
+          <a:p>
+            <a:r>
+              <a:rPr sz="2600" b="1">
+                <a:solidFill>
+                  <a:srgbClr val="006D77"/>
+                </a:solidFill>
+              </a:rPr>
+              <a:t>Sık karıştırılanlar (3)</a:t>
+            </a:r>
+          </a:p>
+        </p:txBody>
+      </p:sp>
+      <p:graphicFrame>
+        <p:nvGraphicFramePr>
+          <p:cNvPr id="7" name="Table 6"/>
+          <p:cNvGraphicFramePr>
+            <a:graphicFrameLocks noGrp="1"/>
+          </p:cNvGraphicFramePr>
+          <p:nvPr/>
+        </p:nvGraphicFramePr>
+        <p:xfrm>
+          <a:off x="640080" y="1325880"/>
+          <a:ext cx="10911534" cy="1755648"/>
+        </p:xfrm>
+        <a:graphic>
+          <a:graphicData uri="http://schemas.openxmlformats.org/drawingml/2006/table">
+            <a:tbl>
+              <a:tblPr firstRow="1" bandRow="1">
+                <a:tableStyleId>{5C22544A-7EE6-4342-B048-85BDC9FD1C3A}</a:tableStyleId>
+              </a:tblPr>
+              <a:tblGrid>
+                <a:gridCol w="2216405"/>
+                <a:gridCol w="3580347"/>
+                <a:gridCol w="5114782"/>
+              </a:tblGrid>
+              <a:tr h="351129">
+                <a:tc>
+                  <a:txBody>
+                    <a:bodyPr wrap="square"/>
+                    <a:lstStyle/>
+                    <a:p>
+                      <a:r>
+                        <a:rPr sz="1296" b="1">
+                          <a:solidFill>
+                            <a:srgbClr val="FFFFFF"/>
+                          </a:solidFill>
+                        </a:rPr>
+                        <a:t>A</a:t>
+                      </a:r>
+                    </a:p>
+                  </a:txBody>
+                  <a:tcPr marL="54864" marR="54864" marT="27432" marB="27432" anchor="ctr">
+                    <a:solidFill>
+                      <a:srgbClr val="006D77"/>
+                    </a:solidFill>
+                  </a:tcPr>
+                </a:tc>
+                <a:tc>
+                  <a:txBody>
+                    <a:bodyPr wrap="square"/>
+                    <a:lstStyle/>
+                    <a:p>
+                      <a:r>
+                        <a:rPr sz="1296" b="1">
+                          <a:solidFill>
+                            <a:srgbClr val="FFFFFF"/>
+                          </a:solidFill>
+                        </a:rPr>
+                        <a:t>B</a:t>
+                      </a:r>
+                    </a:p>
+                  </a:txBody>
+                  <a:tcPr marL="54864" marR="54864" marT="27432" marB="27432" anchor="ctr">
+                    <a:solidFill>
+                      <a:srgbClr val="006D77"/>
+                    </a:solidFill>
+                  </a:tcPr>
+                </a:tc>
+                <a:tc>
+                  <a:txBody>
+                    <a:bodyPr wrap="square"/>
+                    <a:lstStyle/>
+                    <a:p>
+                      <a:r>
+                        <a:rPr sz="1296" b="1">
+                          <a:solidFill>
+                            <a:srgbClr val="FFFFFF"/>
+                          </a:solidFill>
+                        </a:rPr>
+                        <a:t>Fark</a:t>
+                      </a:r>
+                    </a:p>
+                  </a:txBody>
+                  <a:tcPr marL="54864" marR="54864" marT="27432" marB="27432" anchor="ctr">
+                    <a:solidFill>
+                      <a:srgbClr val="006D77"/>
+                    </a:solidFill>
+                  </a:tcPr>
+                </a:tc>
+              </a:tr>
+              <a:tr h="351129">
+                <a:tc>
+                  <a:txBody>
+                    <a:bodyPr wrap="square"/>
+                    <a:lstStyle/>
+                    <a:p>
+                      <a:r>
+                        <a:rPr sz="1296" b="0">
+                          <a:solidFill>
+                            <a:srgbClr val="1F2D3A"/>
+                          </a:solidFill>
+                        </a:rPr>
+                        <a:t>Hata</a:t>
+                      </a:r>
+                    </a:p>
+                  </a:txBody>
+                  <a:tcPr marL="54864" marR="54864" marT="27432" marB="27432" anchor="ctr">
+                    <a:solidFill>
+                      <a:srgbClr val="FFFFFF"/>
+                    </a:solidFill>
+                  </a:tcPr>
+                </a:tc>
+                <a:tc>
+                  <a:txBody>
+                    <a:bodyPr wrap="square"/>
+                    <a:lstStyle/>
+                    <a:p>
+                      <a:r>
+                        <a:rPr sz="1296" b="0">
+                          <a:solidFill>
+                            <a:srgbClr val="1F2D3A"/>
+                          </a:solidFill>
+                        </a:rPr>
+                        <a:t>Zafiyet</a:t>
+                      </a:r>
+                    </a:p>
+                  </a:txBody>
+                  <a:tcPr marL="54864" marR="54864" marT="27432" marB="27432" anchor="ctr">
+                    <a:solidFill>
+                      <a:srgbClr val="FFFFFF"/>
+                    </a:solidFill>
+                  </a:tcPr>
+                </a:tc>
+                <a:tc>
+                  <a:txBody>
+                    <a:bodyPr wrap="square"/>
+                    <a:lstStyle/>
+                    <a:p>
+                      <a:r>
+                        <a:rPr sz="1296" b="0">
+                          <a:solidFill>
+                            <a:srgbClr val="1F2D3A"/>
+                          </a:solidFill>
+                        </a:rPr>
+                        <a:t>Kötüye kullanılabilir hata</a:t>
+                      </a:r>
+                    </a:p>
+                  </a:txBody>
+                  <a:tcPr marL="54864" marR="54864" marT="27432" marB="27432" anchor="ctr">
+                    <a:solidFill>
+                      <a:srgbClr val="FFFFFF"/>
+                    </a:solidFill>
+                  </a:tcPr>
+                </a:tc>
+              </a:tr>
+              <a:tr h="351129">
+                <a:tc>
+                  <a:txBody>
+                    <a:bodyPr wrap="square"/>
+                    <a:lstStyle/>
+                    <a:p>
+                      <a:r>
+                        <a:rPr sz="1296" b="0">
+                          <a:solidFill>
+                            <a:srgbClr val="1F2D3A"/>
+                          </a:solidFill>
+                        </a:rPr>
+                        <a:t>Kara kutu</a:t>
+                      </a:r>
+                    </a:p>
+                  </a:txBody>
+                  <a:tcPr marL="54864" marR="54864" marT="27432" marB="27432" anchor="ctr">
+                    <a:solidFill>
+                      <a:srgbClr val="EEF7F8"/>
+                    </a:solidFill>
+                  </a:tcPr>
+                </a:tc>
+                <a:tc>
+                  <a:txBody>
+                    <a:bodyPr wrap="square"/>
+                    <a:lstStyle/>
+                    <a:p>
+                      <a:r>
+                        <a:rPr sz="1296" b="0">
+                          <a:solidFill>
+                            <a:srgbClr val="1F2D3A"/>
+                          </a:solidFill>
+                        </a:rPr>
+                        <a:t>Beyaz kutu (MATE)</a:t>
+                      </a:r>
+                    </a:p>
+                  </a:txBody>
+                  <a:tcPr marL="54864" marR="54864" marT="27432" marB="27432" anchor="ctr">
+                    <a:solidFill>
+                      <a:srgbClr val="EEF7F8"/>
+                    </a:solidFill>
+                  </a:tcPr>
+                </a:tc>
+                <a:tc>
+                  <a:txBody>
+                    <a:bodyPr wrap="square"/>
+                    <a:lstStyle/>
+                    <a:p>
+                      <a:r>
+                        <a:rPr sz="1296" b="0">
+                          <a:solidFill>
+                            <a:srgbClr val="1F2D3A"/>
+                          </a:solidFill>
+                        </a:rPr>
+                        <a:t>Programa sahip</a:t>
+                      </a:r>
+                    </a:p>
+                  </a:txBody>
+                  <a:tcPr marL="54864" marR="54864" marT="27432" marB="27432" anchor="ctr">
+                    <a:solidFill>
+                      <a:srgbClr val="EEF7F8"/>
+                    </a:solidFill>
+                  </a:tcPr>
+                </a:tc>
+              </a:tr>
+              <a:tr h="351129">
+                <a:tc>
+                  <a:txBody>
+                    <a:bodyPr wrap="square"/>
+                    <a:lstStyle/>
+                    <a:p>
+                      <a:r>
+                        <a:rPr sz="1296" b="0">
+                          <a:solidFill>
+                            <a:srgbClr val="1F2D3A"/>
+                          </a:solidFill>
+                        </a:rPr>
+                        <a:t>Simetrik</a:t>
+                      </a:r>
+                    </a:p>
+                  </a:txBody>
+                  <a:tcPr marL="54864" marR="54864" marT="27432" marB="27432" anchor="ctr">
+                    <a:solidFill>
+                      <a:srgbClr val="FFFFFF"/>
+                    </a:solidFill>
+                  </a:tcPr>
+                </a:tc>
+                <a:tc>
+                  <a:txBody>
+                    <a:bodyPr wrap="square"/>
+                    <a:lstStyle/>
+                    <a:p>
+                      <a:r>
+                        <a:rPr sz="1296" b="0">
+                          <a:solidFill>
+                            <a:srgbClr val="1F2D3A"/>
+                          </a:solidFill>
+                        </a:rPr>
+                        <a:t>Asimetrik</a:t>
+                      </a:r>
+                    </a:p>
+                  </a:txBody>
+                  <a:tcPr marL="54864" marR="54864" marT="27432" marB="27432" anchor="ctr">
+                    <a:solidFill>
+                      <a:srgbClr val="FFFFFF"/>
+                    </a:solidFill>
+                  </a:tcPr>
+                </a:tc>
+                <a:tc>
+                  <a:txBody>
+                    <a:bodyPr wrap="square"/>
+                    <a:lstStyle/>
+                    <a:p>
+                      <a:r>
+                        <a:rPr sz="1296" b="0">
+                          <a:solidFill>
+                            <a:srgbClr val="1F2D3A"/>
+                          </a:solidFill>
+                        </a:rPr>
+                        <a:t>Tek / çift anahtar</a:t>
+                      </a:r>
+                    </a:p>
+                  </a:txBody>
+                  <a:tcPr marL="54864" marR="54864" marT="27432" marB="27432" anchor="ctr">
+                    <a:solidFill>
+                      <a:srgbClr val="FFFFFF"/>
+                    </a:solidFill>
+                  </a:tcPr>
+                </a:tc>
+              </a:tr>
+              <a:tr h="351132">
+                <a:tc>
+                  <a:txBody>
+                    <a:bodyPr wrap="square"/>
+                    <a:lstStyle/>
+                    <a:p>
+                      <a:r>
+                        <a:rPr sz="1296" b="0">
+                          <a:solidFill>
+                            <a:srgbClr val="1F2D3A"/>
+                          </a:solidFill>
+                        </a:rPr>
+                        <a:t>AEAD</a:t>
+                      </a:r>
+                    </a:p>
+                  </a:txBody>
+                  <a:tcPr marL="54864" marR="54864" marT="27432" marB="27432" anchor="ctr">
+                    <a:solidFill>
+                      <a:srgbClr val="EEF7F8"/>
+                    </a:solidFill>
+                  </a:tcPr>
+                </a:tc>
+                <a:tc>
+                  <a:txBody>
+                    <a:bodyPr wrap="square"/>
+                    <a:lstStyle/>
+                    <a:p>
+                      <a:r>
+                        <a:rPr sz="1296" b="0">
+                          <a:solidFill>
+                            <a:srgbClr val="1F2D3A"/>
+                          </a:solidFill>
+                        </a:rPr>
+                        <a:t>Yalnız şifreleme</a:t>
+                      </a:r>
+                    </a:p>
+                  </a:txBody>
+                  <a:tcPr marL="54864" marR="54864" marT="27432" marB="27432" anchor="ctr">
+                    <a:solidFill>
+                      <a:srgbClr val="EEF7F8"/>
+                    </a:solidFill>
+                  </a:tcPr>
+                </a:tc>
+                <a:tc>
+                  <a:txBody>
+                    <a:bodyPr wrap="square"/>
+                    <a:lstStyle/>
+                    <a:p>
+                      <a:r>
+                        <a:rPr sz="1296" b="0">
+                          <a:solidFill>
+                            <a:srgbClr val="1F2D3A"/>
+                          </a:solidFill>
+                        </a:rPr>
+                        <a:t>+ bütünlük</a:t>
+                      </a:r>
+                    </a:p>
+                  </a:txBody>
+                  <a:tcPr marL="54864" marR="54864" marT="27432" marB="27432" anchor="ctr">
+                    <a:solidFill>
+                      <a:srgbClr val="EEF7F8"/>
+                    </a:solidFill>
+                  </a:tcPr>
+                </a:tc>
+              </a:tr>
+            </a:tbl>
+          </a:graphicData>
+        </a:graphic>
+      </p:graphicFrame>
+    </p:spTree>
+  </p:cSld>
+  <p:clrMapOvr>
+    <a:masterClrMapping/>
+  </p:clrMapOvr>
+</p:sld>
+</file>
+
+<file path=ppt/slides/slide9.xml><?xml version="1.0" encoding="utf-8"?>
+<p:sld xmlns:a="http://schemas.openxmlformats.org/drawingml/2006/main" xmlns:p="http://schemas.openxmlformats.org/presentationml/2006/main" xmlns:r="http://schemas.openxmlformats.org/officeDocument/2006/relationships">
+  <p:cSld>
+    <p:spTree>
+      <p:nvGrpSpPr>
+        <p:cNvPr id="1" name=""/>
+        <p:cNvGrpSpPr/>
+        <p:nvPr/>
+      </p:nvGrpSpPr>
+      <p:grpSpPr/>
+      <p:pic>
+        <p:nvPicPr>
+          <p:cNvPr id="2" name="Picture 1" descr="rteu_logo_kucuk.jpg"/>
+          <p:cNvPicPr>
+            <a:picLocks noChangeAspect="1"/>
+          </p:cNvPicPr>
+          <p:nvPr/>
+        </p:nvPicPr>
+        <p:blipFill>
+          <a:blip r:embed="rId2"/>
+          <a:stretch>
+            <a:fillRect/>
+          </a:stretch>
+        </p:blipFill>
+        <p:spPr>
+          <a:xfrm>
+            <a:off x="640080" y="164592"/>
+            <a:ext cx="242773" cy="329184"/>
+          </a:xfrm>
+          <a:prstGeom prst="rect">
+            <a:avLst/>
+          </a:prstGeom>
+        </p:spPr>
+      </p:pic>
+      <p:sp>
+        <p:nvSpPr>
+          <p:cNvPr id="3" name="TextBox 2"/>
+          <p:cNvSpPr txBox="1"/>
+          <p:nvPr/>
+        </p:nvSpPr>
+        <p:spPr>
+          <a:xfrm>
+            <a:off x="1051560" y="182880"/>
+            <a:ext cx="7315200" cy="320040"/>
+          </a:xfrm>
+          <a:prstGeom prst="rect">
+            <a:avLst/>
+          </a:prstGeom>
+          <a:noFill/>
+        </p:spPr>
+        <p:txBody>
+          <a:bodyPr wrap="square" lIns="45720" rIns="45720">
+            <a:spAutoFit/>
+          </a:bodyPr>
+          <a:lstStyle/>
+          <a:p>
+            <a:r>
+              <a:rPr sz="1100" b="0">
+                <a:solidFill>
+                  <a:srgbClr val="5B6770"/>
+                </a:solidFill>
+              </a:rPr>
+              <a:t>CEN429 Güvenli Programlama · Hafta 8</a:t>
+            </a:r>
+          </a:p>
+        </p:txBody>
+      </p:sp>
+      <p:sp>
+        <p:nvSpPr>
+          <p:cNvPr id="4" name="TextBox 3"/>
+          <p:cNvSpPr txBox="1"/>
+          <p:nvPr/>
+        </p:nvSpPr>
+        <p:spPr>
+          <a:xfrm>
+            <a:off x="640080" y="6446520"/>
+            <a:ext cx="7315200" cy="274320"/>
+          </a:xfrm>
+          <a:prstGeom prst="rect">
+            <a:avLst/>
+          </a:prstGeom>
+          <a:noFill/>
+        </p:spPr>
+        <p:txBody>
+          <a:bodyPr wrap="square" lIns="45720" rIns="45720">
+            <a:spAutoFit/>
+          </a:bodyPr>
+          <a:lstStyle/>
+          <a:p>
+            <a:r>
+              <a:rPr sz="1000" b="0">
+                <a:solidFill>
+                  <a:srgbClr val="5B6770"/>
+                </a:solidFill>
+              </a:rPr>
+              <a:t>RTEÜ Bilgisayar Mühendisliği · 2026-2027 Güz</a:t>
+            </a:r>
+          </a:p>
+        </p:txBody>
+      </p:sp>
+      <p:sp>
+        <p:nvSpPr>
+          <p:cNvPr id="5" name="TextBox 4"/>
+          <p:cNvSpPr txBox="1"/>
+          <p:nvPr/>
+        </p:nvSpPr>
+        <p:spPr>
+          <a:xfrm>
+            <a:off x="10637215" y="6446520"/>
+            <a:ext cx="914400" cy="274320"/>
+          </a:xfrm>
+          <a:prstGeom prst="rect">
+            <a:avLst/>
+          </a:prstGeom>
+          <a:noFill/>
+        </p:spPr>
+        <p:txBody>
+          <a:bodyPr wrap="square" lIns="45720" rIns="45720">
+            <a:spAutoFit/>
+          </a:bodyPr>
+          <a:lstStyle/>
+          <a:p>
+            <a:pPr algn="r"/>
+            <a:r>
+              <a:rPr sz="1000" b="0">
+                <a:solidFill>
+                  <a:srgbClr val="5B6770"/>
+                </a:solidFill>
+              </a:rPr>
+              <a:t>9</a:t>
+            </a:r>
+          </a:p>
+        </p:txBody>
+      </p:sp>
+      <p:sp>
+        <p:nvSpPr>
+          <p:cNvPr id="6" name="TextBox 5"/>
+          <p:cNvSpPr txBox="1"/>
+          <p:nvPr/>
+        </p:nvSpPr>
+        <p:spPr>
+          <a:xfrm>
+            <a:off x="640080" y="548640"/>
+            <a:ext cx="10911535" cy="731520"/>
+          </a:xfrm>
+          <a:prstGeom prst="rect">
+            <a:avLst/>
+          </a:prstGeom>
+          <a:noFill/>
+        </p:spPr>
+        <p:txBody>
+          <a:bodyPr wrap="square" lIns="45720" rIns="45720" anchor="ctr">
+            <a:spAutoFit/>
+          </a:bodyPr>
+          <a:lstStyle/>
+          <a:p>
+            <a:r>
+              <a:rPr sz="3000" b="1">
+                <a:solidFill>
+                  <a:srgbClr val="006D77"/>
+                </a:solidFill>
+              </a:rPr>
+              <a:t>Soru tipleri — şema</a:t>
+            </a:r>
+          </a:p>
+        </p:txBody>
+      </p:sp>
+      <p:pic>
+        <p:nvPicPr>
+          <p:cNvPr id="7" name="Picture 6" descr="h08-02-soru-tipleri.png"/>
+          <p:cNvPicPr>
+            <a:picLocks noChangeAspect="1"/>
+          </p:cNvPicPr>
+          <p:nvPr/>
+        </p:nvPicPr>
+        <p:blipFill>
+          <a:blip r:embed="rId3"/>
+          <a:stretch>
+            <a:fillRect/>
+          </a:stretch>
+        </p:blipFill>
+        <p:spPr>
+          <a:xfrm>
+            <a:off x="640080" y="1325880"/>
+            <a:ext cx="10911535" cy="2380977"/>
+          </a:xfrm>
+          <a:prstGeom prst="rect">
+            <a:avLst/>
+          </a:prstGeom>
+        </p:spPr>
+      </p:pic>
     </p:spTree>
   </p:cSld>
   <p:clrMapOvr>
